--- a/3. Основы Кубернетес/presentation.pptx
+++ b/3. Основы Кубернетес/presentation.pptx
@@ -5,27 +5,28 @@
     <p:sldMasterId id="2147483648" r:id="rId4"/>
   </p:sldMasterIdLst>
   <p:notesMasterIdLst>
-    <p:notesMasterId r:id="rId23"/>
+    <p:notesMasterId r:id="rId24"/>
   </p:notesMasterIdLst>
   <p:sldIdLst>
     <p:sldId id="271" r:id="rId5"/>
     <p:sldId id="337" r:id="rId6"/>
-    <p:sldId id="397" r:id="rId7"/>
-    <p:sldId id="387" r:id="rId8"/>
-    <p:sldId id="386" r:id="rId9"/>
-    <p:sldId id="388" r:id="rId10"/>
-    <p:sldId id="389" r:id="rId11"/>
-    <p:sldId id="390" r:id="rId12"/>
-    <p:sldId id="391" r:id="rId13"/>
-    <p:sldId id="392" r:id="rId14"/>
-    <p:sldId id="393" r:id="rId15"/>
-    <p:sldId id="394" r:id="rId16"/>
-    <p:sldId id="396" r:id="rId17"/>
-    <p:sldId id="395" r:id="rId18"/>
-    <p:sldId id="398" r:id="rId19"/>
-    <p:sldId id="399" r:id="rId20"/>
-    <p:sldId id="357" r:id="rId21"/>
-    <p:sldId id="292" r:id="rId22"/>
+    <p:sldId id="400" r:id="rId7"/>
+    <p:sldId id="397" r:id="rId8"/>
+    <p:sldId id="387" r:id="rId9"/>
+    <p:sldId id="386" r:id="rId10"/>
+    <p:sldId id="388" r:id="rId11"/>
+    <p:sldId id="389" r:id="rId12"/>
+    <p:sldId id="390" r:id="rId13"/>
+    <p:sldId id="391" r:id="rId14"/>
+    <p:sldId id="392" r:id="rId15"/>
+    <p:sldId id="393" r:id="rId16"/>
+    <p:sldId id="394" r:id="rId17"/>
+    <p:sldId id="396" r:id="rId18"/>
+    <p:sldId id="395" r:id="rId19"/>
+    <p:sldId id="398" r:id="rId20"/>
+    <p:sldId id="399" r:id="rId21"/>
+    <p:sldId id="357" r:id="rId22"/>
+    <p:sldId id="292" r:id="rId23"/>
   </p:sldIdLst>
   <p:sldSz cx="12192000" cy="6858000"/>
   <p:notesSz cx="6858000" cy="9144000"/>
@@ -135,6 +136,7 @@
         <p14:section name="Раздел без заголовка" id="{C2983B72-E04A-42BB-87EF-4167FEDB2BCF}">
           <p14:sldIdLst>
             <p14:sldId id="337"/>
+            <p14:sldId id="400"/>
             <p14:sldId id="397"/>
             <p14:sldId id="387"/>
             <p14:sldId id="386"/>
@@ -327,7 +329,7 @@
             <a:fld id="{73261BF4-8B2C-784B-9959-B59A059012C3}" type="datetimeFigureOut">
               <a:rPr lang="x-none" smtClean="0"/>
               <a:pPr/>
-              <a:t>23.09.2026</a:t>
+              <a:t>24.09.2026</a:t>
             </a:fld>
             <a:endParaRPr lang="x-none"/>
           </a:p>
@@ -596,6 +598,91 @@
 </p:notesMaster>
 </file>
 
+<file path=ppt/notesSlides/notesSlide1.xml><?xml version="1.0" encoding="utf-8"?>
+<p:notes xmlns:a="http://schemas.openxmlformats.org/drawingml/2006/main" xmlns:r="http://schemas.openxmlformats.org/officeDocument/2006/relationships" xmlns:p="http://schemas.openxmlformats.org/presentationml/2006/main">
+  <p:cSld>
+    <p:spTree>
+      <p:nvGrpSpPr>
+        <p:cNvPr id="1" name=""/>
+        <p:cNvGrpSpPr/>
+        <p:nvPr/>
+      </p:nvGrpSpPr>
+      <p:grpSpPr>
+        <a:xfrm>
+          <a:off x="0" y="0"/>
+          <a:ext cx="0" cy="0"/>
+          <a:chOff x="0" y="0"/>
+          <a:chExt cx="0" cy="0"/>
+        </a:xfrm>
+      </p:grpSpPr>
+      <p:sp>
+        <p:nvSpPr>
+          <p:cNvPr id="2" name="Образ слайда 1"/>
+          <p:cNvSpPr>
+            <a:spLocks noGrp="1" noRot="1" noChangeAspect="1"/>
+          </p:cNvSpPr>
+          <p:nvPr>
+            <p:ph type="sldImg"/>
+          </p:nvPr>
+        </p:nvSpPr>
+        <p:spPr/>
+      </p:sp>
+      <p:sp>
+        <p:nvSpPr>
+          <p:cNvPr id="3" name="Заметки 2"/>
+          <p:cNvSpPr>
+            <a:spLocks noGrp="1"/>
+          </p:cNvSpPr>
+          <p:nvPr>
+            <p:ph type="body" idx="1"/>
+          </p:nvPr>
+        </p:nvSpPr>
+        <p:spPr/>
+        <p:txBody>
+          <a:bodyPr/>
+          <a:lstStyle/>
+          <a:p>
+            <a:endParaRPr lang="ru-RU" dirty="0"/>
+          </a:p>
+        </p:txBody>
+      </p:sp>
+      <p:sp>
+        <p:nvSpPr>
+          <p:cNvPr id="4" name="Номер слайда 3"/>
+          <p:cNvSpPr>
+            <a:spLocks noGrp="1"/>
+          </p:cNvSpPr>
+          <p:nvPr>
+            <p:ph type="sldNum" sz="quarter" idx="5"/>
+          </p:nvPr>
+        </p:nvSpPr>
+        <p:spPr/>
+        <p:txBody>
+          <a:bodyPr/>
+          <a:lstStyle/>
+          <a:p>
+            <a:fld id="{6C748903-8EB5-294E-A216-6B54B0368783}" type="slidenum">
+              <a:rPr lang="x-none" smtClean="0"/>
+              <a:pPr/>
+              <a:t>3</a:t>
+            </a:fld>
+            <a:endParaRPr lang="x-none"/>
+          </a:p>
+        </p:txBody>
+      </p:sp>
+    </p:spTree>
+    <p:extLst>
+      <p:ext uri="{BB962C8B-B14F-4D97-AF65-F5344CB8AC3E}">
+        <p14:creationId xmlns:p14="http://schemas.microsoft.com/office/powerpoint/2010/main" val="4075488574"/>
+      </p:ext>
+    </p:extLst>
+  </p:cSld>
+  <p:clrMapOvr>
+    <a:masterClrMapping/>
+  </p:clrMapOvr>
+</p:notes>
+</file>
+
 <file path=ppt/slideLayouts/slideLayout1.xml><?xml version="1.0" encoding="utf-8"?>
 <p:sldLayout xmlns:a="http://schemas.openxmlformats.org/drawingml/2006/main" xmlns:r="http://schemas.openxmlformats.org/officeDocument/2006/relationships" xmlns:p="http://schemas.openxmlformats.org/presentationml/2006/main" preserve="1" userDrawn="1">
   <p:cSld name="Обложка">
@@ -13668,7 +13755,7 @@
             <a:fld id="{53063DFB-8595-A44B-9F09-A50FA310E559}" type="datetimeFigureOut">
               <a:rPr lang="x-none" smtClean="0"/>
               <a:pPr/>
-              <a:t>23.09.2026</a:t>
+              <a:t>24.09.2026</a:t>
             </a:fld>
             <a:endParaRPr lang="x-none"/>
           </a:p>
@@ -14404,8 +14491,19 @@
                 <a:latin typeface="Times New Roman" pitchFamily="18" charset="0"/>
                 <a:cs typeface="Times New Roman" pitchFamily="18" charset="0"/>
               </a:rPr>
-              <a:t>Докер-композиции и сеть</a:t>
-            </a:r>
+              <a:t>Основы </a:t>
+            </a:r>
+            <a:r>
+              <a:rPr lang="en-US" dirty="0">
+                <a:latin typeface="Times New Roman" pitchFamily="18" charset="0"/>
+                <a:cs typeface="Times New Roman" pitchFamily="18" charset="0"/>
+              </a:rPr>
+              <a:t>Kubernetes</a:t>
+            </a:r>
+            <a:endParaRPr lang="ru-RU" dirty="0">
+              <a:latin typeface="Times New Roman" pitchFamily="18" charset="0"/>
+              <a:cs typeface="Times New Roman" pitchFamily="18" charset="0"/>
+            </a:endParaRPr>
           </a:p>
         </p:txBody>
       </p:sp>
@@ -14432,11 +14530,634 @@
           <a:p>
             <a:r>
               <a:rPr lang="ru-RU" sz="1000" dirty="0"/>
-              <a:t>Предпосылки появления</a:t>
-            </a:r>
-            <a:r>
-              <a:rPr lang="en-US" sz="1000" dirty="0"/>
-              <a:t> docker-compose</a:t>
+              <a:t>Ловим ошибку в сервисе</a:t>
+            </a:r>
+            <a:endParaRPr lang="ru-RU" dirty="0"/>
+          </a:p>
+        </p:txBody>
+      </p:sp>
+      <p:sp>
+        <p:nvSpPr>
+          <p:cNvPr id="20" name="Заголовок 2">
+            <a:extLst>
+              <a:ext uri="{FF2B5EF4-FFF2-40B4-BE49-F238E27FC236}">
+                <a16:creationId xmlns:a16="http://schemas.microsoft.com/office/drawing/2014/main" id="{EB3254AC-E053-4C4B-B7AA-603BB6FF23A1}"/>
+              </a:ext>
+            </a:extLst>
+          </p:cNvPr>
+          <p:cNvSpPr>
+            <a:spLocks noGrp="1"/>
+          </p:cNvSpPr>
+          <p:nvPr>
+            <p:ph type="title"/>
+          </p:nvPr>
+        </p:nvSpPr>
+        <p:spPr>
+          <a:xfrm>
+            <a:off x="585897" y="1405055"/>
+            <a:ext cx="11057955" cy="644244"/>
+          </a:xfrm>
+        </p:spPr>
+        <p:txBody>
+          <a:bodyPr>
+            <a:normAutofit/>
+          </a:bodyPr>
+          <a:lstStyle/>
+          <a:p>
+            <a:r>
+              <a:rPr lang="ru-RU" sz="2200" dirty="0"/>
+              <a:t>Ловим ошибку в сервисе</a:t>
+            </a:r>
+          </a:p>
+        </p:txBody>
+      </p:sp>
+      <p:sp>
+        <p:nvSpPr>
+          <p:cNvPr id="26" name="Текст 3">
+            <a:extLst>
+              <a:ext uri="{FF2B5EF4-FFF2-40B4-BE49-F238E27FC236}">
+                <a16:creationId xmlns:a16="http://schemas.microsoft.com/office/drawing/2014/main" id="{A660D6C9-AC61-42D4-A1A4-22F08E8A98E0}"/>
+              </a:ext>
+            </a:extLst>
+          </p:cNvPr>
+          <p:cNvSpPr txBox="1">
+            <a:spLocks/>
+          </p:cNvSpPr>
+          <p:nvPr/>
+        </p:nvSpPr>
+        <p:spPr>
+          <a:xfrm>
+            <a:off x="548148" y="1946429"/>
+            <a:ext cx="6538452" cy="4614391"/>
+          </a:xfrm>
+          <a:prstGeom prst="rect">
+            <a:avLst/>
+          </a:prstGeom>
+        </p:spPr>
+        <p:txBody>
+          <a:bodyPr vert="horz" lIns="0" tIns="0" rIns="0" bIns="45720" numCol="1" spcCol="252000" rtlCol="0">
+            <a:noAutofit/>
+          </a:bodyPr>
+          <a:lstStyle>
+            <a:lvl1pPr marL="0" marR="0" indent="0" algn="l" defTabSz="914400" rtl="0" eaLnBrk="1" fontAlgn="auto" latinLnBrk="0" hangingPunct="1">
+              <a:lnSpc>
+                <a:spcPct val="100000"/>
+              </a:lnSpc>
+              <a:spcBef>
+                <a:spcPts val="1200"/>
+              </a:spcBef>
+              <a:spcAft>
+                <a:spcPts val="0"/>
+              </a:spcAft>
+              <a:buClrTx/>
+              <a:buSzTx/>
+              <a:buFont typeface="Arial" panose="020B0604020202020204" pitchFamily="34" charset="0"/>
+              <a:buNone/>
+              <a:tabLst/>
+              <a:defRPr sz="1300" b="0" i="0" kern="1200">
+                <a:solidFill>
+                  <a:srgbClr val="0E2D69"/>
+                </a:solidFill>
+                <a:latin typeface="HSE Sans" panose="02000000000000000000" pitchFamily="2" charset="0"/>
+                <a:ea typeface="+mn-ea"/>
+                <a:cs typeface="+mn-cs"/>
+              </a:defRPr>
+            </a:lvl1pPr>
+            <a:lvl2pPr marL="457200" indent="0" algn="l" defTabSz="914400" rtl="0" eaLnBrk="1" latinLnBrk="0" hangingPunct="1">
+              <a:lnSpc>
+                <a:spcPct val="100000"/>
+              </a:lnSpc>
+              <a:spcBef>
+                <a:spcPts val="1000"/>
+              </a:spcBef>
+              <a:buFont typeface="Arial" panose="020B0604020202020204" pitchFamily="34" charset="0"/>
+              <a:buNone/>
+              <a:defRPr sz="1300" b="0" i="0" kern="1200">
+                <a:solidFill>
+                  <a:srgbClr val="0E2D69"/>
+                </a:solidFill>
+                <a:latin typeface="HSE Sans" panose="02000000000000000000" pitchFamily="2" charset="0"/>
+                <a:ea typeface="+mn-ea"/>
+                <a:cs typeface="+mn-cs"/>
+              </a:defRPr>
+            </a:lvl2pPr>
+            <a:lvl3pPr marL="914400" indent="0" algn="l" defTabSz="914400" rtl="0" eaLnBrk="1" latinLnBrk="0" hangingPunct="1">
+              <a:lnSpc>
+                <a:spcPct val="100000"/>
+              </a:lnSpc>
+              <a:spcBef>
+                <a:spcPts val="1000"/>
+              </a:spcBef>
+              <a:buFont typeface="Arial" panose="020B0604020202020204" pitchFamily="34" charset="0"/>
+              <a:buNone/>
+              <a:defRPr sz="1300" b="0" i="0" kern="1200">
+                <a:solidFill>
+                  <a:srgbClr val="0E2D69"/>
+                </a:solidFill>
+                <a:latin typeface="HSE Sans" panose="02000000000000000000" pitchFamily="2" charset="0"/>
+                <a:ea typeface="+mn-ea"/>
+                <a:cs typeface="+mn-cs"/>
+              </a:defRPr>
+            </a:lvl3pPr>
+            <a:lvl4pPr marL="1371600" indent="0" algn="l" defTabSz="914400" rtl="0" eaLnBrk="1" latinLnBrk="0" hangingPunct="1">
+              <a:lnSpc>
+                <a:spcPct val="100000"/>
+              </a:lnSpc>
+              <a:spcBef>
+                <a:spcPts val="1000"/>
+              </a:spcBef>
+              <a:buFont typeface="Arial" panose="020B0604020202020204" pitchFamily="34" charset="0"/>
+              <a:buNone/>
+              <a:defRPr sz="1300" b="0" i="0" kern="1200">
+                <a:solidFill>
+                  <a:srgbClr val="0E2D69"/>
+                </a:solidFill>
+                <a:latin typeface="HSE Sans" panose="02000000000000000000" pitchFamily="2" charset="0"/>
+                <a:ea typeface="+mn-ea"/>
+                <a:cs typeface="+mn-cs"/>
+              </a:defRPr>
+            </a:lvl4pPr>
+            <a:lvl5pPr marL="1828800" indent="0" algn="l" defTabSz="914400" rtl="0" eaLnBrk="1" latinLnBrk="0" hangingPunct="1">
+              <a:lnSpc>
+                <a:spcPct val="100000"/>
+              </a:lnSpc>
+              <a:spcBef>
+                <a:spcPts val="1000"/>
+              </a:spcBef>
+              <a:buFont typeface="Arial" panose="020B0604020202020204" pitchFamily="34" charset="0"/>
+              <a:buNone/>
+              <a:defRPr sz="1300" b="0" i="0" kern="1200">
+                <a:solidFill>
+                  <a:srgbClr val="0E2D69"/>
+                </a:solidFill>
+                <a:latin typeface="HSE Sans" panose="02000000000000000000" pitchFamily="2" charset="0"/>
+                <a:ea typeface="+mn-ea"/>
+                <a:cs typeface="+mn-cs"/>
+              </a:defRPr>
+            </a:lvl5pPr>
+            <a:lvl6pPr marL="2514600" indent="-228600" algn="l" defTabSz="914400" rtl="0" eaLnBrk="1" latinLnBrk="0" hangingPunct="1">
+              <a:lnSpc>
+                <a:spcPct val="90000"/>
+              </a:lnSpc>
+              <a:spcBef>
+                <a:spcPts val="500"/>
+              </a:spcBef>
+              <a:buFont typeface="Arial" panose="020B0604020202020204" pitchFamily="34" charset="0"/>
+              <a:buChar char="•"/>
+              <a:defRPr sz="1800" kern="1200">
+                <a:solidFill>
+                  <a:schemeClr val="tx1"/>
+                </a:solidFill>
+                <a:latin typeface="+mn-lt"/>
+                <a:ea typeface="+mn-ea"/>
+                <a:cs typeface="+mn-cs"/>
+              </a:defRPr>
+            </a:lvl6pPr>
+            <a:lvl7pPr marL="2971800" indent="-228600" algn="l" defTabSz="914400" rtl="0" eaLnBrk="1" latinLnBrk="0" hangingPunct="1">
+              <a:lnSpc>
+                <a:spcPct val="90000"/>
+              </a:lnSpc>
+              <a:spcBef>
+                <a:spcPts val="500"/>
+              </a:spcBef>
+              <a:buFont typeface="Arial" panose="020B0604020202020204" pitchFamily="34" charset="0"/>
+              <a:buChar char="•"/>
+              <a:defRPr sz="1800" kern="1200">
+                <a:solidFill>
+                  <a:schemeClr val="tx1"/>
+                </a:solidFill>
+                <a:latin typeface="+mn-lt"/>
+                <a:ea typeface="+mn-ea"/>
+                <a:cs typeface="+mn-cs"/>
+              </a:defRPr>
+            </a:lvl7pPr>
+            <a:lvl8pPr marL="3429000" indent="-228600" algn="l" defTabSz="914400" rtl="0" eaLnBrk="1" latinLnBrk="0" hangingPunct="1">
+              <a:lnSpc>
+                <a:spcPct val="90000"/>
+              </a:lnSpc>
+              <a:spcBef>
+                <a:spcPts val="500"/>
+              </a:spcBef>
+              <a:buFont typeface="Arial" panose="020B0604020202020204" pitchFamily="34" charset="0"/>
+              <a:buChar char="•"/>
+              <a:defRPr sz="1800" kern="1200">
+                <a:solidFill>
+                  <a:schemeClr val="tx1"/>
+                </a:solidFill>
+                <a:latin typeface="+mn-lt"/>
+                <a:ea typeface="+mn-ea"/>
+                <a:cs typeface="+mn-cs"/>
+              </a:defRPr>
+            </a:lvl8pPr>
+            <a:lvl9pPr marL="3886200" indent="-228600" algn="l" defTabSz="914400" rtl="0" eaLnBrk="1" latinLnBrk="0" hangingPunct="1">
+              <a:lnSpc>
+                <a:spcPct val="90000"/>
+              </a:lnSpc>
+              <a:spcBef>
+                <a:spcPts val="500"/>
+              </a:spcBef>
+              <a:buFont typeface="Arial" panose="020B0604020202020204" pitchFamily="34" charset="0"/>
+              <a:buChar char="•"/>
+              <a:defRPr sz="1800" kern="1200">
+                <a:solidFill>
+                  <a:schemeClr val="tx1"/>
+                </a:solidFill>
+                <a:latin typeface="+mn-lt"/>
+                <a:ea typeface="+mn-ea"/>
+                <a:cs typeface="+mn-cs"/>
+              </a:defRPr>
+            </a:lvl9pPr>
+          </a:lstStyle>
+          <a:p>
+            <a:pPr>
+              <a:spcBef>
+                <a:spcPts val="600"/>
+              </a:spcBef>
+              <a:spcAft>
+                <a:spcPts val="600"/>
+              </a:spcAft>
+            </a:pPr>
+            <a:r>
+              <a:rPr lang="en-US" sz="1800" dirty="0">
+                <a:solidFill>
+                  <a:schemeClr val="bg1"/>
+                </a:solidFill>
+                <a:highlight>
+                  <a:srgbClr val="000000"/>
+                </a:highlight>
+                <a:latin typeface="Times New Roman" pitchFamily="18" charset="0"/>
+                <a:cs typeface="Times New Roman" pitchFamily="18" charset="0"/>
+              </a:rPr>
+              <a:t>kubectl delete svc web</a:t>
+            </a:r>
+          </a:p>
+          <a:p>
+            <a:pPr>
+              <a:spcBef>
+                <a:spcPts val="600"/>
+              </a:spcBef>
+              <a:spcAft>
+                <a:spcPts val="600"/>
+              </a:spcAft>
+            </a:pPr>
+            <a:r>
+              <a:rPr lang="en-US" sz="1800" dirty="0">
+                <a:solidFill>
+                  <a:schemeClr val="bg1"/>
+                </a:solidFill>
+                <a:highlight>
+                  <a:srgbClr val="000000"/>
+                </a:highlight>
+                <a:latin typeface="Times New Roman" pitchFamily="18" charset="0"/>
+                <a:cs typeface="Times New Roman" pitchFamily="18" charset="0"/>
+              </a:rPr>
+              <a:t>kubectl apply -f </a:t>
+            </a:r>
+            <a:r>
+              <a:rPr lang="en-US" sz="1800" dirty="0" err="1">
+                <a:solidFill>
+                  <a:schemeClr val="bg1"/>
+                </a:solidFill>
+                <a:highlight>
+                  <a:srgbClr val="000000"/>
+                </a:highlight>
+                <a:latin typeface="Times New Roman" pitchFamily="18" charset="0"/>
+                <a:cs typeface="Times New Roman" pitchFamily="18" charset="0"/>
+              </a:rPr>
+              <a:t>service.yaml</a:t>
+            </a:r>
+            <a:endParaRPr lang="en-US" sz="1800" dirty="0">
+              <a:solidFill>
+                <a:schemeClr val="bg1"/>
+              </a:solidFill>
+              <a:highlight>
+                <a:srgbClr val="000000"/>
+              </a:highlight>
+              <a:latin typeface="Times New Roman" pitchFamily="18" charset="0"/>
+              <a:cs typeface="Times New Roman" pitchFamily="18" charset="0"/>
+            </a:endParaRPr>
+          </a:p>
+          <a:p>
+            <a:pPr>
+              <a:spcBef>
+                <a:spcPts val="600"/>
+              </a:spcBef>
+              <a:spcAft>
+                <a:spcPts val="600"/>
+              </a:spcAft>
+            </a:pPr>
+            <a:r>
+              <a:rPr lang="en-US" sz="1800" dirty="0">
+                <a:solidFill>
+                  <a:schemeClr val="bg1"/>
+                </a:solidFill>
+                <a:highlight>
+                  <a:srgbClr val="000000"/>
+                </a:highlight>
+                <a:latin typeface="Times New Roman" pitchFamily="18" charset="0"/>
+                <a:cs typeface="Times New Roman" pitchFamily="18" charset="0"/>
+              </a:rPr>
+              <a:t>kubectl get svc web-serv</a:t>
+            </a:r>
+          </a:p>
+          <a:p>
+            <a:pPr>
+              <a:spcBef>
+                <a:spcPts val="600"/>
+              </a:spcBef>
+              <a:spcAft>
+                <a:spcPts val="600"/>
+              </a:spcAft>
+            </a:pPr>
+            <a:r>
+              <a:rPr lang="ru-RU" sz="1800" dirty="0">
+                <a:latin typeface="Times New Roman" pitchFamily="18" charset="0"/>
+                <a:cs typeface="Times New Roman" pitchFamily="18" charset="0"/>
+              </a:rPr>
+              <a:t>Проверим</a:t>
+            </a:r>
+            <a:r>
+              <a:rPr lang="en-US" sz="1800" dirty="0">
+                <a:latin typeface="Times New Roman" pitchFamily="18" charset="0"/>
+                <a:cs typeface="Times New Roman" pitchFamily="18" charset="0"/>
+              </a:rPr>
+              <a:t>:</a:t>
+            </a:r>
+          </a:p>
+          <a:p>
+            <a:pPr>
+              <a:spcBef>
+                <a:spcPts val="600"/>
+              </a:spcBef>
+              <a:spcAft>
+                <a:spcPts val="600"/>
+              </a:spcAft>
+            </a:pPr>
+            <a:r>
+              <a:rPr lang="en-US" sz="1800" dirty="0">
+                <a:solidFill>
+                  <a:schemeClr val="bg1"/>
+                </a:solidFill>
+                <a:highlight>
+                  <a:srgbClr val="000000"/>
+                </a:highlight>
+                <a:latin typeface="Times New Roman" pitchFamily="18" charset="0"/>
+                <a:cs typeface="Times New Roman" pitchFamily="18" charset="0"/>
+              </a:rPr>
+              <a:t>kubectl run test-client --image=</a:t>
+            </a:r>
+            <a:r>
+              <a:rPr lang="en-US" sz="1800" dirty="0" err="1">
+                <a:solidFill>
+                  <a:schemeClr val="bg1"/>
+                </a:solidFill>
+                <a:highlight>
+                  <a:srgbClr val="000000"/>
+                </a:highlight>
+                <a:latin typeface="Times New Roman" pitchFamily="18" charset="0"/>
+                <a:cs typeface="Times New Roman" pitchFamily="18" charset="0"/>
+              </a:rPr>
+              <a:t>curlimages</a:t>
+            </a:r>
+            <a:r>
+              <a:rPr lang="en-US" sz="1800" dirty="0">
+                <a:solidFill>
+                  <a:schemeClr val="bg1"/>
+                </a:solidFill>
+                <a:highlight>
+                  <a:srgbClr val="000000"/>
+                </a:highlight>
+                <a:latin typeface="Times New Roman" pitchFamily="18" charset="0"/>
+                <a:cs typeface="Times New Roman" pitchFamily="18" charset="0"/>
+              </a:rPr>
+              <a:t>/curl --rm -it --restart=Never -- curl -s http://web-serv</a:t>
+            </a:r>
+          </a:p>
+          <a:p>
+            <a:pPr>
+              <a:spcBef>
+                <a:spcPts val="600"/>
+              </a:spcBef>
+              <a:spcAft>
+                <a:spcPts val="600"/>
+              </a:spcAft>
+            </a:pPr>
+            <a:r>
+              <a:rPr lang="ru-RU" sz="1800" dirty="0">
+                <a:latin typeface="Times New Roman" pitchFamily="18" charset="0"/>
+                <a:cs typeface="Times New Roman" pitchFamily="18" charset="0"/>
+              </a:rPr>
+              <a:t>Может поды упали?</a:t>
+            </a:r>
+          </a:p>
+          <a:p>
+            <a:pPr>
+              <a:spcBef>
+                <a:spcPts val="600"/>
+              </a:spcBef>
+              <a:spcAft>
+                <a:spcPts val="600"/>
+              </a:spcAft>
+            </a:pPr>
+            <a:r>
+              <a:rPr lang="en-US" sz="1800" dirty="0">
+                <a:solidFill>
+                  <a:schemeClr val="bg1"/>
+                </a:solidFill>
+                <a:highlight>
+                  <a:srgbClr val="000000"/>
+                </a:highlight>
+                <a:latin typeface="Times New Roman" pitchFamily="18" charset="0"/>
+                <a:cs typeface="Times New Roman" pitchFamily="18" charset="0"/>
+              </a:rPr>
+              <a:t>kubectl get pods -o wide</a:t>
+            </a:r>
+          </a:p>
+          <a:p>
+            <a:pPr>
+              <a:spcBef>
+                <a:spcPts val="600"/>
+              </a:spcBef>
+              <a:spcAft>
+                <a:spcPts val="600"/>
+              </a:spcAft>
+            </a:pPr>
+            <a:r>
+              <a:rPr lang="ru-RU" sz="1800" b="1" dirty="0">
+                <a:latin typeface="Times New Roman" pitchFamily="18" charset="0"/>
+                <a:cs typeface="Times New Roman" pitchFamily="18" charset="0"/>
+              </a:rPr>
+              <a:t>Поды живы, ищем дальше…</a:t>
+            </a:r>
+            <a:endParaRPr lang="en-US" sz="1800" b="1" dirty="0">
+              <a:latin typeface="Times New Roman" pitchFamily="18" charset="0"/>
+              <a:cs typeface="Times New Roman" pitchFamily="18" charset="0"/>
+            </a:endParaRPr>
+          </a:p>
+        </p:txBody>
+      </p:sp>
+      <p:pic>
+        <p:nvPicPr>
+          <p:cNvPr id="4" name="Рисунок 3">
+            <a:extLst>
+              <a:ext uri="{FF2B5EF4-FFF2-40B4-BE49-F238E27FC236}">
+                <a16:creationId xmlns:a16="http://schemas.microsoft.com/office/drawing/2014/main" id="{C72839DF-1C6A-40D6-907C-8AD3D8073651}"/>
+              </a:ext>
+            </a:extLst>
+          </p:cNvPr>
+          <p:cNvPicPr>
+            <a:picLocks noChangeAspect="1"/>
+          </p:cNvPicPr>
+          <p:nvPr/>
+        </p:nvPicPr>
+        <p:blipFill>
+          <a:blip r:embed="rId2"/>
+          <a:stretch>
+            <a:fillRect/>
+          </a:stretch>
+        </p:blipFill>
+        <p:spPr>
+          <a:xfrm>
+            <a:off x="7475856" y="1455359"/>
+            <a:ext cx="3778740" cy="3997586"/>
+          </a:xfrm>
+          <a:prstGeom prst="rect">
+            <a:avLst/>
+          </a:prstGeom>
+        </p:spPr>
+      </p:pic>
+    </p:spTree>
+    <p:extLst>
+      <p:ext uri="{BB962C8B-B14F-4D97-AF65-F5344CB8AC3E}">
+        <p14:creationId xmlns:p14="http://schemas.microsoft.com/office/powerpoint/2010/main" val="3659584908"/>
+      </p:ext>
+    </p:extLst>
+  </p:cSld>
+  <p:clrMapOvr>
+    <a:masterClrMapping/>
+  </p:clrMapOvr>
+</p:sld>
+</file>
+
+<file path=ppt/slides/slide11.xml><?xml version="1.0" encoding="utf-8"?>
+<p:sld xmlns:a="http://schemas.openxmlformats.org/drawingml/2006/main" xmlns:r="http://schemas.openxmlformats.org/officeDocument/2006/relationships" xmlns:p="http://schemas.openxmlformats.org/presentationml/2006/main">
+  <p:cSld>
+    <p:spTree>
+      <p:nvGrpSpPr>
+        <p:cNvPr id="1" name=""/>
+        <p:cNvGrpSpPr/>
+        <p:nvPr/>
+      </p:nvGrpSpPr>
+      <p:grpSpPr>
+        <a:xfrm>
+          <a:off x="0" y="0"/>
+          <a:ext cx="0" cy="0"/>
+          <a:chOff x="0" y="0"/>
+          <a:chExt cx="0" cy="0"/>
+        </a:xfrm>
+      </p:grpSpPr>
+      <p:sp>
+        <p:nvSpPr>
+          <p:cNvPr id="5" name="Текст 4">
+            <a:extLst>
+              <a:ext uri="{FF2B5EF4-FFF2-40B4-BE49-F238E27FC236}">
+                <a16:creationId xmlns:a16="http://schemas.microsoft.com/office/drawing/2014/main" id="{3EB29DC1-D5D4-FB41-9E2D-AA4750D0CC8B}"/>
+              </a:ext>
+            </a:extLst>
+          </p:cNvPr>
+          <p:cNvSpPr>
+            <a:spLocks noGrp="1"/>
+          </p:cNvSpPr>
+          <p:nvPr>
+            <p:ph type="body" sz="quarter" idx="13"/>
+          </p:nvPr>
+        </p:nvSpPr>
+        <p:spPr/>
+        <p:txBody>
+          <a:bodyPr/>
+          <a:lstStyle/>
+          <a:p>
+            <a:r>
+              <a:rPr lang="ru-RU" dirty="0"/>
+              <a:t>Промышленное развертывание серверных приложений</a:t>
+            </a:r>
+          </a:p>
+          <a:p>
+            <a:endParaRPr lang="ru-RU" dirty="0"/>
+          </a:p>
+        </p:txBody>
+      </p:sp>
+      <p:sp>
+        <p:nvSpPr>
+          <p:cNvPr id="6" name="Текст 5">
+            <a:extLst>
+              <a:ext uri="{FF2B5EF4-FFF2-40B4-BE49-F238E27FC236}">
+                <a16:creationId xmlns:a16="http://schemas.microsoft.com/office/drawing/2014/main" id="{B5B6DD1A-BEFA-D842-9B7A-78D7BD1A5259}"/>
+              </a:ext>
+            </a:extLst>
+          </p:cNvPr>
+          <p:cNvSpPr>
+            <a:spLocks noGrp="1"/>
+          </p:cNvSpPr>
+          <p:nvPr>
+            <p:ph type="body" sz="quarter" idx="14"/>
+          </p:nvPr>
+        </p:nvSpPr>
+        <p:spPr>
+          <a:xfrm>
+            <a:off x="3459162" y="548720"/>
+            <a:ext cx="2456115" cy="641451"/>
+          </a:xfrm>
+        </p:spPr>
+        <p:txBody>
+          <a:bodyPr/>
+          <a:lstStyle/>
+          <a:p>
+            <a:r>
+              <a:rPr lang="ru-RU" dirty="0">
+                <a:latin typeface="Times New Roman" pitchFamily="18" charset="0"/>
+                <a:cs typeface="Times New Roman" pitchFamily="18" charset="0"/>
+              </a:rPr>
+              <a:t>Основы </a:t>
+            </a:r>
+            <a:r>
+              <a:rPr lang="en-US" dirty="0">
+                <a:latin typeface="Times New Roman" pitchFamily="18" charset="0"/>
+                <a:cs typeface="Times New Roman" pitchFamily="18" charset="0"/>
+              </a:rPr>
+              <a:t>Kubernetes</a:t>
+            </a:r>
+            <a:endParaRPr lang="ru-RU" dirty="0">
+              <a:latin typeface="Times New Roman" pitchFamily="18" charset="0"/>
+              <a:cs typeface="Times New Roman" pitchFamily="18" charset="0"/>
+            </a:endParaRPr>
+          </a:p>
+        </p:txBody>
+      </p:sp>
+      <p:sp>
+        <p:nvSpPr>
+          <p:cNvPr id="15" name="Текст 14">
+            <a:extLst>
+              <a:ext uri="{FF2B5EF4-FFF2-40B4-BE49-F238E27FC236}">
+                <a16:creationId xmlns:a16="http://schemas.microsoft.com/office/drawing/2014/main" id="{D41A0F8D-9767-4A5D-947A-34B08831DECE}"/>
+              </a:ext>
+            </a:extLst>
+          </p:cNvPr>
+          <p:cNvSpPr>
+            <a:spLocks noGrp="1"/>
+          </p:cNvSpPr>
+          <p:nvPr>
+            <p:ph type="body" sz="quarter" idx="15"/>
+          </p:nvPr>
+        </p:nvSpPr>
+        <p:spPr/>
+        <p:txBody>
+          <a:bodyPr/>
+          <a:lstStyle/>
+          <a:p>
+            <a:r>
+              <a:rPr lang="ru-RU" sz="1000" dirty="0"/>
+              <a:t>Ловим ошибку в сервисе</a:t>
             </a:r>
             <a:endParaRPr lang="ru-RU" dirty="0"/>
           </a:p>
@@ -15096,7 +15817,7 @@
 </p:sld>
 </file>
 
-<file path=ppt/slides/slide11.xml><?xml version="1.0" encoding="utf-8"?>
+<file path=ppt/slides/slide12.xml><?xml version="1.0" encoding="utf-8"?>
 <p:sld xmlns:a="http://schemas.openxmlformats.org/drawingml/2006/main" xmlns:r="http://schemas.openxmlformats.org/officeDocument/2006/relationships" xmlns:p="http://schemas.openxmlformats.org/presentationml/2006/main">
   <p:cSld>
     <p:spTree>
@@ -15175,8 +15896,19 @@
                 <a:latin typeface="Times New Roman" pitchFamily="18" charset="0"/>
                 <a:cs typeface="Times New Roman" pitchFamily="18" charset="0"/>
               </a:rPr>
-              <a:t>Докер-композиции и сеть</a:t>
-            </a:r>
+              <a:t>Основы </a:t>
+            </a:r>
+            <a:r>
+              <a:rPr lang="en-US" dirty="0">
+                <a:latin typeface="Times New Roman" pitchFamily="18" charset="0"/>
+                <a:cs typeface="Times New Roman" pitchFamily="18" charset="0"/>
+              </a:rPr>
+              <a:t>Kubernetes</a:t>
+            </a:r>
+            <a:endParaRPr lang="ru-RU" dirty="0">
+              <a:latin typeface="Times New Roman" pitchFamily="18" charset="0"/>
+              <a:cs typeface="Times New Roman" pitchFamily="18" charset="0"/>
+            </a:endParaRPr>
           </a:p>
         </p:txBody>
       </p:sp>
@@ -15203,11 +15935,7 @@
           <a:p>
             <a:r>
               <a:rPr lang="ru-RU" sz="1000" dirty="0"/>
-              <a:t>Предпосылки появления</a:t>
-            </a:r>
-            <a:r>
-              <a:rPr lang="en-US" sz="1000" dirty="0"/>
-              <a:t> docker-compose</a:t>
+              <a:t>Готовимся к обновлениям</a:t>
             </a:r>
             <a:endParaRPr lang="ru-RU" dirty="0"/>
           </a:p>
@@ -15570,582 +16298,6 @@
     <p:extLst>
       <p:ext uri="{BB962C8B-B14F-4D97-AF65-F5344CB8AC3E}">
         <p14:creationId xmlns:p14="http://schemas.microsoft.com/office/powerpoint/2010/main" val="1761970472"/>
-      </p:ext>
-    </p:extLst>
-  </p:cSld>
-  <p:clrMapOvr>
-    <a:masterClrMapping/>
-  </p:clrMapOvr>
-</p:sld>
-</file>
-
-<file path=ppt/slides/slide12.xml><?xml version="1.0" encoding="utf-8"?>
-<p:sld xmlns:a="http://schemas.openxmlformats.org/drawingml/2006/main" xmlns:r="http://schemas.openxmlformats.org/officeDocument/2006/relationships" xmlns:p="http://schemas.openxmlformats.org/presentationml/2006/main">
-  <p:cSld>
-    <p:spTree>
-      <p:nvGrpSpPr>
-        <p:cNvPr id="1" name=""/>
-        <p:cNvGrpSpPr/>
-        <p:nvPr/>
-      </p:nvGrpSpPr>
-      <p:grpSpPr>
-        <a:xfrm>
-          <a:off x="0" y="0"/>
-          <a:ext cx="0" cy="0"/>
-          <a:chOff x="0" y="0"/>
-          <a:chExt cx="0" cy="0"/>
-        </a:xfrm>
-      </p:grpSpPr>
-      <p:sp>
-        <p:nvSpPr>
-          <p:cNvPr id="5" name="Текст 4">
-            <a:extLst>
-              <a:ext uri="{FF2B5EF4-FFF2-40B4-BE49-F238E27FC236}">
-                <a16:creationId xmlns:a16="http://schemas.microsoft.com/office/drawing/2014/main" id="{3EB29DC1-D5D4-FB41-9E2D-AA4750D0CC8B}"/>
-              </a:ext>
-            </a:extLst>
-          </p:cNvPr>
-          <p:cNvSpPr>
-            <a:spLocks noGrp="1"/>
-          </p:cNvSpPr>
-          <p:nvPr>
-            <p:ph type="body" sz="quarter" idx="13"/>
-          </p:nvPr>
-        </p:nvSpPr>
-        <p:spPr/>
-        <p:txBody>
-          <a:bodyPr/>
-          <a:lstStyle/>
-          <a:p>
-            <a:r>
-              <a:rPr lang="ru-RU" dirty="0"/>
-              <a:t>Промышленное развертывание серверных приложений</a:t>
-            </a:r>
-          </a:p>
-          <a:p>
-            <a:endParaRPr lang="ru-RU" dirty="0"/>
-          </a:p>
-        </p:txBody>
-      </p:sp>
-      <p:sp>
-        <p:nvSpPr>
-          <p:cNvPr id="6" name="Текст 5">
-            <a:extLst>
-              <a:ext uri="{FF2B5EF4-FFF2-40B4-BE49-F238E27FC236}">
-                <a16:creationId xmlns:a16="http://schemas.microsoft.com/office/drawing/2014/main" id="{B5B6DD1A-BEFA-D842-9B7A-78D7BD1A5259}"/>
-              </a:ext>
-            </a:extLst>
-          </p:cNvPr>
-          <p:cNvSpPr>
-            <a:spLocks noGrp="1"/>
-          </p:cNvSpPr>
-          <p:nvPr>
-            <p:ph type="body" sz="quarter" idx="14"/>
-          </p:nvPr>
-        </p:nvSpPr>
-        <p:spPr>
-          <a:xfrm>
-            <a:off x="3459162" y="548720"/>
-            <a:ext cx="2456115" cy="641451"/>
-          </a:xfrm>
-        </p:spPr>
-        <p:txBody>
-          <a:bodyPr/>
-          <a:lstStyle/>
-          <a:p>
-            <a:r>
-              <a:rPr lang="ru-RU" dirty="0">
-                <a:latin typeface="Times New Roman" pitchFamily="18" charset="0"/>
-                <a:cs typeface="Times New Roman" pitchFamily="18" charset="0"/>
-              </a:rPr>
-              <a:t>Докер-композиции и сеть</a:t>
-            </a:r>
-          </a:p>
-        </p:txBody>
-      </p:sp>
-      <p:sp>
-        <p:nvSpPr>
-          <p:cNvPr id="15" name="Текст 14">
-            <a:extLst>
-              <a:ext uri="{FF2B5EF4-FFF2-40B4-BE49-F238E27FC236}">
-                <a16:creationId xmlns:a16="http://schemas.microsoft.com/office/drawing/2014/main" id="{D41A0F8D-9767-4A5D-947A-34B08831DECE}"/>
-              </a:ext>
-            </a:extLst>
-          </p:cNvPr>
-          <p:cNvSpPr>
-            <a:spLocks noGrp="1"/>
-          </p:cNvSpPr>
-          <p:nvPr>
-            <p:ph type="body" sz="quarter" idx="15"/>
-          </p:nvPr>
-        </p:nvSpPr>
-        <p:spPr/>
-        <p:txBody>
-          <a:bodyPr/>
-          <a:lstStyle/>
-          <a:p>
-            <a:r>
-              <a:rPr lang="ru-RU" sz="1000" dirty="0"/>
-              <a:t>Предпосылки появления</a:t>
-            </a:r>
-            <a:r>
-              <a:rPr lang="en-US" sz="1000" dirty="0"/>
-              <a:t> docker-compose</a:t>
-            </a:r>
-            <a:endParaRPr lang="ru-RU" dirty="0"/>
-          </a:p>
-        </p:txBody>
-      </p:sp>
-      <p:sp>
-        <p:nvSpPr>
-          <p:cNvPr id="20" name="Заголовок 2">
-            <a:extLst>
-              <a:ext uri="{FF2B5EF4-FFF2-40B4-BE49-F238E27FC236}">
-                <a16:creationId xmlns:a16="http://schemas.microsoft.com/office/drawing/2014/main" id="{EB3254AC-E053-4C4B-B7AA-603BB6FF23A1}"/>
-              </a:ext>
-            </a:extLst>
-          </p:cNvPr>
-          <p:cNvSpPr>
-            <a:spLocks noGrp="1"/>
-          </p:cNvSpPr>
-          <p:nvPr>
-            <p:ph type="title"/>
-          </p:nvPr>
-        </p:nvSpPr>
-        <p:spPr>
-          <a:xfrm>
-            <a:off x="585897" y="1405055"/>
-            <a:ext cx="11057955" cy="644244"/>
-          </a:xfrm>
-        </p:spPr>
-        <p:txBody>
-          <a:bodyPr>
-            <a:normAutofit/>
-          </a:bodyPr>
-          <a:lstStyle/>
-          <a:p>
-            <a:r>
-              <a:rPr lang="ru-RU" sz="2200" dirty="0"/>
-              <a:t>Готовимся к обновлениям</a:t>
-            </a:r>
-          </a:p>
-        </p:txBody>
-      </p:sp>
-      <p:pic>
-        <p:nvPicPr>
-          <p:cNvPr id="4" name="Рисунок 3">
-            <a:extLst>
-              <a:ext uri="{FF2B5EF4-FFF2-40B4-BE49-F238E27FC236}">
-                <a16:creationId xmlns:a16="http://schemas.microsoft.com/office/drawing/2014/main" id="{5B43E5AD-C51D-4BA4-9AEC-6FDEFD01C6F7}"/>
-              </a:ext>
-            </a:extLst>
-          </p:cNvPr>
-          <p:cNvPicPr>
-            <a:picLocks noChangeAspect="1"/>
-          </p:cNvPicPr>
-          <p:nvPr/>
-        </p:nvPicPr>
-        <p:blipFill>
-          <a:blip r:embed="rId2"/>
-          <a:stretch>
-            <a:fillRect/>
-          </a:stretch>
-        </p:blipFill>
-        <p:spPr>
-          <a:xfrm>
-            <a:off x="7331266" y="748866"/>
-            <a:ext cx="2955734" cy="5980436"/>
-          </a:xfrm>
-          <a:prstGeom prst="rect">
-            <a:avLst/>
-          </a:prstGeom>
-        </p:spPr>
-      </p:pic>
-      <p:sp>
-        <p:nvSpPr>
-          <p:cNvPr id="10" name="Текст 3">
-            <a:extLst>
-              <a:ext uri="{FF2B5EF4-FFF2-40B4-BE49-F238E27FC236}">
-                <a16:creationId xmlns:a16="http://schemas.microsoft.com/office/drawing/2014/main" id="{091C9D81-6DC9-4793-A9B6-366EE01D100C}"/>
-              </a:ext>
-            </a:extLst>
-          </p:cNvPr>
-          <p:cNvSpPr>
-            <a:spLocks noGrp="1"/>
-          </p:cNvSpPr>
-          <p:nvPr>
-            <p:ph type="body" sz="quarter" idx="12"/>
-          </p:nvPr>
-        </p:nvSpPr>
-        <p:spPr>
-          <a:xfrm>
-            <a:off x="447084" y="2049299"/>
-            <a:ext cx="10936386" cy="3756210"/>
-          </a:xfrm>
-        </p:spPr>
-        <p:txBody>
-          <a:bodyPr numCol="1"/>
-          <a:lstStyle/>
-          <a:p>
-            <a:pPr>
-              <a:spcBef>
-                <a:spcPts val="600"/>
-              </a:spcBef>
-              <a:spcAft>
-                <a:spcPts val="600"/>
-              </a:spcAft>
-            </a:pPr>
-            <a:r>
-              <a:rPr lang="ru-RU" sz="1800" dirty="0">
-                <a:latin typeface="Times New Roman" pitchFamily="18" charset="0"/>
-                <a:cs typeface="Times New Roman" pitchFamily="18" charset="0"/>
-              </a:rPr>
-              <a:t>Попробуем сломать</a:t>
-            </a:r>
-            <a:r>
-              <a:rPr lang="en-US" sz="1800" dirty="0">
-                <a:latin typeface="Times New Roman" pitchFamily="18" charset="0"/>
-                <a:cs typeface="Times New Roman" pitchFamily="18" charset="0"/>
-              </a:rPr>
-              <a:t>:</a:t>
-            </a:r>
-          </a:p>
-          <a:p>
-            <a:pPr>
-              <a:spcBef>
-                <a:spcPts val="600"/>
-              </a:spcBef>
-              <a:spcAft>
-                <a:spcPts val="600"/>
-              </a:spcAft>
-            </a:pPr>
-            <a:r>
-              <a:rPr lang="en-US" sz="1800" dirty="0">
-                <a:solidFill>
-                  <a:schemeClr val="bg1"/>
-                </a:solidFill>
-                <a:highlight>
-                  <a:srgbClr val="000000"/>
-                </a:highlight>
-                <a:latin typeface="Times New Roman" pitchFamily="18" charset="0"/>
-                <a:cs typeface="Times New Roman" pitchFamily="18" charset="0"/>
-              </a:rPr>
-              <a:t>kubectl set image deployment/web </a:t>
-            </a:r>
-            <a:r>
-              <a:rPr lang="en-US" sz="1800" dirty="0" err="1">
-                <a:solidFill>
-                  <a:schemeClr val="bg1"/>
-                </a:solidFill>
-                <a:highlight>
-                  <a:srgbClr val="000000"/>
-                </a:highlight>
-                <a:latin typeface="Times New Roman" pitchFamily="18" charset="0"/>
-                <a:cs typeface="Times New Roman" pitchFamily="18" charset="0"/>
-              </a:rPr>
-              <a:t>nginx</a:t>
-            </a:r>
-            <a:r>
-              <a:rPr lang="en-US" sz="1800" dirty="0">
-                <a:solidFill>
-                  <a:schemeClr val="bg1"/>
-                </a:solidFill>
-                <a:highlight>
-                  <a:srgbClr val="000000"/>
-                </a:highlight>
-                <a:latin typeface="Times New Roman" pitchFamily="18" charset="0"/>
-                <a:cs typeface="Times New Roman" pitchFamily="18" charset="0"/>
-              </a:rPr>
-              <a:t>=</a:t>
-            </a:r>
-            <a:r>
-              <a:rPr lang="en-US" sz="1800" dirty="0" err="1">
-                <a:solidFill>
-                  <a:schemeClr val="bg1"/>
-                </a:solidFill>
-                <a:highlight>
-                  <a:srgbClr val="000000"/>
-                </a:highlight>
-                <a:latin typeface="Times New Roman" pitchFamily="18" charset="0"/>
-                <a:cs typeface="Times New Roman" pitchFamily="18" charset="0"/>
-              </a:rPr>
-              <a:t>nginx:err</a:t>
-            </a:r>
-            <a:endParaRPr lang="en-US" sz="1800" dirty="0">
-              <a:solidFill>
-                <a:schemeClr val="bg1"/>
-              </a:solidFill>
-              <a:highlight>
-                <a:srgbClr val="000000"/>
-              </a:highlight>
-              <a:latin typeface="Times New Roman" pitchFamily="18" charset="0"/>
-              <a:cs typeface="Times New Roman" pitchFamily="18" charset="0"/>
-            </a:endParaRPr>
-          </a:p>
-          <a:p>
-            <a:pPr>
-              <a:spcBef>
-                <a:spcPts val="600"/>
-              </a:spcBef>
-              <a:spcAft>
-                <a:spcPts val="600"/>
-              </a:spcAft>
-            </a:pPr>
-            <a:r>
-              <a:rPr lang="en-US" sz="1800" dirty="0">
-                <a:solidFill>
-                  <a:schemeClr val="bg1"/>
-                </a:solidFill>
-                <a:highlight>
-                  <a:srgbClr val="000000"/>
-                </a:highlight>
-                <a:latin typeface="Times New Roman" pitchFamily="18" charset="0"/>
-                <a:cs typeface="Times New Roman" pitchFamily="18" charset="0"/>
-              </a:rPr>
-              <a:t>kubectl get pods</a:t>
-            </a:r>
-            <a:r>
-              <a:rPr lang="ru-RU" sz="1800" dirty="0">
-                <a:solidFill>
-                  <a:schemeClr val="bg1"/>
-                </a:solidFill>
-                <a:highlight>
-                  <a:srgbClr val="000000"/>
-                </a:highlight>
-                <a:latin typeface="Times New Roman" pitchFamily="18" charset="0"/>
-                <a:cs typeface="Times New Roman" pitchFamily="18" charset="0"/>
-              </a:rPr>
-              <a:t> </a:t>
-            </a:r>
-            <a:r>
-              <a:rPr lang="ru-RU" sz="1800" dirty="0">
-                <a:latin typeface="Times New Roman" pitchFamily="18" charset="0"/>
-                <a:cs typeface="Times New Roman" pitchFamily="18" charset="0"/>
-              </a:rPr>
-              <a:t>                                   </a:t>
-            </a:r>
-          </a:p>
-          <a:p>
-            <a:pPr>
-              <a:spcBef>
-                <a:spcPts val="600"/>
-              </a:spcBef>
-              <a:spcAft>
-                <a:spcPts val="600"/>
-              </a:spcAft>
-            </a:pPr>
-            <a:r>
-              <a:rPr lang="ru-RU" sz="1800" b="1" dirty="0">
-                <a:latin typeface="Times New Roman" pitchFamily="18" charset="0"/>
-                <a:cs typeface="Times New Roman" pitchFamily="18" charset="0"/>
-              </a:rPr>
-              <a:t>Ошибка!</a:t>
-            </a:r>
-          </a:p>
-          <a:p>
-            <a:pPr>
-              <a:spcBef>
-                <a:spcPts val="600"/>
-              </a:spcBef>
-              <a:spcAft>
-                <a:spcPts val="600"/>
-              </a:spcAft>
-            </a:pPr>
-            <a:r>
-              <a:rPr lang="ru-RU" sz="1800" dirty="0">
-                <a:latin typeface="Times New Roman" pitchFamily="18" charset="0"/>
-                <a:cs typeface="Times New Roman" pitchFamily="18" charset="0"/>
-              </a:rPr>
-              <a:t>Откатываем</a:t>
-            </a:r>
-            <a:r>
-              <a:rPr lang="en-US" sz="1800" dirty="0">
-                <a:latin typeface="Times New Roman" pitchFamily="18" charset="0"/>
-                <a:cs typeface="Times New Roman" pitchFamily="18" charset="0"/>
-              </a:rPr>
-              <a:t>:</a:t>
-            </a:r>
-            <a:endParaRPr lang="ru-RU" sz="1800" dirty="0">
-              <a:latin typeface="Times New Roman" pitchFamily="18" charset="0"/>
-              <a:cs typeface="Times New Roman" pitchFamily="18" charset="0"/>
-            </a:endParaRPr>
-          </a:p>
-          <a:p>
-            <a:pPr>
-              <a:spcBef>
-                <a:spcPts val="600"/>
-              </a:spcBef>
-              <a:spcAft>
-                <a:spcPts val="600"/>
-              </a:spcAft>
-            </a:pPr>
-            <a:r>
-              <a:rPr lang="en-US" sz="1800" dirty="0">
-                <a:solidFill>
-                  <a:schemeClr val="bg1"/>
-                </a:solidFill>
-                <a:highlight>
-                  <a:srgbClr val="000000"/>
-                </a:highlight>
-                <a:latin typeface="Times New Roman" pitchFamily="18" charset="0"/>
-                <a:cs typeface="Times New Roman" pitchFamily="18" charset="0"/>
-              </a:rPr>
-              <a:t>kubectl rollout status deployment/web --timeout=</a:t>
-            </a:r>
-            <a:r>
-              <a:rPr lang="en-US" sz="1800" dirty="0" err="1">
-                <a:solidFill>
-                  <a:schemeClr val="bg1"/>
-                </a:solidFill>
-                <a:highlight>
-                  <a:srgbClr val="000000"/>
-                </a:highlight>
-                <a:latin typeface="Times New Roman" pitchFamily="18" charset="0"/>
-                <a:cs typeface="Times New Roman" pitchFamily="18" charset="0"/>
-              </a:rPr>
-              <a:t>10s</a:t>
-            </a:r>
-            <a:endParaRPr lang="ru-RU" sz="1800" dirty="0">
-              <a:solidFill>
-                <a:schemeClr val="bg1"/>
-              </a:solidFill>
-              <a:highlight>
-                <a:srgbClr val="000000"/>
-              </a:highlight>
-              <a:latin typeface="Times New Roman" pitchFamily="18" charset="0"/>
-              <a:cs typeface="Times New Roman" pitchFamily="18" charset="0"/>
-            </a:endParaRPr>
-          </a:p>
-          <a:p>
-            <a:pPr>
-              <a:spcBef>
-                <a:spcPts val="600"/>
-              </a:spcBef>
-              <a:spcAft>
-                <a:spcPts val="600"/>
-              </a:spcAft>
-            </a:pPr>
-            <a:r>
-              <a:rPr lang="en-US" sz="1800" dirty="0">
-                <a:solidFill>
-                  <a:schemeClr val="bg1"/>
-                </a:solidFill>
-                <a:highlight>
-                  <a:srgbClr val="000000"/>
-                </a:highlight>
-                <a:latin typeface="Times New Roman" pitchFamily="18" charset="0"/>
-                <a:cs typeface="Times New Roman" pitchFamily="18" charset="0"/>
-              </a:rPr>
-              <a:t>kubectl rollout undo deployment/web</a:t>
-            </a:r>
-          </a:p>
-          <a:p>
-            <a:pPr>
-              <a:spcBef>
-                <a:spcPts val="600"/>
-              </a:spcBef>
-              <a:spcAft>
-                <a:spcPts val="600"/>
-              </a:spcAft>
-            </a:pPr>
-            <a:r>
-              <a:rPr lang="en-US" sz="1800" dirty="0">
-                <a:solidFill>
-                  <a:schemeClr val="bg1"/>
-                </a:solidFill>
-                <a:highlight>
-                  <a:srgbClr val="000000"/>
-                </a:highlight>
-                <a:latin typeface="Times New Roman" pitchFamily="18" charset="0"/>
-                <a:cs typeface="Times New Roman" pitchFamily="18" charset="0"/>
-              </a:rPr>
-              <a:t>kubectl get pods</a:t>
-            </a:r>
-            <a:r>
-              <a:rPr lang="ru-RU" sz="1800" dirty="0">
-                <a:solidFill>
-                  <a:schemeClr val="bg1"/>
-                </a:solidFill>
-                <a:highlight>
-                  <a:srgbClr val="000000"/>
-                </a:highlight>
-                <a:latin typeface="Times New Roman" pitchFamily="18" charset="0"/>
-                <a:cs typeface="Times New Roman" pitchFamily="18" charset="0"/>
-              </a:rPr>
-              <a:t> </a:t>
-            </a:r>
-            <a:r>
-              <a:rPr lang="ru-RU" sz="1800" dirty="0">
-                <a:latin typeface="Times New Roman" pitchFamily="18" charset="0"/>
-                <a:cs typeface="Times New Roman" pitchFamily="18" charset="0"/>
-              </a:rPr>
-              <a:t>                                   </a:t>
-            </a:r>
-            <a:endParaRPr lang="ru-RU" sz="1800" dirty="0">
-              <a:solidFill>
-                <a:schemeClr val="bg1"/>
-              </a:solidFill>
-              <a:highlight>
-                <a:srgbClr val="000000"/>
-              </a:highlight>
-              <a:latin typeface="Times New Roman" pitchFamily="18" charset="0"/>
-              <a:cs typeface="Times New Roman" pitchFamily="18" charset="0"/>
-            </a:endParaRPr>
-          </a:p>
-          <a:p>
-            <a:pPr>
-              <a:spcBef>
-                <a:spcPts val="600"/>
-              </a:spcBef>
-              <a:spcAft>
-                <a:spcPts val="600"/>
-              </a:spcAft>
-            </a:pPr>
-            <a:endParaRPr lang="en-US" sz="1800" b="1" dirty="0">
-              <a:latin typeface="Times New Roman" pitchFamily="18" charset="0"/>
-              <a:cs typeface="Times New Roman" pitchFamily="18" charset="0"/>
-            </a:endParaRPr>
-          </a:p>
-          <a:p>
-            <a:pPr>
-              <a:spcBef>
-                <a:spcPts val="600"/>
-              </a:spcBef>
-              <a:spcAft>
-                <a:spcPts val="600"/>
-              </a:spcAft>
-            </a:pPr>
-            <a:endParaRPr lang="en-US" sz="1800" dirty="0">
-              <a:solidFill>
-                <a:schemeClr val="bg1"/>
-              </a:solidFill>
-              <a:highlight>
-                <a:srgbClr val="000000"/>
-              </a:highlight>
-              <a:latin typeface="Times New Roman" pitchFamily="18" charset="0"/>
-              <a:cs typeface="Times New Roman" pitchFamily="18" charset="0"/>
-            </a:endParaRPr>
-          </a:p>
-          <a:p>
-            <a:pPr>
-              <a:spcBef>
-                <a:spcPts val="600"/>
-              </a:spcBef>
-              <a:spcAft>
-                <a:spcPts val="600"/>
-              </a:spcAft>
-            </a:pPr>
-            <a:endParaRPr lang="ru-RU" sz="1800" dirty="0">
-              <a:latin typeface="Times New Roman" pitchFamily="18" charset="0"/>
-              <a:cs typeface="Times New Roman" pitchFamily="18" charset="0"/>
-            </a:endParaRPr>
-          </a:p>
-        </p:txBody>
-      </p:sp>
-    </p:spTree>
-    <p:extLst>
-      <p:ext uri="{BB962C8B-B14F-4D97-AF65-F5344CB8AC3E}">
-        <p14:creationId xmlns:p14="http://schemas.microsoft.com/office/powerpoint/2010/main" val="816041819"/>
       </p:ext>
     </p:extLst>
   </p:cSld>
@@ -16234,8 +16386,19 @@
                 <a:latin typeface="Times New Roman" pitchFamily="18" charset="0"/>
                 <a:cs typeface="Times New Roman" pitchFamily="18" charset="0"/>
               </a:rPr>
-              <a:t>Докер-композиции и сеть</a:t>
-            </a:r>
+              <a:t>Основы </a:t>
+            </a:r>
+            <a:r>
+              <a:rPr lang="en-US" dirty="0">
+                <a:latin typeface="Times New Roman" pitchFamily="18" charset="0"/>
+                <a:cs typeface="Times New Roman" pitchFamily="18" charset="0"/>
+              </a:rPr>
+              <a:t>Kubernetes</a:t>
+            </a:r>
+            <a:endParaRPr lang="ru-RU" dirty="0">
+              <a:latin typeface="Times New Roman" pitchFamily="18" charset="0"/>
+              <a:cs typeface="Times New Roman" pitchFamily="18" charset="0"/>
+            </a:endParaRPr>
           </a:p>
         </p:txBody>
       </p:sp>
@@ -16262,11 +16425,590 @@
           <a:p>
             <a:r>
               <a:rPr lang="ru-RU" sz="1000" dirty="0"/>
-              <a:t>Предпосылки появления</a:t>
-            </a:r>
-            <a:r>
-              <a:rPr lang="en-US" sz="1000" dirty="0"/>
-              <a:t> docker-compose</a:t>
+              <a:t>Готовимся к обновлениям</a:t>
+            </a:r>
+            <a:endParaRPr lang="ru-RU" dirty="0"/>
+          </a:p>
+        </p:txBody>
+      </p:sp>
+      <p:sp>
+        <p:nvSpPr>
+          <p:cNvPr id="20" name="Заголовок 2">
+            <a:extLst>
+              <a:ext uri="{FF2B5EF4-FFF2-40B4-BE49-F238E27FC236}">
+                <a16:creationId xmlns:a16="http://schemas.microsoft.com/office/drawing/2014/main" id="{EB3254AC-E053-4C4B-B7AA-603BB6FF23A1}"/>
+              </a:ext>
+            </a:extLst>
+          </p:cNvPr>
+          <p:cNvSpPr>
+            <a:spLocks noGrp="1"/>
+          </p:cNvSpPr>
+          <p:nvPr>
+            <p:ph type="title"/>
+          </p:nvPr>
+        </p:nvSpPr>
+        <p:spPr>
+          <a:xfrm>
+            <a:off x="585897" y="1405055"/>
+            <a:ext cx="11057955" cy="644244"/>
+          </a:xfrm>
+        </p:spPr>
+        <p:txBody>
+          <a:bodyPr>
+            <a:normAutofit/>
+          </a:bodyPr>
+          <a:lstStyle/>
+          <a:p>
+            <a:r>
+              <a:rPr lang="ru-RU" sz="2200" dirty="0"/>
+              <a:t>Готовимся к обновлениям</a:t>
+            </a:r>
+          </a:p>
+        </p:txBody>
+      </p:sp>
+      <p:pic>
+        <p:nvPicPr>
+          <p:cNvPr id="4" name="Рисунок 3">
+            <a:extLst>
+              <a:ext uri="{FF2B5EF4-FFF2-40B4-BE49-F238E27FC236}">
+                <a16:creationId xmlns:a16="http://schemas.microsoft.com/office/drawing/2014/main" id="{5B43E5AD-C51D-4BA4-9AEC-6FDEFD01C6F7}"/>
+              </a:ext>
+            </a:extLst>
+          </p:cNvPr>
+          <p:cNvPicPr>
+            <a:picLocks noChangeAspect="1"/>
+          </p:cNvPicPr>
+          <p:nvPr/>
+        </p:nvPicPr>
+        <p:blipFill>
+          <a:blip r:embed="rId2"/>
+          <a:stretch>
+            <a:fillRect/>
+          </a:stretch>
+        </p:blipFill>
+        <p:spPr>
+          <a:xfrm>
+            <a:off x="7331266" y="748866"/>
+            <a:ext cx="2955734" cy="5980436"/>
+          </a:xfrm>
+          <a:prstGeom prst="rect">
+            <a:avLst/>
+          </a:prstGeom>
+        </p:spPr>
+      </p:pic>
+      <p:sp>
+        <p:nvSpPr>
+          <p:cNvPr id="10" name="Текст 3">
+            <a:extLst>
+              <a:ext uri="{FF2B5EF4-FFF2-40B4-BE49-F238E27FC236}">
+                <a16:creationId xmlns:a16="http://schemas.microsoft.com/office/drawing/2014/main" id="{091C9D81-6DC9-4793-A9B6-366EE01D100C}"/>
+              </a:ext>
+            </a:extLst>
+          </p:cNvPr>
+          <p:cNvSpPr>
+            <a:spLocks noGrp="1"/>
+          </p:cNvSpPr>
+          <p:nvPr>
+            <p:ph type="body" sz="quarter" idx="12"/>
+          </p:nvPr>
+        </p:nvSpPr>
+        <p:spPr>
+          <a:xfrm>
+            <a:off x="447084" y="2049299"/>
+            <a:ext cx="10936386" cy="3756210"/>
+          </a:xfrm>
+        </p:spPr>
+        <p:txBody>
+          <a:bodyPr numCol="1"/>
+          <a:lstStyle/>
+          <a:p>
+            <a:pPr>
+              <a:spcBef>
+                <a:spcPts val="600"/>
+              </a:spcBef>
+              <a:spcAft>
+                <a:spcPts val="600"/>
+              </a:spcAft>
+            </a:pPr>
+            <a:r>
+              <a:rPr lang="ru-RU" sz="1800" dirty="0">
+                <a:latin typeface="Times New Roman" pitchFamily="18" charset="0"/>
+                <a:cs typeface="Times New Roman" pitchFamily="18" charset="0"/>
+              </a:rPr>
+              <a:t>Попробуем сломать</a:t>
+            </a:r>
+            <a:r>
+              <a:rPr lang="en-US" sz="1800" dirty="0">
+                <a:latin typeface="Times New Roman" pitchFamily="18" charset="0"/>
+                <a:cs typeface="Times New Roman" pitchFamily="18" charset="0"/>
+              </a:rPr>
+              <a:t>:</a:t>
+            </a:r>
+          </a:p>
+          <a:p>
+            <a:pPr>
+              <a:spcBef>
+                <a:spcPts val="600"/>
+              </a:spcBef>
+              <a:spcAft>
+                <a:spcPts val="600"/>
+              </a:spcAft>
+            </a:pPr>
+            <a:r>
+              <a:rPr lang="en-US" sz="1800" dirty="0">
+                <a:solidFill>
+                  <a:schemeClr val="bg1"/>
+                </a:solidFill>
+                <a:highlight>
+                  <a:srgbClr val="000000"/>
+                </a:highlight>
+                <a:latin typeface="Times New Roman" pitchFamily="18" charset="0"/>
+                <a:cs typeface="Times New Roman" pitchFamily="18" charset="0"/>
+              </a:rPr>
+              <a:t>kubectl set image deployment/web </a:t>
+            </a:r>
+            <a:r>
+              <a:rPr lang="en-US" sz="1800" dirty="0" err="1">
+                <a:solidFill>
+                  <a:schemeClr val="bg1"/>
+                </a:solidFill>
+                <a:highlight>
+                  <a:srgbClr val="000000"/>
+                </a:highlight>
+                <a:latin typeface="Times New Roman" pitchFamily="18" charset="0"/>
+                <a:cs typeface="Times New Roman" pitchFamily="18" charset="0"/>
+              </a:rPr>
+              <a:t>nginx</a:t>
+            </a:r>
+            <a:r>
+              <a:rPr lang="en-US" sz="1800" dirty="0">
+                <a:solidFill>
+                  <a:schemeClr val="bg1"/>
+                </a:solidFill>
+                <a:highlight>
+                  <a:srgbClr val="000000"/>
+                </a:highlight>
+                <a:latin typeface="Times New Roman" pitchFamily="18" charset="0"/>
+                <a:cs typeface="Times New Roman" pitchFamily="18" charset="0"/>
+              </a:rPr>
+              <a:t>=</a:t>
+            </a:r>
+            <a:r>
+              <a:rPr lang="en-US" sz="1800" dirty="0" err="1">
+                <a:solidFill>
+                  <a:schemeClr val="bg1"/>
+                </a:solidFill>
+                <a:highlight>
+                  <a:srgbClr val="000000"/>
+                </a:highlight>
+                <a:latin typeface="Times New Roman" pitchFamily="18" charset="0"/>
+                <a:cs typeface="Times New Roman" pitchFamily="18" charset="0"/>
+              </a:rPr>
+              <a:t>nginx:err</a:t>
+            </a:r>
+            <a:endParaRPr lang="en-US" sz="1800" dirty="0">
+              <a:solidFill>
+                <a:schemeClr val="bg1"/>
+              </a:solidFill>
+              <a:highlight>
+                <a:srgbClr val="000000"/>
+              </a:highlight>
+              <a:latin typeface="Times New Roman" pitchFamily="18" charset="0"/>
+              <a:cs typeface="Times New Roman" pitchFamily="18" charset="0"/>
+            </a:endParaRPr>
+          </a:p>
+          <a:p>
+            <a:pPr>
+              <a:spcBef>
+                <a:spcPts val="600"/>
+              </a:spcBef>
+              <a:spcAft>
+                <a:spcPts val="600"/>
+              </a:spcAft>
+            </a:pPr>
+            <a:r>
+              <a:rPr lang="en-US" sz="1800" dirty="0">
+                <a:solidFill>
+                  <a:schemeClr val="bg1"/>
+                </a:solidFill>
+                <a:highlight>
+                  <a:srgbClr val="000000"/>
+                </a:highlight>
+                <a:latin typeface="Times New Roman" pitchFamily="18" charset="0"/>
+                <a:cs typeface="Times New Roman" pitchFamily="18" charset="0"/>
+              </a:rPr>
+              <a:t>kubectl get pods</a:t>
+            </a:r>
+            <a:r>
+              <a:rPr lang="ru-RU" sz="1800" dirty="0">
+                <a:solidFill>
+                  <a:schemeClr val="bg1"/>
+                </a:solidFill>
+                <a:highlight>
+                  <a:srgbClr val="000000"/>
+                </a:highlight>
+                <a:latin typeface="Times New Roman" pitchFamily="18" charset="0"/>
+                <a:cs typeface="Times New Roman" pitchFamily="18" charset="0"/>
+              </a:rPr>
+              <a:t> </a:t>
+            </a:r>
+            <a:r>
+              <a:rPr lang="ru-RU" sz="1800" dirty="0">
+                <a:latin typeface="Times New Roman" pitchFamily="18" charset="0"/>
+                <a:cs typeface="Times New Roman" pitchFamily="18" charset="0"/>
+              </a:rPr>
+              <a:t>                                   </a:t>
+            </a:r>
+          </a:p>
+          <a:p>
+            <a:pPr>
+              <a:spcBef>
+                <a:spcPts val="600"/>
+              </a:spcBef>
+              <a:spcAft>
+                <a:spcPts val="600"/>
+              </a:spcAft>
+            </a:pPr>
+            <a:r>
+              <a:rPr lang="ru-RU" sz="1800" b="1" dirty="0">
+                <a:latin typeface="Times New Roman" pitchFamily="18" charset="0"/>
+                <a:cs typeface="Times New Roman" pitchFamily="18" charset="0"/>
+              </a:rPr>
+              <a:t>Ошибка!</a:t>
+            </a:r>
+          </a:p>
+          <a:p>
+            <a:pPr>
+              <a:spcBef>
+                <a:spcPts val="600"/>
+              </a:spcBef>
+              <a:spcAft>
+                <a:spcPts val="600"/>
+              </a:spcAft>
+            </a:pPr>
+            <a:r>
+              <a:rPr lang="ru-RU" sz="1800" dirty="0">
+                <a:latin typeface="Times New Roman" pitchFamily="18" charset="0"/>
+                <a:cs typeface="Times New Roman" pitchFamily="18" charset="0"/>
+              </a:rPr>
+              <a:t>Откатываем</a:t>
+            </a:r>
+            <a:r>
+              <a:rPr lang="en-US" sz="1800" dirty="0">
+                <a:latin typeface="Times New Roman" pitchFamily="18" charset="0"/>
+                <a:cs typeface="Times New Roman" pitchFamily="18" charset="0"/>
+              </a:rPr>
+              <a:t>:</a:t>
+            </a:r>
+            <a:endParaRPr lang="ru-RU" sz="1800" dirty="0">
+              <a:latin typeface="Times New Roman" pitchFamily="18" charset="0"/>
+              <a:cs typeface="Times New Roman" pitchFamily="18" charset="0"/>
+            </a:endParaRPr>
+          </a:p>
+          <a:p>
+            <a:pPr>
+              <a:spcBef>
+                <a:spcPts val="600"/>
+              </a:spcBef>
+              <a:spcAft>
+                <a:spcPts val="600"/>
+              </a:spcAft>
+            </a:pPr>
+            <a:r>
+              <a:rPr lang="en-US" sz="1800" dirty="0">
+                <a:solidFill>
+                  <a:schemeClr val="bg1"/>
+                </a:solidFill>
+                <a:highlight>
+                  <a:srgbClr val="000000"/>
+                </a:highlight>
+                <a:latin typeface="Times New Roman" pitchFamily="18" charset="0"/>
+                <a:cs typeface="Times New Roman" pitchFamily="18" charset="0"/>
+              </a:rPr>
+              <a:t>kubectl rollout status deployment/web --timeout=</a:t>
+            </a:r>
+            <a:r>
+              <a:rPr lang="en-US" sz="1800" dirty="0" err="1">
+                <a:solidFill>
+                  <a:schemeClr val="bg1"/>
+                </a:solidFill>
+                <a:highlight>
+                  <a:srgbClr val="000000"/>
+                </a:highlight>
+                <a:latin typeface="Times New Roman" pitchFamily="18" charset="0"/>
+                <a:cs typeface="Times New Roman" pitchFamily="18" charset="0"/>
+              </a:rPr>
+              <a:t>10s</a:t>
+            </a:r>
+            <a:endParaRPr lang="ru-RU" sz="1800" dirty="0">
+              <a:solidFill>
+                <a:schemeClr val="bg1"/>
+              </a:solidFill>
+              <a:highlight>
+                <a:srgbClr val="000000"/>
+              </a:highlight>
+              <a:latin typeface="Times New Roman" pitchFamily="18" charset="0"/>
+              <a:cs typeface="Times New Roman" pitchFamily="18" charset="0"/>
+            </a:endParaRPr>
+          </a:p>
+          <a:p>
+            <a:pPr>
+              <a:spcBef>
+                <a:spcPts val="600"/>
+              </a:spcBef>
+              <a:spcAft>
+                <a:spcPts val="600"/>
+              </a:spcAft>
+            </a:pPr>
+            <a:r>
+              <a:rPr lang="en-US" sz="1800" dirty="0">
+                <a:solidFill>
+                  <a:schemeClr val="bg1"/>
+                </a:solidFill>
+                <a:highlight>
+                  <a:srgbClr val="000000"/>
+                </a:highlight>
+                <a:latin typeface="Times New Roman" pitchFamily="18" charset="0"/>
+                <a:cs typeface="Times New Roman" pitchFamily="18" charset="0"/>
+              </a:rPr>
+              <a:t>kubectl rollout undo deployment/web</a:t>
+            </a:r>
+          </a:p>
+          <a:p>
+            <a:pPr>
+              <a:spcBef>
+                <a:spcPts val="600"/>
+              </a:spcBef>
+              <a:spcAft>
+                <a:spcPts val="600"/>
+              </a:spcAft>
+            </a:pPr>
+            <a:r>
+              <a:rPr lang="en-US" sz="1800" dirty="0">
+                <a:solidFill>
+                  <a:schemeClr val="bg1"/>
+                </a:solidFill>
+                <a:highlight>
+                  <a:srgbClr val="000000"/>
+                </a:highlight>
+                <a:latin typeface="Times New Roman" pitchFamily="18" charset="0"/>
+                <a:cs typeface="Times New Roman" pitchFamily="18" charset="0"/>
+              </a:rPr>
+              <a:t>kubectl get pods</a:t>
+            </a:r>
+            <a:r>
+              <a:rPr lang="ru-RU" sz="1800" dirty="0">
+                <a:solidFill>
+                  <a:schemeClr val="bg1"/>
+                </a:solidFill>
+                <a:highlight>
+                  <a:srgbClr val="000000"/>
+                </a:highlight>
+                <a:latin typeface="Times New Roman" pitchFamily="18" charset="0"/>
+                <a:cs typeface="Times New Roman" pitchFamily="18" charset="0"/>
+              </a:rPr>
+              <a:t> </a:t>
+            </a:r>
+            <a:r>
+              <a:rPr lang="ru-RU" sz="1800" dirty="0">
+                <a:latin typeface="Times New Roman" pitchFamily="18" charset="0"/>
+                <a:cs typeface="Times New Roman" pitchFamily="18" charset="0"/>
+              </a:rPr>
+              <a:t>                                   </a:t>
+            </a:r>
+            <a:endParaRPr lang="ru-RU" sz="1800" dirty="0">
+              <a:solidFill>
+                <a:schemeClr val="bg1"/>
+              </a:solidFill>
+              <a:highlight>
+                <a:srgbClr val="000000"/>
+              </a:highlight>
+              <a:latin typeface="Times New Roman" pitchFamily="18" charset="0"/>
+              <a:cs typeface="Times New Roman" pitchFamily="18" charset="0"/>
+            </a:endParaRPr>
+          </a:p>
+          <a:p>
+            <a:pPr>
+              <a:spcBef>
+                <a:spcPts val="600"/>
+              </a:spcBef>
+              <a:spcAft>
+                <a:spcPts val="600"/>
+              </a:spcAft>
+            </a:pPr>
+            <a:endParaRPr lang="en-US" sz="1800" b="1" dirty="0">
+              <a:latin typeface="Times New Roman" pitchFamily="18" charset="0"/>
+              <a:cs typeface="Times New Roman" pitchFamily="18" charset="0"/>
+            </a:endParaRPr>
+          </a:p>
+          <a:p>
+            <a:pPr>
+              <a:spcBef>
+                <a:spcPts val="600"/>
+              </a:spcBef>
+              <a:spcAft>
+                <a:spcPts val="600"/>
+              </a:spcAft>
+            </a:pPr>
+            <a:endParaRPr lang="en-US" sz="1800" dirty="0">
+              <a:solidFill>
+                <a:schemeClr val="bg1"/>
+              </a:solidFill>
+              <a:highlight>
+                <a:srgbClr val="000000"/>
+              </a:highlight>
+              <a:latin typeface="Times New Roman" pitchFamily="18" charset="0"/>
+              <a:cs typeface="Times New Roman" pitchFamily="18" charset="0"/>
+            </a:endParaRPr>
+          </a:p>
+          <a:p>
+            <a:pPr>
+              <a:spcBef>
+                <a:spcPts val="600"/>
+              </a:spcBef>
+              <a:spcAft>
+                <a:spcPts val="600"/>
+              </a:spcAft>
+            </a:pPr>
+            <a:endParaRPr lang="ru-RU" sz="1800" dirty="0">
+              <a:latin typeface="Times New Roman" pitchFamily="18" charset="0"/>
+              <a:cs typeface="Times New Roman" pitchFamily="18" charset="0"/>
+            </a:endParaRPr>
+          </a:p>
+        </p:txBody>
+      </p:sp>
+    </p:spTree>
+    <p:extLst>
+      <p:ext uri="{BB962C8B-B14F-4D97-AF65-F5344CB8AC3E}">
+        <p14:creationId xmlns:p14="http://schemas.microsoft.com/office/powerpoint/2010/main" val="816041819"/>
+      </p:ext>
+    </p:extLst>
+  </p:cSld>
+  <p:clrMapOvr>
+    <a:masterClrMapping/>
+  </p:clrMapOvr>
+</p:sld>
+</file>
+
+<file path=ppt/slides/slide14.xml><?xml version="1.0" encoding="utf-8"?>
+<p:sld xmlns:a="http://schemas.openxmlformats.org/drawingml/2006/main" xmlns:r="http://schemas.openxmlformats.org/officeDocument/2006/relationships" xmlns:p="http://schemas.openxmlformats.org/presentationml/2006/main">
+  <p:cSld>
+    <p:spTree>
+      <p:nvGrpSpPr>
+        <p:cNvPr id="1" name=""/>
+        <p:cNvGrpSpPr/>
+        <p:nvPr/>
+      </p:nvGrpSpPr>
+      <p:grpSpPr>
+        <a:xfrm>
+          <a:off x="0" y="0"/>
+          <a:ext cx="0" cy="0"/>
+          <a:chOff x="0" y="0"/>
+          <a:chExt cx="0" cy="0"/>
+        </a:xfrm>
+      </p:grpSpPr>
+      <p:sp>
+        <p:nvSpPr>
+          <p:cNvPr id="5" name="Текст 4">
+            <a:extLst>
+              <a:ext uri="{FF2B5EF4-FFF2-40B4-BE49-F238E27FC236}">
+                <a16:creationId xmlns:a16="http://schemas.microsoft.com/office/drawing/2014/main" id="{3EB29DC1-D5D4-FB41-9E2D-AA4750D0CC8B}"/>
+              </a:ext>
+            </a:extLst>
+          </p:cNvPr>
+          <p:cNvSpPr>
+            <a:spLocks noGrp="1"/>
+          </p:cNvSpPr>
+          <p:nvPr>
+            <p:ph type="body" sz="quarter" idx="13"/>
+          </p:nvPr>
+        </p:nvSpPr>
+        <p:spPr/>
+        <p:txBody>
+          <a:bodyPr/>
+          <a:lstStyle/>
+          <a:p>
+            <a:r>
+              <a:rPr lang="ru-RU" dirty="0"/>
+              <a:t>Промышленное развертывание серверных приложений</a:t>
+            </a:r>
+          </a:p>
+          <a:p>
+            <a:endParaRPr lang="ru-RU" dirty="0"/>
+          </a:p>
+        </p:txBody>
+      </p:sp>
+      <p:sp>
+        <p:nvSpPr>
+          <p:cNvPr id="6" name="Текст 5">
+            <a:extLst>
+              <a:ext uri="{FF2B5EF4-FFF2-40B4-BE49-F238E27FC236}">
+                <a16:creationId xmlns:a16="http://schemas.microsoft.com/office/drawing/2014/main" id="{B5B6DD1A-BEFA-D842-9B7A-78D7BD1A5259}"/>
+              </a:ext>
+            </a:extLst>
+          </p:cNvPr>
+          <p:cNvSpPr>
+            <a:spLocks noGrp="1"/>
+          </p:cNvSpPr>
+          <p:nvPr>
+            <p:ph type="body" sz="quarter" idx="14"/>
+          </p:nvPr>
+        </p:nvSpPr>
+        <p:spPr>
+          <a:xfrm>
+            <a:off x="3459162" y="548720"/>
+            <a:ext cx="2456115" cy="641451"/>
+          </a:xfrm>
+        </p:spPr>
+        <p:txBody>
+          <a:bodyPr/>
+          <a:lstStyle/>
+          <a:p>
+            <a:r>
+              <a:rPr lang="ru-RU" dirty="0">
+                <a:latin typeface="Times New Roman" pitchFamily="18" charset="0"/>
+                <a:cs typeface="Times New Roman" pitchFamily="18" charset="0"/>
+              </a:rPr>
+              <a:t>Основы </a:t>
+            </a:r>
+            <a:r>
+              <a:rPr lang="en-US" dirty="0">
+                <a:latin typeface="Times New Roman" pitchFamily="18" charset="0"/>
+                <a:cs typeface="Times New Roman" pitchFamily="18" charset="0"/>
+              </a:rPr>
+              <a:t>Kubernetes</a:t>
+            </a:r>
+            <a:endParaRPr lang="ru-RU" dirty="0">
+              <a:latin typeface="Times New Roman" pitchFamily="18" charset="0"/>
+              <a:cs typeface="Times New Roman" pitchFamily="18" charset="0"/>
+            </a:endParaRPr>
+          </a:p>
+        </p:txBody>
+      </p:sp>
+      <p:sp>
+        <p:nvSpPr>
+          <p:cNvPr id="15" name="Текст 14">
+            <a:extLst>
+              <a:ext uri="{FF2B5EF4-FFF2-40B4-BE49-F238E27FC236}">
+                <a16:creationId xmlns:a16="http://schemas.microsoft.com/office/drawing/2014/main" id="{D41A0F8D-9767-4A5D-947A-34B08831DECE}"/>
+              </a:ext>
+            </a:extLst>
+          </p:cNvPr>
+          <p:cNvSpPr>
+            <a:spLocks noGrp="1"/>
+          </p:cNvSpPr>
+          <p:nvPr>
+            <p:ph type="body" sz="quarter" idx="15"/>
+          </p:nvPr>
+        </p:nvSpPr>
+        <p:spPr/>
+        <p:txBody>
+          <a:bodyPr/>
+          <a:lstStyle/>
+          <a:p>
+            <a:r>
+              <a:rPr lang="ru-RU" sz="1000" dirty="0"/>
+              <a:t>Пишем конфигурацию</a:t>
             </a:r>
             <a:endParaRPr lang="ru-RU" dirty="0"/>
           </a:p>
@@ -16717,7 +17459,7 @@
 </p:sld>
 </file>
 
-<file path=ppt/slides/slide14.xml><?xml version="1.0" encoding="utf-8"?>
+<file path=ppt/slides/slide15.xml><?xml version="1.0" encoding="utf-8"?>
 <p:sld xmlns:a="http://schemas.openxmlformats.org/drawingml/2006/main" xmlns:r="http://schemas.openxmlformats.org/officeDocument/2006/relationships" xmlns:p="http://schemas.openxmlformats.org/presentationml/2006/main">
   <p:cSld>
     <p:spTree>
@@ -16796,8 +17538,19 @@
                 <a:latin typeface="Times New Roman" pitchFamily="18" charset="0"/>
                 <a:cs typeface="Times New Roman" pitchFamily="18" charset="0"/>
               </a:rPr>
-              <a:t>Докер-композиции и сеть</a:t>
-            </a:r>
+              <a:t>Основы </a:t>
+            </a:r>
+            <a:r>
+              <a:rPr lang="en-US" dirty="0">
+                <a:latin typeface="Times New Roman" pitchFamily="18" charset="0"/>
+                <a:cs typeface="Times New Roman" pitchFamily="18" charset="0"/>
+              </a:rPr>
+              <a:t>Kubernetes</a:t>
+            </a:r>
+            <a:endParaRPr lang="ru-RU" dirty="0">
+              <a:latin typeface="Times New Roman" pitchFamily="18" charset="0"/>
+              <a:cs typeface="Times New Roman" pitchFamily="18" charset="0"/>
+            </a:endParaRPr>
           </a:p>
         </p:txBody>
       </p:sp>
@@ -16824,11 +17577,7 @@
           <a:p>
             <a:r>
               <a:rPr lang="ru-RU" sz="1000" dirty="0"/>
-              <a:t>Предпосылки появления</a:t>
-            </a:r>
-            <a:r>
-              <a:rPr lang="en-US" sz="1000" dirty="0"/>
-              <a:t> docker-compose</a:t>
+              <a:t>Пишем секрет</a:t>
             </a:r>
             <a:endParaRPr lang="ru-RU" dirty="0"/>
           </a:p>
@@ -17309,7 +18058,7 @@
 </p:sld>
 </file>
 
-<file path=ppt/slides/slide15.xml><?xml version="1.0" encoding="utf-8"?>
+<file path=ppt/slides/slide16.xml><?xml version="1.0" encoding="utf-8"?>
 <p:sld xmlns:a="http://schemas.openxmlformats.org/drawingml/2006/main" xmlns:r="http://schemas.openxmlformats.org/officeDocument/2006/relationships" xmlns:p="http://schemas.openxmlformats.org/presentationml/2006/main">
   <p:cSld>
     <p:spTree>
@@ -17388,8 +18137,19 @@
                 <a:latin typeface="Times New Roman" pitchFamily="18" charset="0"/>
                 <a:cs typeface="Times New Roman" pitchFamily="18" charset="0"/>
               </a:rPr>
-              <a:t>Докер-композиции и сеть</a:t>
-            </a:r>
+              <a:t>Основы </a:t>
+            </a:r>
+            <a:r>
+              <a:rPr lang="en-US" dirty="0">
+                <a:latin typeface="Times New Roman" pitchFamily="18" charset="0"/>
+                <a:cs typeface="Times New Roman" pitchFamily="18" charset="0"/>
+              </a:rPr>
+              <a:t>Kubernetes</a:t>
+            </a:r>
+            <a:endParaRPr lang="ru-RU" dirty="0">
+              <a:latin typeface="Times New Roman" pitchFamily="18" charset="0"/>
+              <a:cs typeface="Times New Roman" pitchFamily="18" charset="0"/>
+            </a:endParaRPr>
           </a:p>
         </p:txBody>
       </p:sp>
@@ -17416,11 +18176,7 @@
           <a:p>
             <a:r>
               <a:rPr lang="ru-RU" sz="1000" dirty="0"/>
-              <a:t>Предпосылки появления</a:t>
-            </a:r>
-            <a:r>
-              <a:rPr lang="en-US" sz="1000" dirty="0"/>
-              <a:t> docker-compose</a:t>
+              <a:t>Проверка статуса и ресурсы</a:t>
             </a:r>
             <a:endParaRPr lang="ru-RU" dirty="0"/>
           </a:p>
@@ -17861,656 +18617,6 @@
     <p:extLst>
       <p:ext uri="{BB962C8B-B14F-4D97-AF65-F5344CB8AC3E}">
         <p14:creationId xmlns:p14="http://schemas.microsoft.com/office/powerpoint/2010/main" val="2215946376"/>
-      </p:ext>
-    </p:extLst>
-  </p:cSld>
-  <p:clrMapOvr>
-    <a:masterClrMapping/>
-  </p:clrMapOvr>
-</p:sld>
-</file>
-
-<file path=ppt/slides/slide16.xml><?xml version="1.0" encoding="utf-8"?>
-<p:sld xmlns:a="http://schemas.openxmlformats.org/drawingml/2006/main" xmlns:r="http://schemas.openxmlformats.org/officeDocument/2006/relationships" xmlns:p="http://schemas.openxmlformats.org/presentationml/2006/main">
-  <p:cSld>
-    <p:spTree>
-      <p:nvGrpSpPr>
-        <p:cNvPr id="1" name=""/>
-        <p:cNvGrpSpPr/>
-        <p:nvPr/>
-      </p:nvGrpSpPr>
-      <p:grpSpPr>
-        <a:xfrm>
-          <a:off x="0" y="0"/>
-          <a:ext cx="0" cy="0"/>
-          <a:chOff x="0" y="0"/>
-          <a:chExt cx="0" cy="0"/>
-        </a:xfrm>
-      </p:grpSpPr>
-      <p:sp>
-        <p:nvSpPr>
-          <p:cNvPr id="5" name="Текст 4">
-            <a:extLst>
-              <a:ext uri="{FF2B5EF4-FFF2-40B4-BE49-F238E27FC236}">
-                <a16:creationId xmlns:a16="http://schemas.microsoft.com/office/drawing/2014/main" id="{3EB29DC1-D5D4-FB41-9E2D-AA4750D0CC8B}"/>
-              </a:ext>
-            </a:extLst>
-          </p:cNvPr>
-          <p:cNvSpPr>
-            <a:spLocks noGrp="1"/>
-          </p:cNvSpPr>
-          <p:nvPr>
-            <p:ph type="body" sz="quarter" idx="13"/>
-          </p:nvPr>
-        </p:nvSpPr>
-        <p:spPr/>
-        <p:txBody>
-          <a:bodyPr/>
-          <a:lstStyle/>
-          <a:p>
-            <a:r>
-              <a:rPr lang="ru-RU" dirty="0"/>
-              <a:t>Промышленное развертывание серверных приложений</a:t>
-            </a:r>
-          </a:p>
-          <a:p>
-            <a:endParaRPr lang="ru-RU" dirty="0"/>
-          </a:p>
-        </p:txBody>
-      </p:sp>
-      <p:sp>
-        <p:nvSpPr>
-          <p:cNvPr id="6" name="Текст 5">
-            <a:extLst>
-              <a:ext uri="{FF2B5EF4-FFF2-40B4-BE49-F238E27FC236}">
-                <a16:creationId xmlns:a16="http://schemas.microsoft.com/office/drawing/2014/main" id="{B5B6DD1A-BEFA-D842-9B7A-78D7BD1A5259}"/>
-              </a:ext>
-            </a:extLst>
-          </p:cNvPr>
-          <p:cNvSpPr>
-            <a:spLocks noGrp="1"/>
-          </p:cNvSpPr>
-          <p:nvPr>
-            <p:ph type="body" sz="quarter" idx="14"/>
-          </p:nvPr>
-        </p:nvSpPr>
-        <p:spPr>
-          <a:xfrm>
-            <a:off x="3459162" y="548720"/>
-            <a:ext cx="2456115" cy="641451"/>
-          </a:xfrm>
-        </p:spPr>
-        <p:txBody>
-          <a:bodyPr/>
-          <a:lstStyle/>
-          <a:p>
-            <a:r>
-              <a:rPr lang="ru-RU" dirty="0">
-                <a:latin typeface="Times New Roman" pitchFamily="18" charset="0"/>
-                <a:cs typeface="Times New Roman" pitchFamily="18" charset="0"/>
-              </a:rPr>
-              <a:t>Докер-композиции и сеть</a:t>
-            </a:r>
-          </a:p>
-        </p:txBody>
-      </p:sp>
-      <p:sp>
-        <p:nvSpPr>
-          <p:cNvPr id="15" name="Текст 14">
-            <a:extLst>
-              <a:ext uri="{FF2B5EF4-FFF2-40B4-BE49-F238E27FC236}">
-                <a16:creationId xmlns:a16="http://schemas.microsoft.com/office/drawing/2014/main" id="{D41A0F8D-9767-4A5D-947A-34B08831DECE}"/>
-              </a:ext>
-            </a:extLst>
-          </p:cNvPr>
-          <p:cNvSpPr>
-            <a:spLocks noGrp="1"/>
-          </p:cNvSpPr>
-          <p:nvPr>
-            <p:ph type="body" sz="quarter" idx="15"/>
-          </p:nvPr>
-        </p:nvSpPr>
-        <p:spPr/>
-        <p:txBody>
-          <a:bodyPr/>
-          <a:lstStyle/>
-          <a:p>
-            <a:r>
-              <a:rPr lang="ru-RU" sz="1000" dirty="0"/>
-              <a:t>Предпосылки появления</a:t>
-            </a:r>
-            <a:r>
-              <a:rPr lang="en-US" sz="1000" dirty="0"/>
-              <a:t> docker-compose</a:t>
-            </a:r>
-            <a:endParaRPr lang="ru-RU" dirty="0"/>
-          </a:p>
-        </p:txBody>
-      </p:sp>
-      <p:sp>
-        <p:nvSpPr>
-          <p:cNvPr id="20" name="Заголовок 2">
-            <a:extLst>
-              <a:ext uri="{FF2B5EF4-FFF2-40B4-BE49-F238E27FC236}">
-                <a16:creationId xmlns:a16="http://schemas.microsoft.com/office/drawing/2014/main" id="{EB3254AC-E053-4C4B-B7AA-603BB6FF23A1}"/>
-              </a:ext>
-            </a:extLst>
-          </p:cNvPr>
-          <p:cNvSpPr>
-            <a:spLocks noGrp="1"/>
-          </p:cNvSpPr>
-          <p:nvPr>
-            <p:ph type="title"/>
-          </p:nvPr>
-        </p:nvSpPr>
-        <p:spPr>
-          <a:xfrm>
-            <a:off x="567022" y="1375851"/>
-            <a:ext cx="11057955" cy="644244"/>
-          </a:xfrm>
-        </p:spPr>
-        <p:txBody>
-          <a:bodyPr>
-            <a:normAutofit/>
-          </a:bodyPr>
-          <a:lstStyle/>
-          <a:p>
-            <a:r>
-              <a:rPr lang="ru-RU" sz="2200" dirty="0"/>
-              <a:t>Домашнее задание</a:t>
-            </a:r>
-          </a:p>
-        </p:txBody>
-      </p:sp>
-      <p:sp>
-        <p:nvSpPr>
-          <p:cNvPr id="16" name="Текст 3">
-            <a:extLst>
-              <a:ext uri="{FF2B5EF4-FFF2-40B4-BE49-F238E27FC236}">
-                <a16:creationId xmlns:a16="http://schemas.microsoft.com/office/drawing/2014/main" id="{75C7C0A3-D77C-4037-BAC4-0E0BBF13BF6D}"/>
-              </a:ext>
-            </a:extLst>
-          </p:cNvPr>
-          <p:cNvSpPr>
-            <a:spLocks noGrp="1"/>
-          </p:cNvSpPr>
-          <p:nvPr>
-            <p:ph type="body" sz="quarter" idx="12"/>
-          </p:nvPr>
-        </p:nvSpPr>
-        <p:spPr>
-          <a:xfrm>
-            <a:off x="567022" y="2035705"/>
-            <a:ext cx="10936386" cy="3756210"/>
-          </a:xfrm>
-        </p:spPr>
-        <p:txBody>
-          <a:bodyPr numCol="1"/>
-          <a:lstStyle/>
-          <a:p>
-            <a:pPr marL="285750" indent="-285750">
-              <a:spcBef>
-                <a:spcPts val="600"/>
-              </a:spcBef>
-              <a:spcAft>
-                <a:spcPts val="600"/>
-              </a:spcAft>
-              <a:buFont typeface="Arial" panose="020B0604020202020204" pitchFamily="34" charset="0"/>
-              <a:buChar char="•"/>
-            </a:pPr>
-            <a:r>
-              <a:rPr lang="ru-RU" sz="1800" dirty="0">
-                <a:latin typeface="Times New Roman" pitchFamily="18" charset="0"/>
-                <a:cs typeface="Times New Roman" pitchFamily="18" charset="0"/>
-              </a:rPr>
-              <a:t>Собираем и загружаем свой образ с приложением в </a:t>
-            </a:r>
-            <a:r>
-              <a:rPr lang="en-US" sz="1800" dirty="0">
-                <a:latin typeface="Times New Roman" pitchFamily="18" charset="0"/>
-                <a:cs typeface="Times New Roman" pitchFamily="18" charset="0"/>
-              </a:rPr>
-              <a:t>kind</a:t>
-            </a:r>
-          </a:p>
-          <a:p>
-            <a:pPr>
-              <a:spcBef>
-                <a:spcPts val="600"/>
-              </a:spcBef>
-              <a:spcAft>
-                <a:spcPts val="600"/>
-              </a:spcAft>
-            </a:pPr>
-            <a:r>
-              <a:rPr lang="en-US" sz="1800" dirty="0">
-                <a:solidFill>
-                  <a:schemeClr val="bg1"/>
-                </a:solidFill>
-                <a:highlight>
-                  <a:srgbClr val="000000"/>
-                </a:highlight>
-                <a:latin typeface="Times New Roman" pitchFamily="18" charset="0"/>
-                <a:cs typeface="Times New Roman" pitchFamily="18" charset="0"/>
-              </a:rPr>
-              <a:t>kind load docker-image </a:t>
-            </a:r>
-            <a:r>
-              <a:rPr lang="en-US" sz="1800" dirty="0" err="1">
-                <a:solidFill>
-                  <a:schemeClr val="bg1"/>
-                </a:solidFill>
-                <a:highlight>
-                  <a:srgbClr val="000000"/>
-                </a:highlight>
-                <a:latin typeface="Times New Roman" pitchFamily="18" charset="0"/>
-                <a:cs typeface="Times New Roman" pitchFamily="18" charset="0"/>
-              </a:rPr>
-              <a:t>my-app:v1</a:t>
-            </a:r>
-            <a:r>
-              <a:rPr lang="en-US" sz="1800" dirty="0">
-                <a:solidFill>
-                  <a:schemeClr val="bg1"/>
-                </a:solidFill>
-                <a:highlight>
-                  <a:srgbClr val="000000"/>
-                </a:highlight>
-                <a:latin typeface="Times New Roman" pitchFamily="18" charset="0"/>
-                <a:cs typeface="Times New Roman" pitchFamily="18" charset="0"/>
-              </a:rPr>
-              <a:t> --name </a:t>
-            </a:r>
-            <a:r>
-              <a:rPr lang="en-US" sz="1800" dirty="0" err="1">
-                <a:solidFill>
-                  <a:schemeClr val="bg1"/>
-                </a:solidFill>
-                <a:highlight>
-                  <a:srgbClr val="000000"/>
-                </a:highlight>
-                <a:latin typeface="Times New Roman" pitchFamily="18" charset="0"/>
-                <a:cs typeface="Times New Roman" pitchFamily="18" charset="0"/>
-              </a:rPr>
-              <a:t>k8s</a:t>
-            </a:r>
-            <a:r>
-              <a:rPr lang="en-US" sz="1800" dirty="0">
-                <a:solidFill>
-                  <a:schemeClr val="bg1"/>
-                </a:solidFill>
-                <a:highlight>
-                  <a:srgbClr val="000000"/>
-                </a:highlight>
-                <a:latin typeface="Times New Roman" pitchFamily="18" charset="0"/>
-                <a:cs typeface="Times New Roman" pitchFamily="18" charset="0"/>
-              </a:rPr>
-              <a:t>-lab</a:t>
-            </a:r>
-            <a:endParaRPr lang="ru-RU" sz="1800" dirty="0">
-              <a:solidFill>
-                <a:schemeClr val="bg1"/>
-              </a:solidFill>
-              <a:highlight>
-                <a:srgbClr val="000000"/>
-              </a:highlight>
-              <a:latin typeface="Times New Roman" pitchFamily="18" charset="0"/>
-              <a:cs typeface="Times New Roman" pitchFamily="18" charset="0"/>
-            </a:endParaRPr>
-          </a:p>
-          <a:p>
-            <a:pPr>
-              <a:spcBef>
-                <a:spcPts val="600"/>
-              </a:spcBef>
-              <a:spcAft>
-                <a:spcPts val="600"/>
-              </a:spcAft>
-            </a:pPr>
-            <a:r>
-              <a:rPr lang="ru-RU" sz="1800" dirty="0">
-                <a:latin typeface="Times New Roman" pitchFamily="18" charset="0"/>
-                <a:cs typeface="Times New Roman" pitchFamily="18" charset="0"/>
-              </a:rPr>
-              <a:t>На 6</a:t>
-            </a:r>
-          </a:p>
-          <a:p>
-            <a:pPr marL="285750" indent="-285750">
-              <a:spcBef>
-                <a:spcPts val="600"/>
-              </a:spcBef>
-              <a:spcAft>
-                <a:spcPts val="600"/>
-              </a:spcAft>
-              <a:buFont typeface="Arial" panose="020B0604020202020204" pitchFamily="34" charset="0"/>
-              <a:buChar char="•"/>
-            </a:pPr>
-            <a:r>
-              <a:rPr lang="ru-RU" sz="1800" dirty="0">
-                <a:latin typeface="Times New Roman" pitchFamily="18" charset="0"/>
-                <a:cs typeface="Times New Roman" pitchFamily="18" charset="0"/>
-              </a:rPr>
-              <a:t>Образ,</a:t>
-            </a:r>
-            <a:r>
-              <a:rPr lang="en-US" sz="1800" dirty="0">
-                <a:latin typeface="Times New Roman" pitchFamily="18" charset="0"/>
-                <a:cs typeface="Times New Roman" pitchFamily="18" charset="0"/>
-              </a:rPr>
-              <a:t> namespace, </a:t>
-            </a:r>
-            <a:r>
-              <a:rPr lang="ru-RU" sz="1800" dirty="0">
-                <a:latin typeface="Times New Roman" pitchFamily="18" charset="0"/>
-                <a:cs typeface="Times New Roman" pitchFamily="18" charset="0"/>
-              </a:rPr>
-              <a:t>3 реплики</a:t>
-            </a:r>
-            <a:r>
-              <a:rPr lang="en-US" sz="1800" dirty="0">
-                <a:latin typeface="Times New Roman" pitchFamily="18" charset="0"/>
-                <a:cs typeface="Times New Roman" pitchFamily="18" charset="0"/>
-              </a:rPr>
-              <a:t>, service</a:t>
-            </a:r>
-            <a:endParaRPr lang="ru-RU" sz="1800" dirty="0">
-              <a:latin typeface="Times New Roman" pitchFamily="18" charset="0"/>
-              <a:cs typeface="Times New Roman" pitchFamily="18" charset="0"/>
-            </a:endParaRPr>
-          </a:p>
-          <a:p>
-            <a:pPr>
-              <a:spcBef>
-                <a:spcPts val="600"/>
-              </a:spcBef>
-              <a:spcAft>
-                <a:spcPts val="600"/>
-              </a:spcAft>
-            </a:pPr>
-            <a:r>
-              <a:rPr lang="ru-RU" sz="1800" dirty="0">
-                <a:latin typeface="Times New Roman" pitchFamily="18" charset="0"/>
-                <a:cs typeface="Times New Roman" pitchFamily="18" charset="0"/>
-              </a:rPr>
-              <a:t>На 8</a:t>
-            </a:r>
-          </a:p>
-          <a:p>
-            <a:pPr marL="285750" indent="-285750">
-              <a:spcBef>
-                <a:spcPts val="600"/>
-              </a:spcBef>
-              <a:spcAft>
-                <a:spcPts val="600"/>
-              </a:spcAft>
-              <a:buFont typeface="Arial" panose="020B0604020202020204" pitchFamily="34" charset="0"/>
-              <a:buChar char="•"/>
-            </a:pPr>
-            <a:r>
-              <a:rPr lang="ru-RU" sz="1800" dirty="0">
-                <a:latin typeface="Times New Roman" pitchFamily="18" charset="0"/>
-                <a:cs typeface="Times New Roman" pitchFamily="18" charset="0"/>
-              </a:rPr>
-              <a:t>Все, что на 6, но с </a:t>
-            </a:r>
-            <a:r>
-              <a:rPr lang="en-US" sz="1800" dirty="0" err="1">
-                <a:latin typeface="Times New Roman" pitchFamily="18" charset="0"/>
-                <a:cs typeface="Times New Roman" pitchFamily="18" charset="0"/>
-              </a:rPr>
-              <a:t>ConfigMap</a:t>
-            </a:r>
-            <a:r>
-              <a:rPr lang="en-US" sz="1800" dirty="0">
-                <a:latin typeface="Times New Roman" pitchFamily="18" charset="0"/>
-                <a:cs typeface="Times New Roman" pitchFamily="18" charset="0"/>
-              </a:rPr>
-              <a:t>, Secret, probes. requests, limits</a:t>
-            </a:r>
-            <a:endParaRPr lang="ru-RU" sz="1800" dirty="0">
-              <a:latin typeface="Times New Roman" pitchFamily="18" charset="0"/>
-              <a:cs typeface="Times New Roman" pitchFamily="18" charset="0"/>
-            </a:endParaRPr>
-          </a:p>
-          <a:p>
-            <a:pPr>
-              <a:spcBef>
-                <a:spcPts val="600"/>
-              </a:spcBef>
-              <a:spcAft>
-                <a:spcPts val="600"/>
-              </a:spcAft>
-            </a:pPr>
-            <a:r>
-              <a:rPr lang="ru-RU" sz="1800" dirty="0">
-                <a:latin typeface="Times New Roman" pitchFamily="18" charset="0"/>
-                <a:cs typeface="Times New Roman" pitchFamily="18" charset="0"/>
-              </a:rPr>
-              <a:t>На 10</a:t>
-            </a:r>
-          </a:p>
-          <a:p>
-            <a:pPr marL="285750" indent="-285750">
-              <a:spcBef>
-                <a:spcPts val="600"/>
-              </a:spcBef>
-              <a:spcAft>
-                <a:spcPts val="600"/>
-              </a:spcAft>
-              <a:buFont typeface="Arial" panose="020B0604020202020204" pitchFamily="34" charset="0"/>
-              <a:buChar char="•"/>
-            </a:pPr>
-            <a:r>
-              <a:rPr lang="ru-RU" sz="1800" dirty="0">
-                <a:latin typeface="Times New Roman" pitchFamily="18" charset="0"/>
-                <a:cs typeface="Times New Roman" pitchFamily="18" charset="0"/>
-              </a:rPr>
-              <a:t>Попытка </a:t>
-            </a:r>
-            <a:r>
-              <a:rPr lang="en-US" sz="1800" dirty="0">
-                <a:latin typeface="Times New Roman" pitchFamily="18" charset="0"/>
-                <a:cs typeface="Times New Roman" pitchFamily="18" charset="0"/>
-              </a:rPr>
-              <a:t>rollout </a:t>
-            </a:r>
-            <a:r>
-              <a:rPr lang="ru-RU" sz="1800" dirty="0">
-                <a:latin typeface="Times New Roman" pitchFamily="18" charset="0"/>
-                <a:cs typeface="Times New Roman" pitchFamily="18" charset="0"/>
-              </a:rPr>
-              <a:t>с неверным тегом, откат</a:t>
-            </a:r>
-            <a:endParaRPr lang="en-US" sz="1800" dirty="0">
-              <a:latin typeface="Times New Roman" pitchFamily="18" charset="0"/>
-              <a:cs typeface="Times New Roman" pitchFamily="18" charset="0"/>
-            </a:endParaRPr>
-          </a:p>
-          <a:p>
-            <a:pPr marL="285750" indent="-285750">
-              <a:spcBef>
-                <a:spcPts val="600"/>
-              </a:spcBef>
-              <a:spcAft>
-                <a:spcPts val="600"/>
-              </a:spcAft>
-              <a:buFont typeface="Arial" panose="020B0604020202020204" pitchFamily="34" charset="0"/>
-              <a:buChar char="•"/>
-            </a:pPr>
-            <a:endParaRPr lang="ru-RU" sz="1800" dirty="0">
-              <a:latin typeface="Times New Roman" pitchFamily="18" charset="0"/>
-              <a:cs typeface="Times New Roman" pitchFamily="18" charset="0"/>
-            </a:endParaRPr>
-          </a:p>
-          <a:p>
-            <a:pPr>
-              <a:spcBef>
-                <a:spcPts val="600"/>
-              </a:spcBef>
-              <a:spcAft>
-                <a:spcPts val="600"/>
-              </a:spcAft>
-            </a:pPr>
-            <a:r>
-              <a:rPr lang="ru-RU" sz="1800" b="1" dirty="0">
-                <a:latin typeface="Times New Roman" pitchFamily="18" charset="0"/>
-                <a:cs typeface="Times New Roman" pitchFamily="18" charset="0"/>
-              </a:rPr>
-              <a:t>Формат</a:t>
-            </a:r>
-            <a:r>
-              <a:rPr lang="en-US" sz="1800" b="1" dirty="0">
-                <a:latin typeface="Times New Roman" pitchFamily="18" charset="0"/>
-                <a:cs typeface="Times New Roman" pitchFamily="18" charset="0"/>
-              </a:rPr>
-              <a:t>: </a:t>
-            </a:r>
-            <a:r>
-              <a:rPr lang="ru-RU" sz="1800" b="1" dirty="0">
-                <a:latin typeface="Times New Roman" pitchFamily="18" charset="0"/>
-                <a:cs typeface="Times New Roman" pitchFamily="18" charset="0"/>
-              </a:rPr>
-              <a:t>архив с </a:t>
-            </a:r>
-            <a:r>
-              <a:rPr lang="en-US" sz="1800" b="1" dirty="0" err="1">
-                <a:latin typeface="Times New Roman" pitchFamily="18" charset="0"/>
-                <a:cs typeface="Times New Roman" pitchFamily="18" charset="0"/>
-              </a:rPr>
-              <a:t>yaml</a:t>
-            </a:r>
-            <a:r>
-              <a:rPr lang="ru-RU" sz="1800" b="1" dirty="0">
-                <a:latin typeface="Times New Roman" pitchFamily="18" charset="0"/>
-                <a:cs typeface="Times New Roman" pitchFamily="18" charset="0"/>
-              </a:rPr>
-              <a:t> конфигурациями + фотоотчет</a:t>
-            </a:r>
-            <a:r>
-              <a:rPr lang="en-US" sz="1800" b="1" dirty="0">
-                <a:latin typeface="Times New Roman" pitchFamily="18" charset="0"/>
-                <a:cs typeface="Times New Roman" pitchFamily="18" charset="0"/>
-              </a:rPr>
-              <a:t> </a:t>
-            </a:r>
-            <a:r>
-              <a:rPr lang="ru-RU" sz="1800" b="1" dirty="0">
-                <a:latin typeface="Times New Roman" pitchFamily="18" charset="0"/>
-                <a:cs typeface="Times New Roman" pitchFamily="18" charset="0"/>
-              </a:rPr>
-              <a:t>со скринами из консоли в формате </a:t>
-            </a:r>
-            <a:r>
-              <a:rPr lang="en-US" sz="1800" b="1" dirty="0">
-                <a:latin typeface="Times New Roman" pitchFamily="18" charset="0"/>
-                <a:cs typeface="Times New Roman" pitchFamily="18" charset="0"/>
-              </a:rPr>
-              <a:t>.pdf</a:t>
-            </a:r>
-          </a:p>
-          <a:p>
-            <a:pPr>
-              <a:spcBef>
-                <a:spcPts val="600"/>
-              </a:spcBef>
-              <a:spcAft>
-                <a:spcPts val="600"/>
-              </a:spcAft>
-            </a:pPr>
-            <a:r>
-              <a:rPr lang="en-US" sz="1400" b="1" dirty="0">
-                <a:latin typeface="Times New Roman" pitchFamily="18" charset="0"/>
-                <a:cs typeface="Times New Roman" pitchFamily="18" charset="0"/>
-              </a:rPr>
-              <a:t>p.s. </a:t>
-            </a:r>
-            <a:r>
-              <a:rPr lang="ru-RU" sz="1400" b="1" dirty="0">
-                <a:latin typeface="Times New Roman" pitchFamily="18" charset="0"/>
-                <a:cs typeface="Times New Roman" pitchFamily="18" charset="0"/>
-              </a:rPr>
-              <a:t>приложение –  веб-сервис на любом языке, использующий конфиги и секреты, имеющий способ проверки жизни</a:t>
-            </a:r>
-            <a:r>
-              <a:rPr lang="en-US" sz="1400" b="1" dirty="0">
-                <a:latin typeface="Times New Roman" pitchFamily="18" charset="0"/>
-                <a:cs typeface="Times New Roman" pitchFamily="18" charset="0"/>
-              </a:rPr>
-              <a:t> (</a:t>
-            </a:r>
-            <a:r>
-              <a:rPr lang="ru-RU" sz="1400" b="1" dirty="0">
-                <a:latin typeface="Times New Roman" pitchFamily="18" charset="0"/>
-                <a:cs typeface="Times New Roman" pitchFamily="18" charset="0"/>
-              </a:rPr>
-              <a:t>если на 8+</a:t>
-            </a:r>
-            <a:r>
-              <a:rPr lang="en-US" sz="1400" b="1" dirty="0">
-                <a:latin typeface="Times New Roman" pitchFamily="18" charset="0"/>
-                <a:cs typeface="Times New Roman" pitchFamily="18" charset="0"/>
-              </a:rPr>
-              <a:t>)</a:t>
-            </a:r>
-            <a:endParaRPr lang="ru-RU" sz="1400" b="1" dirty="0">
-              <a:latin typeface="Times New Roman" pitchFamily="18" charset="0"/>
-              <a:cs typeface="Times New Roman" pitchFamily="18" charset="0"/>
-            </a:endParaRPr>
-          </a:p>
-        </p:txBody>
-      </p:sp>
-      <p:pic>
-        <p:nvPicPr>
-          <p:cNvPr id="8" name="Picture 2" descr="Picture background">
-            <a:extLst>
-              <a:ext uri="{FF2B5EF4-FFF2-40B4-BE49-F238E27FC236}">
-                <a16:creationId xmlns:a16="http://schemas.microsoft.com/office/drawing/2014/main" id="{00E30114-0D7C-40C1-A26A-5810A7C9727A}"/>
-              </a:ext>
-            </a:extLst>
-          </p:cNvPr>
-          <p:cNvPicPr>
-            <a:picLocks noChangeAspect="1" noChangeArrowheads="1"/>
-          </p:cNvPicPr>
-          <p:nvPr/>
-        </p:nvPicPr>
-        <p:blipFill>
-          <a:blip r:embed="rId2">
-            <a:extLst>
-              <a:ext uri="{28A0092B-C50C-407E-A947-70E740481C1C}">
-                <a14:useLocalDpi xmlns:a14="http://schemas.microsoft.com/office/drawing/2010/main" val="0"/>
-              </a:ext>
-            </a:extLst>
-          </a:blip>
-          <a:srcRect/>
-          <a:stretch>
-            <a:fillRect/>
-          </a:stretch>
-        </p:blipFill>
-        <p:spPr bwMode="auto">
-          <a:xfrm>
-            <a:off x="6955683" y="2126319"/>
-            <a:ext cx="4460950" cy="3345713"/>
-          </a:xfrm>
-          <a:prstGeom prst="rect">
-            <a:avLst/>
-          </a:prstGeom>
-          <a:noFill/>
-          <a:extLst>
-            <a:ext uri="{909E8E84-426E-40DD-AFC4-6F175D3DCCD1}">
-              <a14:hiddenFill xmlns:a14="http://schemas.microsoft.com/office/drawing/2010/main">
-                <a:solidFill>
-                  <a:srgbClr val="FFFFFF"/>
-                </a:solidFill>
-              </a14:hiddenFill>
-            </a:ext>
-          </a:extLst>
-        </p:spPr>
-      </p:pic>
-    </p:spTree>
-    <p:extLst>
-      <p:ext uri="{BB962C8B-B14F-4D97-AF65-F5344CB8AC3E}">
-        <p14:creationId xmlns:p14="http://schemas.microsoft.com/office/powerpoint/2010/main" val="796970741"/>
       </p:ext>
     </p:extLst>
   </p:cSld>
@@ -18560,7 +18666,7 @@
           <a:p>
             <a:r>
               <a:rPr lang="ru-RU" dirty="0"/>
-              <a:t>Научно-учебная лаборатория облачных и мобильных технологий</a:t>
+              <a:t>Промышленное развертывание серверных приложений</a:t>
             </a:r>
           </a:p>
           <a:p>
@@ -18599,8 +18705,676 @@
                 <a:latin typeface="Times New Roman" pitchFamily="18" charset="0"/>
                 <a:cs typeface="Times New Roman" pitchFamily="18" charset="0"/>
               </a:rPr>
-              <a:t>Докер-композиции и сеть</a:t>
-            </a:r>
+              <a:t>Основы </a:t>
+            </a:r>
+            <a:r>
+              <a:rPr lang="en-US" dirty="0">
+                <a:latin typeface="Times New Roman" pitchFamily="18" charset="0"/>
+                <a:cs typeface="Times New Roman" pitchFamily="18" charset="0"/>
+              </a:rPr>
+              <a:t>Kubernetes</a:t>
+            </a:r>
+            <a:endParaRPr lang="ru-RU" dirty="0">
+              <a:latin typeface="Times New Roman" pitchFamily="18" charset="0"/>
+              <a:cs typeface="Times New Roman" pitchFamily="18" charset="0"/>
+            </a:endParaRPr>
+          </a:p>
+        </p:txBody>
+      </p:sp>
+      <p:sp>
+        <p:nvSpPr>
+          <p:cNvPr id="15" name="Текст 14">
+            <a:extLst>
+              <a:ext uri="{FF2B5EF4-FFF2-40B4-BE49-F238E27FC236}">
+                <a16:creationId xmlns:a16="http://schemas.microsoft.com/office/drawing/2014/main" id="{D41A0F8D-9767-4A5D-947A-34B08831DECE}"/>
+              </a:ext>
+            </a:extLst>
+          </p:cNvPr>
+          <p:cNvSpPr>
+            <a:spLocks noGrp="1"/>
+          </p:cNvSpPr>
+          <p:nvPr>
+            <p:ph type="body" sz="quarter" idx="15"/>
+          </p:nvPr>
+        </p:nvSpPr>
+        <p:spPr/>
+        <p:txBody>
+          <a:bodyPr/>
+          <a:lstStyle/>
+          <a:p>
+            <a:r>
+              <a:rPr lang="ru-RU" sz="1000" dirty="0"/>
+              <a:t>Домашнее задание</a:t>
+            </a:r>
+            <a:endParaRPr lang="ru-RU" dirty="0"/>
+          </a:p>
+        </p:txBody>
+      </p:sp>
+      <p:sp>
+        <p:nvSpPr>
+          <p:cNvPr id="20" name="Заголовок 2">
+            <a:extLst>
+              <a:ext uri="{FF2B5EF4-FFF2-40B4-BE49-F238E27FC236}">
+                <a16:creationId xmlns:a16="http://schemas.microsoft.com/office/drawing/2014/main" id="{EB3254AC-E053-4C4B-B7AA-603BB6FF23A1}"/>
+              </a:ext>
+            </a:extLst>
+          </p:cNvPr>
+          <p:cNvSpPr>
+            <a:spLocks noGrp="1"/>
+          </p:cNvSpPr>
+          <p:nvPr>
+            <p:ph type="title"/>
+          </p:nvPr>
+        </p:nvSpPr>
+        <p:spPr>
+          <a:xfrm>
+            <a:off x="567022" y="1375851"/>
+            <a:ext cx="11057955" cy="644244"/>
+          </a:xfrm>
+        </p:spPr>
+        <p:txBody>
+          <a:bodyPr>
+            <a:normAutofit/>
+          </a:bodyPr>
+          <a:lstStyle/>
+          <a:p>
+            <a:r>
+              <a:rPr lang="ru-RU" sz="2200" dirty="0"/>
+              <a:t>Домашнее задание</a:t>
+            </a:r>
+          </a:p>
+        </p:txBody>
+      </p:sp>
+      <p:sp>
+        <p:nvSpPr>
+          <p:cNvPr id="16" name="Текст 3">
+            <a:extLst>
+              <a:ext uri="{FF2B5EF4-FFF2-40B4-BE49-F238E27FC236}">
+                <a16:creationId xmlns:a16="http://schemas.microsoft.com/office/drawing/2014/main" id="{75C7C0A3-D77C-4037-BAC4-0E0BBF13BF6D}"/>
+              </a:ext>
+            </a:extLst>
+          </p:cNvPr>
+          <p:cNvSpPr>
+            <a:spLocks noGrp="1"/>
+          </p:cNvSpPr>
+          <p:nvPr>
+            <p:ph type="body" sz="quarter" idx="12"/>
+          </p:nvPr>
+        </p:nvSpPr>
+        <p:spPr>
+          <a:xfrm>
+            <a:off x="567022" y="2035705"/>
+            <a:ext cx="10936386" cy="3756210"/>
+          </a:xfrm>
+        </p:spPr>
+        <p:txBody>
+          <a:bodyPr numCol="1"/>
+          <a:lstStyle/>
+          <a:p>
+            <a:pPr marL="285750" indent="-285750">
+              <a:spcBef>
+                <a:spcPts val="600"/>
+              </a:spcBef>
+              <a:spcAft>
+                <a:spcPts val="600"/>
+              </a:spcAft>
+              <a:buFont typeface="Arial" panose="020B0604020202020204" pitchFamily="34" charset="0"/>
+              <a:buChar char="•"/>
+            </a:pPr>
+            <a:r>
+              <a:rPr lang="ru-RU" sz="1800" dirty="0">
+                <a:latin typeface="Times New Roman" pitchFamily="18" charset="0"/>
+                <a:cs typeface="Times New Roman" pitchFamily="18" charset="0"/>
+              </a:rPr>
+              <a:t>Собираем и загружаем свой образ с приложением в </a:t>
+            </a:r>
+            <a:r>
+              <a:rPr lang="en-US" sz="1800" dirty="0">
+                <a:latin typeface="Times New Roman" pitchFamily="18" charset="0"/>
+                <a:cs typeface="Times New Roman" pitchFamily="18" charset="0"/>
+              </a:rPr>
+              <a:t>kind</a:t>
+            </a:r>
+          </a:p>
+          <a:p>
+            <a:pPr>
+              <a:spcBef>
+                <a:spcPts val="600"/>
+              </a:spcBef>
+              <a:spcAft>
+                <a:spcPts val="600"/>
+              </a:spcAft>
+            </a:pPr>
+            <a:r>
+              <a:rPr lang="en-US" sz="1800" dirty="0">
+                <a:solidFill>
+                  <a:schemeClr val="bg1"/>
+                </a:solidFill>
+                <a:highlight>
+                  <a:srgbClr val="000000"/>
+                </a:highlight>
+                <a:latin typeface="Times New Roman" pitchFamily="18" charset="0"/>
+                <a:cs typeface="Times New Roman" pitchFamily="18" charset="0"/>
+              </a:rPr>
+              <a:t>kind load docker-image </a:t>
+            </a:r>
+            <a:r>
+              <a:rPr lang="en-US" sz="1800" dirty="0" err="1">
+                <a:solidFill>
+                  <a:schemeClr val="bg1"/>
+                </a:solidFill>
+                <a:highlight>
+                  <a:srgbClr val="000000"/>
+                </a:highlight>
+                <a:latin typeface="Times New Roman" pitchFamily="18" charset="0"/>
+                <a:cs typeface="Times New Roman" pitchFamily="18" charset="0"/>
+              </a:rPr>
+              <a:t>my-app:v1</a:t>
+            </a:r>
+            <a:r>
+              <a:rPr lang="en-US" sz="1800" dirty="0">
+                <a:solidFill>
+                  <a:schemeClr val="bg1"/>
+                </a:solidFill>
+                <a:highlight>
+                  <a:srgbClr val="000000"/>
+                </a:highlight>
+                <a:latin typeface="Times New Roman" pitchFamily="18" charset="0"/>
+                <a:cs typeface="Times New Roman" pitchFamily="18" charset="0"/>
+              </a:rPr>
+              <a:t> --name </a:t>
+            </a:r>
+            <a:r>
+              <a:rPr lang="en-US" sz="1800" dirty="0" err="1">
+                <a:solidFill>
+                  <a:schemeClr val="bg1"/>
+                </a:solidFill>
+                <a:highlight>
+                  <a:srgbClr val="000000"/>
+                </a:highlight>
+                <a:latin typeface="Times New Roman" pitchFamily="18" charset="0"/>
+                <a:cs typeface="Times New Roman" pitchFamily="18" charset="0"/>
+              </a:rPr>
+              <a:t>k8s</a:t>
+            </a:r>
+            <a:r>
+              <a:rPr lang="en-US" sz="1800" dirty="0">
+                <a:solidFill>
+                  <a:schemeClr val="bg1"/>
+                </a:solidFill>
+                <a:highlight>
+                  <a:srgbClr val="000000"/>
+                </a:highlight>
+                <a:latin typeface="Times New Roman" pitchFamily="18" charset="0"/>
+                <a:cs typeface="Times New Roman" pitchFamily="18" charset="0"/>
+              </a:rPr>
+              <a:t>-lab</a:t>
+            </a:r>
+            <a:endParaRPr lang="ru-RU" sz="1800" dirty="0">
+              <a:solidFill>
+                <a:schemeClr val="bg1"/>
+              </a:solidFill>
+              <a:highlight>
+                <a:srgbClr val="000000"/>
+              </a:highlight>
+              <a:latin typeface="Times New Roman" pitchFamily="18" charset="0"/>
+              <a:cs typeface="Times New Roman" pitchFamily="18" charset="0"/>
+            </a:endParaRPr>
+          </a:p>
+          <a:p>
+            <a:pPr>
+              <a:spcBef>
+                <a:spcPts val="600"/>
+              </a:spcBef>
+              <a:spcAft>
+                <a:spcPts val="600"/>
+              </a:spcAft>
+            </a:pPr>
+            <a:r>
+              <a:rPr lang="ru-RU" sz="1800" dirty="0">
+                <a:latin typeface="Times New Roman" pitchFamily="18" charset="0"/>
+                <a:cs typeface="Times New Roman" pitchFamily="18" charset="0"/>
+              </a:rPr>
+              <a:t>На 6</a:t>
+            </a:r>
+          </a:p>
+          <a:p>
+            <a:pPr marL="285750" indent="-285750">
+              <a:spcBef>
+                <a:spcPts val="600"/>
+              </a:spcBef>
+              <a:spcAft>
+                <a:spcPts val="600"/>
+              </a:spcAft>
+              <a:buFont typeface="Arial" panose="020B0604020202020204" pitchFamily="34" charset="0"/>
+              <a:buChar char="•"/>
+            </a:pPr>
+            <a:r>
+              <a:rPr lang="ru-RU" sz="1800" dirty="0">
+                <a:latin typeface="Times New Roman" pitchFamily="18" charset="0"/>
+                <a:cs typeface="Times New Roman" pitchFamily="18" charset="0"/>
+              </a:rPr>
+              <a:t>Образ,</a:t>
+            </a:r>
+            <a:r>
+              <a:rPr lang="en-US" sz="1800" dirty="0">
+                <a:latin typeface="Times New Roman" pitchFamily="18" charset="0"/>
+                <a:cs typeface="Times New Roman" pitchFamily="18" charset="0"/>
+              </a:rPr>
+              <a:t> namespace, </a:t>
+            </a:r>
+            <a:r>
+              <a:rPr lang="ru-RU" sz="1800" dirty="0">
+                <a:latin typeface="Times New Roman" pitchFamily="18" charset="0"/>
+                <a:cs typeface="Times New Roman" pitchFamily="18" charset="0"/>
+              </a:rPr>
+              <a:t>3 реплики</a:t>
+            </a:r>
+            <a:r>
+              <a:rPr lang="en-US" sz="1800" dirty="0">
+                <a:latin typeface="Times New Roman" pitchFamily="18" charset="0"/>
+                <a:cs typeface="Times New Roman" pitchFamily="18" charset="0"/>
+              </a:rPr>
+              <a:t>, service</a:t>
+            </a:r>
+            <a:endParaRPr lang="ru-RU" sz="1800" dirty="0">
+              <a:latin typeface="Times New Roman" pitchFamily="18" charset="0"/>
+              <a:cs typeface="Times New Roman" pitchFamily="18" charset="0"/>
+            </a:endParaRPr>
+          </a:p>
+          <a:p>
+            <a:pPr>
+              <a:spcBef>
+                <a:spcPts val="600"/>
+              </a:spcBef>
+              <a:spcAft>
+                <a:spcPts val="600"/>
+              </a:spcAft>
+            </a:pPr>
+            <a:r>
+              <a:rPr lang="ru-RU" sz="1800" dirty="0">
+                <a:latin typeface="Times New Roman" pitchFamily="18" charset="0"/>
+                <a:cs typeface="Times New Roman" pitchFamily="18" charset="0"/>
+              </a:rPr>
+              <a:t>На 8</a:t>
+            </a:r>
+          </a:p>
+          <a:p>
+            <a:pPr marL="285750" indent="-285750">
+              <a:spcBef>
+                <a:spcPts val="600"/>
+              </a:spcBef>
+              <a:spcAft>
+                <a:spcPts val="600"/>
+              </a:spcAft>
+              <a:buFont typeface="Arial" panose="020B0604020202020204" pitchFamily="34" charset="0"/>
+              <a:buChar char="•"/>
+            </a:pPr>
+            <a:r>
+              <a:rPr lang="ru-RU" sz="1800" dirty="0">
+                <a:latin typeface="Times New Roman" pitchFamily="18" charset="0"/>
+                <a:cs typeface="Times New Roman" pitchFamily="18" charset="0"/>
+              </a:rPr>
+              <a:t>Все, что на 6, но с </a:t>
+            </a:r>
+            <a:r>
+              <a:rPr lang="en-US" sz="1800" dirty="0" err="1">
+                <a:latin typeface="Times New Roman" pitchFamily="18" charset="0"/>
+                <a:cs typeface="Times New Roman" pitchFamily="18" charset="0"/>
+              </a:rPr>
+              <a:t>ConfigMap</a:t>
+            </a:r>
+            <a:r>
+              <a:rPr lang="en-US" sz="1800" dirty="0">
+                <a:latin typeface="Times New Roman" pitchFamily="18" charset="0"/>
+                <a:cs typeface="Times New Roman" pitchFamily="18" charset="0"/>
+              </a:rPr>
+              <a:t>, Secret, probes. requests, limits</a:t>
+            </a:r>
+            <a:endParaRPr lang="ru-RU" sz="1800" dirty="0">
+              <a:latin typeface="Times New Roman" pitchFamily="18" charset="0"/>
+              <a:cs typeface="Times New Roman" pitchFamily="18" charset="0"/>
+            </a:endParaRPr>
+          </a:p>
+          <a:p>
+            <a:pPr>
+              <a:spcBef>
+                <a:spcPts val="600"/>
+              </a:spcBef>
+              <a:spcAft>
+                <a:spcPts val="600"/>
+              </a:spcAft>
+            </a:pPr>
+            <a:r>
+              <a:rPr lang="ru-RU" sz="1800" dirty="0">
+                <a:latin typeface="Times New Roman" pitchFamily="18" charset="0"/>
+                <a:cs typeface="Times New Roman" pitchFamily="18" charset="0"/>
+              </a:rPr>
+              <a:t>На 10</a:t>
+            </a:r>
+          </a:p>
+          <a:p>
+            <a:pPr marL="285750" indent="-285750">
+              <a:spcBef>
+                <a:spcPts val="600"/>
+              </a:spcBef>
+              <a:spcAft>
+                <a:spcPts val="600"/>
+              </a:spcAft>
+              <a:buFont typeface="Arial" panose="020B0604020202020204" pitchFamily="34" charset="0"/>
+              <a:buChar char="•"/>
+            </a:pPr>
+            <a:r>
+              <a:rPr lang="ru-RU" sz="1800" dirty="0">
+                <a:latin typeface="Times New Roman" pitchFamily="18" charset="0"/>
+                <a:cs typeface="Times New Roman" pitchFamily="18" charset="0"/>
+              </a:rPr>
+              <a:t>Попытка </a:t>
+            </a:r>
+            <a:r>
+              <a:rPr lang="en-US" sz="1800" dirty="0">
+                <a:latin typeface="Times New Roman" pitchFamily="18" charset="0"/>
+                <a:cs typeface="Times New Roman" pitchFamily="18" charset="0"/>
+              </a:rPr>
+              <a:t>rollout </a:t>
+            </a:r>
+            <a:r>
+              <a:rPr lang="ru-RU" sz="1800" dirty="0">
+                <a:latin typeface="Times New Roman" pitchFamily="18" charset="0"/>
+                <a:cs typeface="Times New Roman" pitchFamily="18" charset="0"/>
+              </a:rPr>
+              <a:t>с неверным тегом, откат</a:t>
+            </a:r>
+            <a:endParaRPr lang="en-US" sz="1800" dirty="0">
+              <a:latin typeface="Times New Roman" pitchFamily="18" charset="0"/>
+              <a:cs typeface="Times New Roman" pitchFamily="18" charset="0"/>
+            </a:endParaRPr>
+          </a:p>
+          <a:p>
+            <a:pPr marL="285750" indent="-285750">
+              <a:spcBef>
+                <a:spcPts val="600"/>
+              </a:spcBef>
+              <a:spcAft>
+                <a:spcPts val="600"/>
+              </a:spcAft>
+              <a:buFont typeface="Arial" panose="020B0604020202020204" pitchFamily="34" charset="0"/>
+              <a:buChar char="•"/>
+            </a:pPr>
+            <a:endParaRPr lang="ru-RU" sz="1800" dirty="0">
+              <a:latin typeface="Times New Roman" pitchFamily="18" charset="0"/>
+              <a:cs typeface="Times New Roman" pitchFamily="18" charset="0"/>
+            </a:endParaRPr>
+          </a:p>
+          <a:p>
+            <a:pPr>
+              <a:spcBef>
+                <a:spcPts val="600"/>
+              </a:spcBef>
+              <a:spcAft>
+                <a:spcPts val="600"/>
+              </a:spcAft>
+            </a:pPr>
+            <a:r>
+              <a:rPr lang="ru-RU" sz="1800" b="1" dirty="0">
+                <a:latin typeface="Times New Roman" pitchFamily="18" charset="0"/>
+                <a:cs typeface="Times New Roman" pitchFamily="18" charset="0"/>
+              </a:rPr>
+              <a:t>Формат</a:t>
+            </a:r>
+            <a:r>
+              <a:rPr lang="en-US" sz="1800" b="1" dirty="0">
+                <a:latin typeface="Times New Roman" pitchFamily="18" charset="0"/>
+                <a:cs typeface="Times New Roman" pitchFamily="18" charset="0"/>
+              </a:rPr>
+              <a:t>: </a:t>
+            </a:r>
+            <a:r>
+              <a:rPr lang="ru-RU" sz="1800" b="1" dirty="0">
+                <a:latin typeface="Times New Roman" pitchFamily="18" charset="0"/>
+                <a:cs typeface="Times New Roman" pitchFamily="18" charset="0"/>
+              </a:rPr>
+              <a:t>архив с </a:t>
+            </a:r>
+            <a:r>
+              <a:rPr lang="en-US" sz="1800" b="1" dirty="0" err="1">
+                <a:latin typeface="Times New Roman" pitchFamily="18" charset="0"/>
+                <a:cs typeface="Times New Roman" pitchFamily="18" charset="0"/>
+              </a:rPr>
+              <a:t>yaml</a:t>
+            </a:r>
+            <a:r>
+              <a:rPr lang="ru-RU" sz="1800" b="1" dirty="0">
+                <a:latin typeface="Times New Roman" pitchFamily="18" charset="0"/>
+                <a:cs typeface="Times New Roman" pitchFamily="18" charset="0"/>
+              </a:rPr>
+              <a:t> конфигурациями + фотоотчет</a:t>
+            </a:r>
+            <a:r>
+              <a:rPr lang="en-US" sz="1800" b="1" dirty="0">
+                <a:latin typeface="Times New Roman" pitchFamily="18" charset="0"/>
+                <a:cs typeface="Times New Roman" pitchFamily="18" charset="0"/>
+              </a:rPr>
+              <a:t> </a:t>
+            </a:r>
+            <a:r>
+              <a:rPr lang="ru-RU" sz="1800" b="1" dirty="0">
+                <a:latin typeface="Times New Roman" pitchFamily="18" charset="0"/>
+                <a:cs typeface="Times New Roman" pitchFamily="18" charset="0"/>
+              </a:rPr>
+              <a:t>со скринами из консоли в формате </a:t>
+            </a:r>
+            <a:r>
+              <a:rPr lang="en-US" sz="1800" b="1" dirty="0">
+                <a:latin typeface="Times New Roman" pitchFamily="18" charset="0"/>
+                <a:cs typeface="Times New Roman" pitchFamily="18" charset="0"/>
+              </a:rPr>
+              <a:t>.pdf</a:t>
+            </a:r>
+          </a:p>
+          <a:p>
+            <a:pPr>
+              <a:spcBef>
+                <a:spcPts val="600"/>
+              </a:spcBef>
+              <a:spcAft>
+                <a:spcPts val="600"/>
+              </a:spcAft>
+            </a:pPr>
+            <a:r>
+              <a:rPr lang="en-US" sz="1400" b="1" dirty="0">
+                <a:latin typeface="Times New Roman" pitchFamily="18" charset="0"/>
+                <a:cs typeface="Times New Roman" pitchFamily="18" charset="0"/>
+              </a:rPr>
+              <a:t>p.s. </a:t>
+            </a:r>
+            <a:r>
+              <a:rPr lang="ru-RU" sz="1400" b="1" dirty="0">
+                <a:latin typeface="Times New Roman" pitchFamily="18" charset="0"/>
+                <a:cs typeface="Times New Roman" pitchFamily="18" charset="0"/>
+              </a:rPr>
+              <a:t>приложение –  веб-сервис на любом языке, использующий конфиги и секреты, имеющий способ проверки жизни</a:t>
+            </a:r>
+            <a:r>
+              <a:rPr lang="en-US" sz="1400" b="1" dirty="0">
+                <a:latin typeface="Times New Roman" pitchFamily="18" charset="0"/>
+                <a:cs typeface="Times New Roman" pitchFamily="18" charset="0"/>
+              </a:rPr>
+              <a:t> (</a:t>
+            </a:r>
+            <a:r>
+              <a:rPr lang="ru-RU" sz="1400" b="1" dirty="0">
+                <a:latin typeface="Times New Roman" pitchFamily="18" charset="0"/>
+                <a:cs typeface="Times New Roman" pitchFamily="18" charset="0"/>
+              </a:rPr>
+              <a:t>если на 8+</a:t>
+            </a:r>
+            <a:r>
+              <a:rPr lang="en-US" sz="1400" b="1" dirty="0">
+                <a:latin typeface="Times New Roman" pitchFamily="18" charset="0"/>
+                <a:cs typeface="Times New Roman" pitchFamily="18" charset="0"/>
+              </a:rPr>
+              <a:t>)</a:t>
+            </a:r>
+            <a:endParaRPr lang="ru-RU" sz="1400" b="1" dirty="0">
+              <a:latin typeface="Times New Roman" pitchFamily="18" charset="0"/>
+              <a:cs typeface="Times New Roman" pitchFamily="18" charset="0"/>
+            </a:endParaRPr>
+          </a:p>
+        </p:txBody>
+      </p:sp>
+      <p:pic>
+        <p:nvPicPr>
+          <p:cNvPr id="8" name="Picture 2" descr="Picture background">
+            <a:extLst>
+              <a:ext uri="{FF2B5EF4-FFF2-40B4-BE49-F238E27FC236}">
+                <a16:creationId xmlns:a16="http://schemas.microsoft.com/office/drawing/2014/main" id="{00E30114-0D7C-40C1-A26A-5810A7C9727A}"/>
+              </a:ext>
+            </a:extLst>
+          </p:cNvPr>
+          <p:cNvPicPr>
+            <a:picLocks noChangeAspect="1" noChangeArrowheads="1"/>
+          </p:cNvPicPr>
+          <p:nvPr/>
+        </p:nvPicPr>
+        <p:blipFill>
+          <a:blip r:embed="rId2">
+            <a:extLst>
+              <a:ext uri="{28A0092B-C50C-407E-A947-70E740481C1C}">
+                <a14:useLocalDpi xmlns:a14="http://schemas.microsoft.com/office/drawing/2010/main" val="0"/>
+              </a:ext>
+            </a:extLst>
+          </a:blip>
+          <a:srcRect/>
+          <a:stretch>
+            <a:fillRect/>
+          </a:stretch>
+        </p:blipFill>
+        <p:spPr bwMode="auto">
+          <a:xfrm>
+            <a:off x="6955683" y="2126319"/>
+            <a:ext cx="4460950" cy="3345713"/>
+          </a:xfrm>
+          <a:prstGeom prst="rect">
+            <a:avLst/>
+          </a:prstGeom>
+          <a:noFill/>
+          <a:extLst>
+            <a:ext uri="{909E8E84-426E-40DD-AFC4-6F175D3DCCD1}">
+              <a14:hiddenFill xmlns:a14="http://schemas.microsoft.com/office/drawing/2010/main">
+                <a:solidFill>
+                  <a:srgbClr val="FFFFFF"/>
+                </a:solidFill>
+              </a14:hiddenFill>
+            </a:ext>
+          </a:extLst>
+        </p:spPr>
+      </p:pic>
+    </p:spTree>
+    <p:extLst>
+      <p:ext uri="{BB962C8B-B14F-4D97-AF65-F5344CB8AC3E}">
+        <p14:creationId xmlns:p14="http://schemas.microsoft.com/office/powerpoint/2010/main" val="796970741"/>
+      </p:ext>
+    </p:extLst>
+  </p:cSld>
+  <p:clrMapOvr>
+    <a:masterClrMapping/>
+  </p:clrMapOvr>
+</p:sld>
+</file>
+
+<file path=ppt/slides/slide18.xml><?xml version="1.0" encoding="utf-8"?>
+<p:sld xmlns:a="http://schemas.openxmlformats.org/drawingml/2006/main" xmlns:r="http://schemas.openxmlformats.org/officeDocument/2006/relationships" xmlns:p="http://schemas.openxmlformats.org/presentationml/2006/main">
+  <p:cSld>
+    <p:spTree>
+      <p:nvGrpSpPr>
+        <p:cNvPr id="1" name=""/>
+        <p:cNvGrpSpPr/>
+        <p:nvPr/>
+      </p:nvGrpSpPr>
+      <p:grpSpPr>
+        <a:xfrm>
+          <a:off x="0" y="0"/>
+          <a:ext cx="0" cy="0"/>
+          <a:chOff x="0" y="0"/>
+          <a:chExt cx="0" cy="0"/>
+        </a:xfrm>
+      </p:grpSpPr>
+      <p:sp>
+        <p:nvSpPr>
+          <p:cNvPr id="5" name="Текст 4">
+            <a:extLst>
+              <a:ext uri="{FF2B5EF4-FFF2-40B4-BE49-F238E27FC236}">
+                <a16:creationId xmlns:a16="http://schemas.microsoft.com/office/drawing/2014/main" id="{3EB29DC1-D5D4-FB41-9E2D-AA4750D0CC8B}"/>
+              </a:ext>
+            </a:extLst>
+          </p:cNvPr>
+          <p:cNvSpPr>
+            <a:spLocks noGrp="1"/>
+          </p:cNvSpPr>
+          <p:nvPr>
+            <p:ph type="body" sz="quarter" idx="13"/>
+          </p:nvPr>
+        </p:nvSpPr>
+        <p:spPr/>
+        <p:txBody>
+          <a:bodyPr/>
+          <a:lstStyle/>
+          <a:p>
+            <a:r>
+              <a:rPr lang="ru-RU" dirty="0"/>
+              <a:t>Научно-учебная лаборатория облачных и мобильных технологий</a:t>
+            </a:r>
+          </a:p>
+          <a:p>
+            <a:endParaRPr lang="ru-RU" dirty="0"/>
+          </a:p>
+        </p:txBody>
+      </p:sp>
+      <p:sp>
+        <p:nvSpPr>
+          <p:cNvPr id="6" name="Текст 5">
+            <a:extLst>
+              <a:ext uri="{FF2B5EF4-FFF2-40B4-BE49-F238E27FC236}">
+                <a16:creationId xmlns:a16="http://schemas.microsoft.com/office/drawing/2014/main" id="{B5B6DD1A-BEFA-D842-9B7A-78D7BD1A5259}"/>
+              </a:ext>
+            </a:extLst>
+          </p:cNvPr>
+          <p:cNvSpPr>
+            <a:spLocks noGrp="1"/>
+          </p:cNvSpPr>
+          <p:nvPr>
+            <p:ph type="body" sz="quarter" idx="14"/>
+          </p:nvPr>
+        </p:nvSpPr>
+        <p:spPr>
+          <a:xfrm>
+            <a:off x="3459162" y="548720"/>
+            <a:ext cx="2456115" cy="641451"/>
+          </a:xfrm>
+        </p:spPr>
+        <p:txBody>
+          <a:bodyPr/>
+          <a:lstStyle/>
+          <a:p>
+            <a:r>
+              <a:rPr lang="ru-RU" dirty="0">
+                <a:latin typeface="Times New Roman" pitchFamily="18" charset="0"/>
+                <a:cs typeface="Times New Roman" pitchFamily="18" charset="0"/>
+              </a:rPr>
+              <a:t>Основы </a:t>
+            </a:r>
+            <a:r>
+              <a:rPr lang="en-US" dirty="0">
+                <a:latin typeface="Times New Roman" pitchFamily="18" charset="0"/>
+                <a:cs typeface="Times New Roman" pitchFamily="18" charset="0"/>
+              </a:rPr>
+              <a:t>Kubernetes</a:t>
+            </a:r>
+            <a:endParaRPr lang="ru-RU" dirty="0">
+              <a:latin typeface="Times New Roman" pitchFamily="18" charset="0"/>
+              <a:cs typeface="Times New Roman" pitchFamily="18" charset="0"/>
+            </a:endParaRPr>
           </a:p>
         </p:txBody>
       </p:sp>
@@ -18832,7 +19606,7 @@
 </p:sld>
 </file>
 
-<file path=ppt/slides/slide18.xml><?xml version="1.0" encoding="utf-8"?>
+<file path=ppt/slides/slide19.xml><?xml version="1.0" encoding="utf-8"?>
 <p:sld xmlns:a="http://schemas.openxmlformats.org/drawingml/2006/main" xmlns:r="http://schemas.openxmlformats.org/officeDocument/2006/relationships" xmlns:p="http://schemas.openxmlformats.org/presentationml/2006/main">
   <p:cSld>
     <p:spTree>
@@ -19372,8 +20146,19 @@
                 <a:latin typeface="Times New Roman" pitchFamily="18" charset="0"/>
                 <a:cs typeface="Times New Roman" pitchFamily="18" charset="0"/>
               </a:rPr>
-              <a:t>Докер-композиции и сеть</a:t>
-            </a:r>
+              <a:t>Основы </a:t>
+            </a:r>
+            <a:r>
+              <a:rPr lang="en-US" dirty="0">
+                <a:latin typeface="Times New Roman" pitchFamily="18" charset="0"/>
+                <a:cs typeface="Times New Roman" pitchFamily="18" charset="0"/>
+              </a:rPr>
+              <a:t>Kubernetes</a:t>
+            </a:r>
+            <a:endParaRPr lang="ru-RU" dirty="0">
+              <a:latin typeface="Times New Roman" pitchFamily="18" charset="0"/>
+              <a:cs typeface="Times New Roman" pitchFamily="18" charset="0"/>
+            </a:endParaRPr>
           </a:p>
         </p:txBody>
       </p:sp>
@@ -19400,11 +20185,11 @@
           <a:p>
             <a:r>
               <a:rPr lang="ru-RU" sz="1000" dirty="0"/>
-              <a:t>Предпосылки появления</a:t>
+              <a:t>Для чего нам </a:t>
             </a:r>
             <a:r>
               <a:rPr lang="en-US" sz="1000" dirty="0"/>
-              <a:t> docker-compose</a:t>
+              <a:t>Kubernetes</a:t>
             </a:r>
             <a:endParaRPr lang="ru-RU" dirty="0"/>
           </a:p>
@@ -19996,6 +20781,25 @@
                 <a:latin typeface="Times New Roman" pitchFamily="18" charset="0"/>
                 <a:cs typeface="Times New Roman" pitchFamily="18" charset="0"/>
               </a:rPr>
+              <a:t>  Сложность управления</a:t>
+            </a:r>
+          </a:p>
+          <a:p>
+            <a:pPr>
+              <a:spcBef>
+                <a:spcPts val="600"/>
+              </a:spcBef>
+              <a:spcAft>
+                <a:spcPts val="600"/>
+              </a:spcAft>
+              <a:buFont typeface="Arial" pitchFamily="34" charset="0"/>
+              <a:buChar char="•"/>
+            </a:pPr>
+            <a:r>
+              <a:rPr lang="ru-RU" sz="1800" dirty="0">
+                <a:latin typeface="Times New Roman" pitchFamily="18" charset="0"/>
+                <a:cs typeface="Times New Roman" pitchFamily="18" charset="0"/>
+              </a:rPr>
               <a:t>  </a:t>
             </a:r>
             <a:r>
@@ -20019,6 +20823,24 @@
               </a:rPr>
               <a:t>Google</a:t>
             </a:r>
+            <a:r>
+              <a:rPr lang="ru-RU" sz="1800" dirty="0">
+                <a:latin typeface="Times New Roman" pitchFamily="18" charset="0"/>
+                <a:cs typeface="Times New Roman" pitchFamily="18" charset="0"/>
+              </a:rPr>
+              <a:t> – </a:t>
+            </a:r>
+            <a:r>
+              <a:rPr lang="ru-RU" sz="1800" b="1" dirty="0">
+                <a:latin typeface="Times New Roman" pitchFamily="18" charset="0"/>
+                <a:cs typeface="Times New Roman" pitchFamily="18" charset="0"/>
+              </a:rPr>
+              <a:t>декларативный подход</a:t>
+            </a:r>
+            <a:endParaRPr lang="en-US" sz="1800" b="1" dirty="0">
+              <a:latin typeface="Times New Roman" pitchFamily="18" charset="0"/>
+              <a:cs typeface="Times New Roman" pitchFamily="18" charset="0"/>
+            </a:endParaRPr>
           </a:p>
           <a:p>
             <a:pPr>
@@ -20198,8 +21020,19 @@
                 <a:latin typeface="Times New Roman" pitchFamily="18" charset="0"/>
                 <a:cs typeface="Times New Roman" pitchFamily="18" charset="0"/>
               </a:rPr>
-              <a:t>Докер-композиции и сеть</a:t>
-            </a:r>
+              <a:t>Основы </a:t>
+            </a:r>
+            <a:r>
+              <a:rPr lang="en-US" dirty="0">
+                <a:latin typeface="Times New Roman" pitchFamily="18" charset="0"/>
+                <a:cs typeface="Times New Roman" pitchFamily="18" charset="0"/>
+              </a:rPr>
+              <a:t>Kubernetes</a:t>
+            </a:r>
+            <a:endParaRPr lang="ru-RU" dirty="0">
+              <a:latin typeface="Times New Roman" pitchFamily="18" charset="0"/>
+              <a:cs typeface="Times New Roman" pitchFamily="18" charset="0"/>
+            </a:endParaRPr>
           </a:p>
         </p:txBody>
       </p:sp>
@@ -20226,11 +21059,7 @@
           <a:p>
             <a:r>
               <a:rPr lang="ru-RU" sz="1000" dirty="0"/>
-              <a:t>Предпосылки появления</a:t>
-            </a:r>
-            <a:r>
-              <a:rPr lang="en-US" sz="1000" dirty="0"/>
-              <a:t> docker-compose</a:t>
+              <a:t>Архитектура</a:t>
             </a:r>
             <a:endParaRPr lang="ru-RU" dirty="0"/>
           </a:p>
@@ -20266,64 +21095,17 @@
           <a:p>
             <a:r>
               <a:rPr lang="ru-RU" sz="2200" dirty="0"/>
-              <a:t>Ставим инструмент управления</a:t>
+              <a:t>Архитектура</a:t>
             </a:r>
           </a:p>
         </p:txBody>
       </p:sp>
-      <p:pic>
-        <p:nvPicPr>
-          <p:cNvPr id="2" name="Picture 2" descr="Picture background">
-            <a:extLst>
-              <a:ext uri="{FF2B5EF4-FFF2-40B4-BE49-F238E27FC236}">
-                <a16:creationId xmlns:a16="http://schemas.microsoft.com/office/drawing/2014/main" id="{E95BE722-533B-4C3A-8C5E-631DBCBAA41C}"/>
-              </a:ext>
-            </a:extLst>
-          </p:cNvPr>
-          <p:cNvPicPr>
-            <a:picLocks noChangeAspect="1" noChangeArrowheads="1"/>
-          </p:cNvPicPr>
-          <p:nvPr/>
-        </p:nvPicPr>
-        <p:blipFill>
-          <a:blip r:embed="rId2">
-            <a:extLst>
-              <a:ext uri="{28A0092B-C50C-407E-A947-70E740481C1C}">
-                <a14:useLocalDpi xmlns:a14="http://schemas.microsoft.com/office/drawing/2010/main" val="0"/>
-              </a:ext>
-            </a:extLst>
-          </a:blip>
-          <a:srcRect/>
-          <a:stretch>
-            <a:fillRect/>
-          </a:stretch>
-        </p:blipFill>
-        <p:spPr bwMode="auto">
-          <a:xfrm>
-            <a:off x="7037767" y="2724520"/>
-            <a:ext cx="3613150" cy="2020165"/>
-          </a:xfrm>
-          <a:prstGeom prst="rect">
-            <a:avLst/>
-          </a:prstGeom>
-          <a:noFill/>
-          <a:extLst>
-            <a:ext uri="{909E8E84-426E-40DD-AFC4-6F175D3DCCD1}">
-              <a14:hiddenFill xmlns:a14="http://schemas.microsoft.com/office/drawing/2010/main">
-                <a:solidFill>
-                  <a:srgbClr val="FFFFFF"/>
-                </a:solidFill>
-              </a14:hiddenFill>
-            </a:ext>
-          </a:extLst>
-        </p:spPr>
-      </p:pic>
       <p:sp>
         <p:nvSpPr>
-          <p:cNvPr id="26" name="Текст 3">
+          <p:cNvPr id="27" name="Текст 3">
             <a:extLst>
               <a:ext uri="{FF2B5EF4-FFF2-40B4-BE49-F238E27FC236}">
-                <a16:creationId xmlns:a16="http://schemas.microsoft.com/office/drawing/2014/main" id="{A660D6C9-AC61-42D4-A1A4-22F08E8A98E0}"/>
+                <a16:creationId xmlns:a16="http://schemas.microsoft.com/office/drawing/2014/main" id="{DADA9EF9-526B-409C-912D-41CAA39E5A67}"/>
               </a:ext>
             </a:extLst>
           </p:cNvPr>
@@ -20334,390 +21116,7 @@
         </p:nvSpPr>
         <p:spPr>
           <a:xfrm>
-            <a:off x="624188" y="2264183"/>
-            <a:ext cx="6455543" cy="3862551"/>
-          </a:xfrm>
-          <a:prstGeom prst="rect">
-            <a:avLst/>
-          </a:prstGeom>
-        </p:spPr>
-        <p:txBody>
-          <a:bodyPr vert="horz" lIns="0" tIns="0" rIns="0" bIns="45720" numCol="1" spcCol="252000" rtlCol="0">
-            <a:noAutofit/>
-          </a:bodyPr>
-          <a:lstStyle>
-            <a:lvl1pPr marL="0" marR="0" indent="0" algn="l" defTabSz="914400" rtl="0" eaLnBrk="1" fontAlgn="auto" latinLnBrk="0" hangingPunct="1">
-              <a:lnSpc>
-                <a:spcPct val="100000"/>
-              </a:lnSpc>
-              <a:spcBef>
-                <a:spcPts val="1200"/>
-              </a:spcBef>
-              <a:spcAft>
-                <a:spcPts val="0"/>
-              </a:spcAft>
-              <a:buClrTx/>
-              <a:buSzTx/>
-              <a:buFont typeface="Arial" panose="020B0604020202020204" pitchFamily="34" charset="0"/>
-              <a:buNone/>
-              <a:tabLst/>
-              <a:defRPr sz="1300" b="0" i="0" kern="1200">
-                <a:solidFill>
-                  <a:srgbClr val="0E2D69"/>
-                </a:solidFill>
-                <a:latin typeface="HSE Sans" panose="02000000000000000000" pitchFamily="2" charset="0"/>
-                <a:ea typeface="+mn-ea"/>
-                <a:cs typeface="+mn-cs"/>
-              </a:defRPr>
-            </a:lvl1pPr>
-            <a:lvl2pPr marL="457200" indent="0" algn="l" defTabSz="914400" rtl="0" eaLnBrk="1" latinLnBrk="0" hangingPunct="1">
-              <a:lnSpc>
-                <a:spcPct val="100000"/>
-              </a:lnSpc>
-              <a:spcBef>
-                <a:spcPts val="1000"/>
-              </a:spcBef>
-              <a:buFont typeface="Arial" panose="020B0604020202020204" pitchFamily="34" charset="0"/>
-              <a:buNone/>
-              <a:defRPr sz="1300" b="0" i="0" kern="1200">
-                <a:solidFill>
-                  <a:srgbClr val="0E2D69"/>
-                </a:solidFill>
-                <a:latin typeface="HSE Sans" panose="02000000000000000000" pitchFamily="2" charset="0"/>
-                <a:ea typeface="+mn-ea"/>
-                <a:cs typeface="+mn-cs"/>
-              </a:defRPr>
-            </a:lvl2pPr>
-            <a:lvl3pPr marL="914400" indent="0" algn="l" defTabSz="914400" rtl="0" eaLnBrk="1" latinLnBrk="0" hangingPunct="1">
-              <a:lnSpc>
-                <a:spcPct val="100000"/>
-              </a:lnSpc>
-              <a:spcBef>
-                <a:spcPts val="1000"/>
-              </a:spcBef>
-              <a:buFont typeface="Arial" panose="020B0604020202020204" pitchFamily="34" charset="0"/>
-              <a:buNone/>
-              <a:defRPr sz="1300" b="0" i="0" kern="1200">
-                <a:solidFill>
-                  <a:srgbClr val="0E2D69"/>
-                </a:solidFill>
-                <a:latin typeface="HSE Sans" panose="02000000000000000000" pitchFamily="2" charset="0"/>
-                <a:ea typeface="+mn-ea"/>
-                <a:cs typeface="+mn-cs"/>
-              </a:defRPr>
-            </a:lvl3pPr>
-            <a:lvl4pPr marL="1371600" indent="0" algn="l" defTabSz="914400" rtl="0" eaLnBrk="1" latinLnBrk="0" hangingPunct="1">
-              <a:lnSpc>
-                <a:spcPct val="100000"/>
-              </a:lnSpc>
-              <a:spcBef>
-                <a:spcPts val="1000"/>
-              </a:spcBef>
-              <a:buFont typeface="Arial" panose="020B0604020202020204" pitchFamily="34" charset="0"/>
-              <a:buNone/>
-              <a:defRPr sz="1300" b="0" i="0" kern="1200">
-                <a:solidFill>
-                  <a:srgbClr val="0E2D69"/>
-                </a:solidFill>
-                <a:latin typeface="HSE Sans" panose="02000000000000000000" pitchFamily="2" charset="0"/>
-                <a:ea typeface="+mn-ea"/>
-                <a:cs typeface="+mn-cs"/>
-              </a:defRPr>
-            </a:lvl4pPr>
-            <a:lvl5pPr marL="1828800" indent="0" algn="l" defTabSz="914400" rtl="0" eaLnBrk="1" latinLnBrk="0" hangingPunct="1">
-              <a:lnSpc>
-                <a:spcPct val="100000"/>
-              </a:lnSpc>
-              <a:spcBef>
-                <a:spcPts val="1000"/>
-              </a:spcBef>
-              <a:buFont typeface="Arial" panose="020B0604020202020204" pitchFamily="34" charset="0"/>
-              <a:buNone/>
-              <a:defRPr sz="1300" b="0" i="0" kern="1200">
-                <a:solidFill>
-                  <a:srgbClr val="0E2D69"/>
-                </a:solidFill>
-                <a:latin typeface="HSE Sans" panose="02000000000000000000" pitchFamily="2" charset="0"/>
-                <a:ea typeface="+mn-ea"/>
-                <a:cs typeface="+mn-cs"/>
-              </a:defRPr>
-            </a:lvl5pPr>
-            <a:lvl6pPr marL="2514600" indent="-228600" algn="l" defTabSz="914400" rtl="0" eaLnBrk="1" latinLnBrk="0" hangingPunct="1">
-              <a:lnSpc>
-                <a:spcPct val="90000"/>
-              </a:lnSpc>
-              <a:spcBef>
-                <a:spcPts val="500"/>
-              </a:spcBef>
-              <a:buFont typeface="Arial" panose="020B0604020202020204" pitchFamily="34" charset="0"/>
-              <a:buChar char="•"/>
-              <a:defRPr sz="1800" kern="1200">
-                <a:solidFill>
-                  <a:schemeClr val="tx1"/>
-                </a:solidFill>
-                <a:latin typeface="+mn-lt"/>
-                <a:ea typeface="+mn-ea"/>
-                <a:cs typeface="+mn-cs"/>
-              </a:defRPr>
-            </a:lvl6pPr>
-            <a:lvl7pPr marL="2971800" indent="-228600" algn="l" defTabSz="914400" rtl="0" eaLnBrk="1" latinLnBrk="0" hangingPunct="1">
-              <a:lnSpc>
-                <a:spcPct val="90000"/>
-              </a:lnSpc>
-              <a:spcBef>
-                <a:spcPts val="500"/>
-              </a:spcBef>
-              <a:buFont typeface="Arial" panose="020B0604020202020204" pitchFamily="34" charset="0"/>
-              <a:buChar char="•"/>
-              <a:defRPr sz="1800" kern="1200">
-                <a:solidFill>
-                  <a:schemeClr val="tx1"/>
-                </a:solidFill>
-                <a:latin typeface="+mn-lt"/>
-                <a:ea typeface="+mn-ea"/>
-                <a:cs typeface="+mn-cs"/>
-              </a:defRPr>
-            </a:lvl7pPr>
-            <a:lvl8pPr marL="3429000" indent="-228600" algn="l" defTabSz="914400" rtl="0" eaLnBrk="1" latinLnBrk="0" hangingPunct="1">
-              <a:lnSpc>
-                <a:spcPct val="90000"/>
-              </a:lnSpc>
-              <a:spcBef>
-                <a:spcPts val="500"/>
-              </a:spcBef>
-              <a:buFont typeface="Arial" panose="020B0604020202020204" pitchFamily="34" charset="0"/>
-              <a:buChar char="•"/>
-              <a:defRPr sz="1800" kern="1200">
-                <a:solidFill>
-                  <a:schemeClr val="tx1"/>
-                </a:solidFill>
-                <a:latin typeface="+mn-lt"/>
-                <a:ea typeface="+mn-ea"/>
-                <a:cs typeface="+mn-cs"/>
-              </a:defRPr>
-            </a:lvl8pPr>
-            <a:lvl9pPr marL="3886200" indent="-228600" algn="l" defTabSz="914400" rtl="0" eaLnBrk="1" latinLnBrk="0" hangingPunct="1">
-              <a:lnSpc>
-                <a:spcPct val="90000"/>
-              </a:lnSpc>
-              <a:spcBef>
-                <a:spcPts val="500"/>
-              </a:spcBef>
-              <a:buFont typeface="Arial" panose="020B0604020202020204" pitchFamily="34" charset="0"/>
-              <a:buChar char="•"/>
-              <a:defRPr sz="1800" kern="1200">
-                <a:solidFill>
-                  <a:schemeClr val="tx1"/>
-                </a:solidFill>
-                <a:latin typeface="+mn-lt"/>
-                <a:ea typeface="+mn-ea"/>
-                <a:cs typeface="+mn-cs"/>
-              </a:defRPr>
-            </a:lvl9pPr>
-          </a:lstStyle>
-          <a:p>
-            <a:pPr>
-              <a:spcBef>
-                <a:spcPts val="600"/>
-              </a:spcBef>
-              <a:spcAft>
-                <a:spcPts val="600"/>
-              </a:spcAft>
-            </a:pPr>
-            <a:r>
-              <a:rPr lang="en-US" sz="1800" dirty="0">
-                <a:latin typeface="Times New Roman" pitchFamily="18" charset="0"/>
-                <a:cs typeface="Times New Roman" pitchFamily="18" charset="0"/>
-              </a:rPr>
-              <a:t>MacOS:</a:t>
-            </a:r>
-          </a:p>
-          <a:p>
-            <a:pPr>
-              <a:spcBef>
-                <a:spcPts val="600"/>
-              </a:spcBef>
-              <a:spcAft>
-                <a:spcPts val="600"/>
-              </a:spcAft>
-            </a:pPr>
-            <a:r>
-              <a:rPr lang="en-US" sz="1800" dirty="0">
-                <a:solidFill>
-                  <a:schemeClr val="bg1"/>
-                </a:solidFill>
-                <a:highlight>
-                  <a:srgbClr val="000000"/>
-                </a:highlight>
-                <a:latin typeface="Times New Roman" pitchFamily="18" charset="0"/>
-                <a:cs typeface="Times New Roman" pitchFamily="18" charset="0"/>
-              </a:rPr>
-              <a:t>brew install kubectl</a:t>
-            </a:r>
-            <a:endParaRPr lang="ru-RU" sz="1800" dirty="0">
-              <a:solidFill>
-                <a:schemeClr val="bg1"/>
-              </a:solidFill>
-              <a:highlight>
-                <a:srgbClr val="000000"/>
-              </a:highlight>
-              <a:latin typeface="Times New Roman" pitchFamily="18" charset="0"/>
-              <a:cs typeface="Times New Roman" pitchFamily="18" charset="0"/>
-            </a:endParaRPr>
-          </a:p>
-          <a:p>
-            <a:pPr>
-              <a:spcBef>
-                <a:spcPts val="600"/>
-              </a:spcBef>
-              <a:spcAft>
-                <a:spcPts val="600"/>
-              </a:spcAft>
-            </a:pPr>
-            <a:r>
-              <a:rPr lang="en-US" sz="1800" dirty="0">
-                <a:latin typeface="Times New Roman" pitchFamily="18" charset="0"/>
-                <a:cs typeface="Times New Roman" pitchFamily="18" charset="0"/>
-              </a:rPr>
-              <a:t>Windows</a:t>
-            </a:r>
-          </a:p>
-          <a:p>
-            <a:pPr>
-              <a:spcBef>
-                <a:spcPts val="600"/>
-              </a:spcBef>
-              <a:spcAft>
-                <a:spcPts val="600"/>
-              </a:spcAft>
-            </a:pPr>
-            <a:r>
-              <a:rPr lang="en-US" sz="1800" dirty="0" err="1">
-                <a:solidFill>
-                  <a:schemeClr val="bg1"/>
-                </a:solidFill>
-                <a:highlight>
-                  <a:srgbClr val="000000"/>
-                </a:highlight>
-                <a:latin typeface="Times New Roman" pitchFamily="18" charset="0"/>
-                <a:cs typeface="Times New Roman" pitchFamily="18" charset="0"/>
-              </a:rPr>
-              <a:t>winget</a:t>
-            </a:r>
-            <a:r>
-              <a:rPr lang="en-US" sz="1800" dirty="0">
-                <a:solidFill>
-                  <a:schemeClr val="bg1"/>
-                </a:solidFill>
-                <a:highlight>
-                  <a:srgbClr val="000000"/>
-                </a:highlight>
-                <a:latin typeface="Times New Roman" pitchFamily="18" charset="0"/>
-                <a:cs typeface="Times New Roman" pitchFamily="18" charset="0"/>
-              </a:rPr>
-              <a:t> install </a:t>
-            </a:r>
-            <a:r>
-              <a:rPr lang="en-US" sz="1800" dirty="0" err="1">
-                <a:solidFill>
-                  <a:schemeClr val="bg1"/>
-                </a:solidFill>
-                <a:highlight>
-                  <a:srgbClr val="000000"/>
-                </a:highlight>
-                <a:latin typeface="Times New Roman" pitchFamily="18" charset="0"/>
-                <a:cs typeface="Times New Roman" pitchFamily="18" charset="0"/>
-              </a:rPr>
-              <a:t>Kubernetes.kubectl</a:t>
-            </a:r>
-            <a:endParaRPr lang="ru-RU" sz="1800" dirty="0">
-              <a:solidFill>
-                <a:schemeClr val="bg1"/>
-              </a:solidFill>
-              <a:highlight>
-                <a:srgbClr val="000000"/>
-              </a:highlight>
-              <a:latin typeface="Times New Roman" pitchFamily="18" charset="0"/>
-              <a:cs typeface="Times New Roman" pitchFamily="18" charset="0"/>
-            </a:endParaRPr>
-          </a:p>
-          <a:p>
-            <a:pPr>
-              <a:spcBef>
-                <a:spcPts val="600"/>
-              </a:spcBef>
-              <a:spcAft>
-                <a:spcPts val="600"/>
-              </a:spcAft>
-            </a:pPr>
-            <a:r>
-              <a:rPr lang="en-US" sz="1800" dirty="0">
-                <a:latin typeface="Times New Roman" pitchFamily="18" charset="0"/>
-                <a:cs typeface="Times New Roman" pitchFamily="18" charset="0"/>
-              </a:rPr>
-              <a:t>Linux:</a:t>
-            </a:r>
-            <a:endParaRPr lang="ru-RU" sz="1800" dirty="0">
-              <a:latin typeface="Times New Roman" pitchFamily="18" charset="0"/>
-              <a:cs typeface="Times New Roman" pitchFamily="18" charset="0"/>
-            </a:endParaRPr>
-          </a:p>
-          <a:p>
-            <a:pPr>
-              <a:spcBef>
-                <a:spcPts val="600"/>
-              </a:spcBef>
-              <a:spcAft>
-                <a:spcPts val="600"/>
-              </a:spcAft>
-            </a:pPr>
-            <a:r>
-              <a:rPr lang="en-US" sz="1800" dirty="0">
-                <a:latin typeface="Times New Roman" pitchFamily="18" charset="0"/>
-                <a:cs typeface="Times New Roman" pitchFamily="18" charset="0"/>
-              </a:rPr>
-              <a:t>https://kubernetes.io/ru/docs/tasks/tools/install-kubectl/</a:t>
-            </a:r>
-          </a:p>
-          <a:p>
-            <a:pPr>
-              <a:spcBef>
-                <a:spcPts val="600"/>
-              </a:spcBef>
-              <a:spcAft>
-                <a:spcPts val="600"/>
-              </a:spcAft>
-            </a:pPr>
-            <a:endParaRPr lang="en-US" sz="1800" dirty="0">
-              <a:solidFill>
-                <a:schemeClr val="bg1"/>
-              </a:solidFill>
-              <a:highlight>
-                <a:srgbClr val="000000"/>
-              </a:highlight>
-              <a:latin typeface="Times New Roman" pitchFamily="18" charset="0"/>
-              <a:cs typeface="Times New Roman" pitchFamily="18" charset="0"/>
-            </a:endParaRPr>
-          </a:p>
-        </p:txBody>
-      </p:sp>
-      <p:sp>
-        <p:nvSpPr>
-          <p:cNvPr id="27" name="Текст 3">
-            <a:extLst>
-              <a:ext uri="{FF2B5EF4-FFF2-40B4-BE49-F238E27FC236}">
-                <a16:creationId xmlns:a16="http://schemas.microsoft.com/office/drawing/2014/main" id="{DADA9EF9-526B-409C-912D-41CAA39E5A67}"/>
-              </a:ext>
-            </a:extLst>
-          </p:cNvPr>
-          <p:cNvSpPr txBox="1">
-            <a:spLocks/>
-          </p:cNvSpPr>
-          <p:nvPr/>
-        </p:nvSpPr>
-        <p:spPr>
-          <a:xfrm>
-            <a:off x="7037767" y="5907296"/>
+            <a:off x="4264228" y="6158366"/>
             <a:ext cx="5575049" cy="562084"/>
           </a:xfrm>
           <a:prstGeom prst="rect">
@@ -20918,15 +21317,8 @@
                 <a:latin typeface="Times New Roman" pitchFamily="18" charset="0"/>
                 <a:cs typeface="Times New Roman" pitchFamily="18" charset="0"/>
               </a:rPr>
-              <a:t>https://kubernetes.io/ru/docs/tasks/tools/install-kubectl/</a:t>
-            </a:r>
-            <a:endParaRPr lang="ru-RU" sz="1200" dirty="0">
-              <a:solidFill>
-                <a:schemeClr val="accent3"/>
-              </a:solidFill>
-              <a:latin typeface="Times New Roman" pitchFamily="18" charset="0"/>
-              <a:cs typeface="Times New Roman" pitchFamily="18" charset="0"/>
-            </a:endParaRPr>
+              <a:t>https://kubernetes.io/docs/concepts/architecture/</a:t>
+            </a:r>
           </a:p>
         </p:txBody>
       </p:sp>
@@ -21149,10 +21541,44 @@
           </a:p>
         </p:txBody>
       </p:sp>
+      <p:pic>
+        <p:nvPicPr>
+          <p:cNvPr id="10" name="Google Shape;69;p15">
+            <a:extLst>
+              <a:ext uri="{FF2B5EF4-FFF2-40B4-BE49-F238E27FC236}">
+                <a16:creationId xmlns:a16="http://schemas.microsoft.com/office/drawing/2014/main" id="{F0E2BFA0-F5FA-475A-8A7A-A85F05A44B64}"/>
+              </a:ext>
+            </a:extLst>
+          </p:cNvPr>
+          <p:cNvPicPr preferRelativeResize="0"/>
+          <p:nvPr/>
+        </p:nvPicPr>
+        <p:blipFill>
+          <a:blip r:embed="rId3">
+            <a:alphaModFix/>
+          </a:blip>
+          <a:stretch>
+            <a:fillRect/>
+          </a:stretch>
+        </p:blipFill>
+        <p:spPr>
+          <a:xfrm>
+            <a:off x="2094601" y="1779639"/>
+            <a:ext cx="7563405" cy="4188542"/>
+          </a:xfrm>
+          <a:prstGeom prst="rect">
+            <a:avLst/>
+          </a:prstGeom>
+          <a:noFill/>
+          <a:ln>
+            <a:noFill/>
+          </a:ln>
+        </p:spPr>
+      </p:pic>
     </p:spTree>
     <p:extLst>
       <p:ext uri="{BB962C8B-B14F-4D97-AF65-F5344CB8AC3E}">
-        <p14:creationId xmlns:p14="http://schemas.microsoft.com/office/powerpoint/2010/main" val="3243539658"/>
+        <p14:creationId xmlns:p14="http://schemas.microsoft.com/office/powerpoint/2010/main" val="201212354"/>
       </p:ext>
     </p:extLst>
   </p:cSld>
@@ -21241,8 +21667,19 @@
                 <a:latin typeface="Times New Roman" pitchFamily="18" charset="0"/>
                 <a:cs typeface="Times New Roman" pitchFamily="18" charset="0"/>
               </a:rPr>
-              <a:t>Докер-композиции и сеть</a:t>
-            </a:r>
+              <a:t>Основы </a:t>
+            </a:r>
+            <a:r>
+              <a:rPr lang="en-US" dirty="0">
+                <a:latin typeface="Times New Roman" pitchFamily="18" charset="0"/>
+                <a:cs typeface="Times New Roman" pitchFamily="18" charset="0"/>
+              </a:rPr>
+              <a:t>Kubernetes</a:t>
+            </a:r>
+            <a:endParaRPr lang="ru-RU" dirty="0">
+              <a:latin typeface="Times New Roman" pitchFamily="18" charset="0"/>
+              <a:cs typeface="Times New Roman" pitchFamily="18" charset="0"/>
+            </a:endParaRPr>
           </a:p>
         </p:txBody>
       </p:sp>
@@ -21269,11 +21706,1057 @@
           <a:p>
             <a:r>
               <a:rPr lang="ru-RU" sz="1000" dirty="0"/>
-              <a:t>Предпосылки появления</a:t>
-            </a:r>
-            <a:r>
-              <a:rPr lang="en-US" sz="1000" dirty="0"/>
-              <a:t> docker-compose</a:t>
+              <a:t>Ставим инструмент управления</a:t>
+            </a:r>
+            <a:endParaRPr lang="ru-RU" dirty="0"/>
+          </a:p>
+        </p:txBody>
+      </p:sp>
+      <p:sp>
+        <p:nvSpPr>
+          <p:cNvPr id="20" name="Заголовок 2">
+            <a:extLst>
+              <a:ext uri="{FF2B5EF4-FFF2-40B4-BE49-F238E27FC236}">
+                <a16:creationId xmlns:a16="http://schemas.microsoft.com/office/drawing/2014/main" id="{EB3254AC-E053-4C4B-B7AA-603BB6FF23A1}"/>
+              </a:ext>
+            </a:extLst>
+          </p:cNvPr>
+          <p:cNvSpPr>
+            <a:spLocks noGrp="1"/>
+          </p:cNvSpPr>
+          <p:nvPr>
+            <p:ph type="title"/>
+          </p:nvPr>
+        </p:nvSpPr>
+        <p:spPr>
+          <a:xfrm>
+            <a:off x="585897" y="1405055"/>
+            <a:ext cx="11057955" cy="644244"/>
+          </a:xfrm>
+        </p:spPr>
+        <p:txBody>
+          <a:bodyPr>
+            <a:normAutofit/>
+          </a:bodyPr>
+          <a:lstStyle/>
+          <a:p>
+            <a:r>
+              <a:rPr lang="ru-RU" sz="2200" dirty="0"/>
+              <a:t>Ставим инструмент управления</a:t>
+            </a:r>
+          </a:p>
+        </p:txBody>
+      </p:sp>
+      <p:pic>
+        <p:nvPicPr>
+          <p:cNvPr id="2" name="Picture 2" descr="Picture background">
+            <a:extLst>
+              <a:ext uri="{FF2B5EF4-FFF2-40B4-BE49-F238E27FC236}">
+                <a16:creationId xmlns:a16="http://schemas.microsoft.com/office/drawing/2014/main" id="{E95BE722-533B-4C3A-8C5E-631DBCBAA41C}"/>
+              </a:ext>
+            </a:extLst>
+          </p:cNvPr>
+          <p:cNvPicPr>
+            <a:picLocks noChangeAspect="1" noChangeArrowheads="1"/>
+          </p:cNvPicPr>
+          <p:nvPr/>
+        </p:nvPicPr>
+        <p:blipFill>
+          <a:blip r:embed="rId2">
+            <a:extLst>
+              <a:ext uri="{28A0092B-C50C-407E-A947-70E740481C1C}">
+                <a14:useLocalDpi xmlns:a14="http://schemas.microsoft.com/office/drawing/2010/main" val="0"/>
+              </a:ext>
+            </a:extLst>
+          </a:blip>
+          <a:srcRect/>
+          <a:stretch>
+            <a:fillRect/>
+          </a:stretch>
+        </p:blipFill>
+        <p:spPr bwMode="auto">
+          <a:xfrm>
+            <a:off x="7037767" y="2724520"/>
+            <a:ext cx="3613150" cy="2020165"/>
+          </a:xfrm>
+          <a:prstGeom prst="rect">
+            <a:avLst/>
+          </a:prstGeom>
+          <a:noFill/>
+          <a:extLst>
+            <a:ext uri="{909E8E84-426E-40DD-AFC4-6F175D3DCCD1}">
+              <a14:hiddenFill xmlns:a14="http://schemas.microsoft.com/office/drawing/2010/main">
+                <a:solidFill>
+                  <a:srgbClr val="FFFFFF"/>
+                </a:solidFill>
+              </a14:hiddenFill>
+            </a:ext>
+          </a:extLst>
+        </p:spPr>
+      </p:pic>
+      <p:sp>
+        <p:nvSpPr>
+          <p:cNvPr id="26" name="Текст 3">
+            <a:extLst>
+              <a:ext uri="{FF2B5EF4-FFF2-40B4-BE49-F238E27FC236}">
+                <a16:creationId xmlns:a16="http://schemas.microsoft.com/office/drawing/2014/main" id="{A660D6C9-AC61-42D4-A1A4-22F08E8A98E0}"/>
+              </a:ext>
+            </a:extLst>
+          </p:cNvPr>
+          <p:cNvSpPr txBox="1">
+            <a:spLocks/>
+          </p:cNvSpPr>
+          <p:nvPr/>
+        </p:nvSpPr>
+        <p:spPr>
+          <a:xfrm>
+            <a:off x="624188" y="2264183"/>
+            <a:ext cx="6455543" cy="3862551"/>
+          </a:xfrm>
+          <a:prstGeom prst="rect">
+            <a:avLst/>
+          </a:prstGeom>
+        </p:spPr>
+        <p:txBody>
+          <a:bodyPr vert="horz" lIns="0" tIns="0" rIns="0" bIns="45720" numCol="1" spcCol="252000" rtlCol="0">
+            <a:noAutofit/>
+          </a:bodyPr>
+          <a:lstStyle>
+            <a:lvl1pPr marL="0" marR="0" indent="0" algn="l" defTabSz="914400" rtl="0" eaLnBrk="1" fontAlgn="auto" latinLnBrk="0" hangingPunct="1">
+              <a:lnSpc>
+                <a:spcPct val="100000"/>
+              </a:lnSpc>
+              <a:spcBef>
+                <a:spcPts val="1200"/>
+              </a:spcBef>
+              <a:spcAft>
+                <a:spcPts val="0"/>
+              </a:spcAft>
+              <a:buClrTx/>
+              <a:buSzTx/>
+              <a:buFont typeface="Arial" panose="020B0604020202020204" pitchFamily="34" charset="0"/>
+              <a:buNone/>
+              <a:tabLst/>
+              <a:defRPr sz="1300" b="0" i="0" kern="1200">
+                <a:solidFill>
+                  <a:srgbClr val="0E2D69"/>
+                </a:solidFill>
+                <a:latin typeface="HSE Sans" panose="02000000000000000000" pitchFamily="2" charset="0"/>
+                <a:ea typeface="+mn-ea"/>
+                <a:cs typeface="+mn-cs"/>
+              </a:defRPr>
+            </a:lvl1pPr>
+            <a:lvl2pPr marL="457200" indent="0" algn="l" defTabSz="914400" rtl="0" eaLnBrk="1" latinLnBrk="0" hangingPunct="1">
+              <a:lnSpc>
+                <a:spcPct val="100000"/>
+              </a:lnSpc>
+              <a:spcBef>
+                <a:spcPts val="1000"/>
+              </a:spcBef>
+              <a:buFont typeface="Arial" panose="020B0604020202020204" pitchFamily="34" charset="0"/>
+              <a:buNone/>
+              <a:defRPr sz="1300" b="0" i="0" kern="1200">
+                <a:solidFill>
+                  <a:srgbClr val="0E2D69"/>
+                </a:solidFill>
+                <a:latin typeface="HSE Sans" panose="02000000000000000000" pitchFamily="2" charset="0"/>
+                <a:ea typeface="+mn-ea"/>
+                <a:cs typeface="+mn-cs"/>
+              </a:defRPr>
+            </a:lvl2pPr>
+            <a:lvl3pPr marL="914400" indent="0" algn="l" defTabSz="914400" rtl="0" eaLnBrk="1" latinLnBrk="0" hangingPunct="1">
+              <a:lnSpc>
+                <a:spcPct val="100000"/>
+              </a:lnSpc>
+              <a:spcBef>
+                <a:spcPts val="1000"/>
+              </a:spcBef>
+              <a:buFont typeface="Arial" panose="020B0604020202020204" pitchFamily="34" charset="0"/>
+              <a:buNone/>
+              <a:defRPr sz="1300" b="0" i="0" kern="1200">
+                <a:solidFill>
+                  <a:srgbClr val="0E2D69"/>
+                </a:solidFill>
+                <a:latin typeface="HSE Sans" panose="02000000000000000000" pitchFamily="2" charset="0"/>
+                <a:ea typeface="+mn-ea"/>
+                <a:cs typeface="+mn-cs"/>
+              </a:defRPr>
+            </a:lvl3pPr>
+            <a:lvl4pPr marL="1371600" indent="0" algn="l" defTabSz="914400" rtl="0" eaLnBrk="1" latinLnBrk="0" hangingPunct="1">
+              <a:lnSpc>
+                <a:spcPct val="100000"/>
+              </a:lnSpc>
+              <a:spcBef>
+                <a:spcPts val="1000"/>
+              </a:spcBef>
+              <a:buFont typeface="Arial" panose="020B0604020202020204" pitchFamily="34" charset="0"/>
+              <a:buNone/>
+              <a:defRPr sz="1300" b="0" i="0" kern="1200">
+                <a:solidFill>
+                  <a:srgbClr val="0E2D69"/>
+                </a:solidFill>
+                <a:latin typeface="HSE Sans" panose="02000000000000000000" pitchFamily="2" charset="0"/>
+                <a:ea typeface="+mn-ea"/>
+                <a:cs typeface="+mn-cs"/>
+              </a:defRPr>
+            </a:lvl4pPr>
+            <a:lvl5pPr marL="1828800" indent="0" algn="l" defTabSz="914400" rtl="0" eaLnBrk="1" latinLnBrk="0" hangingPunct="1">
+              <a:lnSpc>
+                <a:spcPct val="100000"/>
+              </a:lnSpc>
+              <a:spcBef>
+                <a:spcPts val="1000"/>
+              </a:spcBef>
+              <a:buFont typeface="Arial" panose="020B0604020202020204" pitchFamily="34" charset="0"/>
+              <a:buNone/>
+              <a:defRPr sz="1300" b="0" i="0" kern="1200">
+                <a:solidFill>
+                  <a:srgbClr val="0E2D69"/>
+                </a:solidFill>
+                <a:latin typeface="HSE Sans" panose="02000000000000000000" pitchFamily="2" charset="0"/>
+                <a:ea typeface="+mn-ea"/>
+                <a:cs typeface="+mn-cs"/>
+              </a:defRPr>
+            </a:lvl5pPr>
+            <a:lvl6pPr marL="2514600" indent="-228600" algn="l" defTabSz="914400" rtl="0" eaLnBrk="1" latinLnBrk="0" hangingPunct="1">
+              <a:lnSpc>
+                <a:spcPct val="90000"/>
+              </a:lnSpc>
+              <a:spcBef>
+                <a:spcPts val="500"/>
+              </a:spcBef>
+              <a:buFont typeface="Arial" panose="020B0604020202020204" pitchFamily="34" charset="0"/>
+              <a:buChar char="•"/>
+              <a:defRPr sz="1800" kern="1200">
+                <a:solidFill>
+                  <a:schemeClr val="tx1"/>
+                </a:solidFill>
+                <a:latin typeface="+mn-lt"/>
+                <a:ea typeface="+mn-ea"/>
+                <a:cs typeface="+mn-cs"/>
+              </a:defRPr>
+            </a:lvl6pPr>
+            <a:lvl7pPr marL="2971800" indent="-228600" algn="l" defTabSz="914400" rtl="0" eaLnBrk="1" latinLnBrk="0" hangingPunct="1">
+              <a:lnSpc>
+                <a:spcPct val="90000"/>
+              </a:lnSpc>
+              <a:spcBef>
+                <a:spcPts val="500"/>
+              </a:spcBef>
+              <a:buFont typeface="Arial" panose="020B0604020202020204" pitchFamily="34" charset="0"/>
+              <a:buChar char="•"/>
+              <a:defRPr sz="1800" kern="1200">
+                <a:solidFill>
+                  <a:schemeClr val="tx1"/>
+                </a:solidFill>
+                <a:latin typeface="+mn-lt"/>
+                <a:ea typeface="+mn-ea"/>
+                <a:cs typeface="+mn-cs"/>
+              </a:defRPr>
+            </a:lvl7pPr>
+            <a:lvl8pPr marL="3429000" indent="-228600" algn="l" defTabSz="914400" rtl="0" eaLnBrk="1" latinLnBrk="0" hangingPunct="1">
+              <a:lnSpc>
+                <a:spcPct val="90000"/>
+              </a:lnSpc>
+              <a:spcBef>
+                <a:spcPts val="500"/>
+              </a:spcBef>
+              <a:buFont typeface="Arial" panose="020B0604020202020204" pitchFamily="34" charset="0"/>
+              <a:buChar char="•"/>
+              <a:defRPr sz="1800" kern="1200">
+                <a:solidFill>
+                  <a:schemeClr val="tx1"/>
+                </a:solidFill>
+                <a:latin typeface="+mn-lt"/>
+                <a:ea typeface="+mn-ea"/>
+                <a:cs typeface="+mn-cs"/>
+              </a:defRPr>
+            </a:lvl8pPr>
+            <a:lvl9pPr marL="3886200" indent="-228600" algn="l" defTabSz="914400" rtl="0" eaLnBrk="1" latinLnBrk="0" hangingPunct="1">
+              <a:lnSpc>
+                <a:spcPct val="90000"/>
+              </a:lnSpc>
+              <a:spcBef>
+                <a:spcPts val="500"/>
+              </a:spcBef>
+              <a:buFont typeface="Arial" panose="020B0604020202020204" pitchFamily="34" charset="0"/>
+              <a:buChar char="•"/>
+              <a:defRPr sz="1800" kern="1200">
+                <a:solidFill>
+                  <a:schemeClr val="tx1"/>
+                </a:solidFill>
+                <a:latin typeface="+mn-lt"/>
+                <a:ea typeface="+mn-ea"/>
+                <a:cs typeface="+mn-cs"/>
+              </a:defRPr>
+            </a:lvl9pPr>
+          </a:lstStyle>
+          <a:p>
+            <a:pPr>
+              <a:spcBef>
+                <a:spcPts val="600"/>
+              </a:spcBef>
+              <a:spcAft>
+                <a:spcPts val="600"/>
+              </a:spcAft>
+            </a:pPr>
+            <a:r>
+              <a:rPr lang="en-US" sz="1800" dirty="0">
+                <a:latin typeface="Times New Roman" pitchFamily="18" charset="0"/>
+                <a:cs typeface="Times New Roman" pitchFamily="18" charset="0"/>
+              </a:rPr>
+              <a:t>MacOS:</a:t>
+            </a:r>
+          </a:p>
+          <a:p>
+            <a:pPr>
+              <a:spcBef>
+                <a:spcPts val="600"/>
+              </a:spcBef>
+              <a:spcAft>
+                <a:spcPts val="600"/>
+              </a:spcAft>
+            </a:pPr>
+            <a:r>
+              <a:rPr lang="en-US" sz="1800" dirty="0">
+                <a:solidFill>
+                  <a:schemeClr val="bg1"/>
+                </a:solidFill>
+                <a:highlight>
+                  <a:srgbClr val="000000"/>
+                </a:highlight>
+                <a:latin typeface="Times New Roman" pitchFamily="18" charset="0"/>
+                <a:cs typeface="Times New Roman" pitchFamily="18" charset="0"/>
+              </a:rPr>
+              <a:t>brew install kubectl</a:t>
+            </a:r>
+            <a:endParaRPr lang="ru-RU" sz="1800" dirty="0">
+              <a:solidFill>
+                <a:schemeClr val="bg1"/>
+              </a:solidFill>
+              <a:highlight>
+                <a:srgbClr val="000000"/>
+              </a:highlight>
+              <a:latin typeface="Times New Roman" pitchFamily="18" charset="0"/>
+              <a:cs typeface="Times New Roman" pitchFamily="18" charset="0"/>
+            </a:endParaRPr>
+          </a:p>
+          <a:p>
+            <a:pPr>
+              <a:spcBef>
+                <a:spcPts val="600"/>
+              </a:spcBef>
+              <a:spcAft>
+                <a:spcPts val="600"/>
+              </a:spcAft>
+            </a:pPr>
+            <a:r>
+              <a:rPr lang="en-US" sz="1800" dirty="0">
+                <a:latin typeface="Times New Roman" pitchFamily="18" charset="0"/>
+                <a:cs typeface="Times New Roman" pitchFamily="18" charset="0"/>
+              </a:rPr>
+              <a:t>Windows</a:t>
+            </a:r>
+          </a:p>
+          <a:p>
+            <a:pPr>
+              <a:spcBef>
+                <a:spcPts val="600"/>
+              </a:spcBef>
+              <a:spcAft>
+                <a:spcPts val="600"/>
+              </a:spcAft>
+            </a:pPr>
+            <a:r>
+              <a:rPr lang="en-US" sz="1800" dirty="0" err="1">
+                <a:solidFill>
+                  <a:schemeClr val="bg1"/>
+                </a:solidFill>
+                <a:highlight>
+                  <a:srgbClr val="000000"/>
+                </a:highlight>
+                <a:latin typeface="Times New Roman" pitchFamily="18" charset="0"/>
+                <a:cs typeface="Times New Roman" pitchFamily="18" charset="0"/>
+              </a:rPr>
+              <a:t>winget</a:t>
+            </a:r>
+            <a:r>
+              <a:rPr lang="en-US" sz="1800" dirty="0">
+                <a:solidFill>
+                  <a:schemeClr val="bg1"/>
+                </a:solidFill>
+                <a:highlight>
+                  <a:srgbClr val="000000"/>
+                </a:highlight>
+                <a:latin typeface="Times New Roman" pitchFamily="18" charset="0"/>
+                <a:cs typeface="Times New Roman" pitchFamily="18" charset="0"/>
+              </a:rPr>
+              <a:t> install </a:t>
+            </a:r>
+            <a:r>
+              <a:rPr lang="en-US" sz="1800" dirty="0" err="1">
+                <a:solidFill>
+                  <a:schemeClr val="bg1"/>
+                </a:solidFill>
+                <a:highlight>
+                  <a:srgbClr val="000000"/>
+                </a:highlight>
+                <a:latin typeface="Times New Roman" pitchFamily="18" charset="0"/>
+                <a:cs typeface="Times New Roman" pitchFamily="18" charset="0"/>
+              </a:rPr>
+              <a:t>Kubernetes.kubectl</a:t>
+            </a:r>
+            <a:endParaRPr lang="ru-RU" sz="1800" dirty="0">
+              <a:solidFill>
+                <a:schemeClr val="bg1"/>
+              </a:solidFill>
+              <a:highlight>
+                <a:srgbClr val="000000"/>
+              </a:highlight>
+              <a:latin typeface="Times New Roman" pitchFamily="18" charset="0"/>
+              <a:cs typeface="Times New Roman" pitchFamily="18" charset="0"/>
+            </a:endParaRPr>
+          </a:p>
+          <a:p>
+            <a:pPr>
+              <a:spcBef>
+                <a:spcPts val="600"/>
+              </a:spcBef>
+              <a:spcAft>
+                <a:spcPts val="600"/>
+              </a:spcAft>
+            </a:pPr>
+            <a:r>
+              <a:rPr lang="en-US" sz="1800" dirty="0">
+                <a:latin typeface="Times New Roman" pitchFamily="18" charset="0"/>
+                <a:cs typeface="Times New Roman" pitchFamily="18" charset="0"/>
+              </a:rPr>
+              <a:t>Linux:</a:t>
+            </a:r>
+            <a:endParaRPr lang="ru-RU" sz="1800" dirty="0">
+              <a:latin typeface="Times New Roman" pitchFamily="18" charset="0"/>
+              <a:cs typeface="Times New Roman" pitchFamily="18" charset="0"/>
+            </a:endParaRPr>
+          </a:p>
+          <a:p>
+            <a:pPr>
+              <a:spcBef>
+                <a:spcPts val="600"/>
+              </a:spcBef>
+              <a:spcAft>
+                <a:spcPts val="600"/>
+              </a:spcAft>
+            </a:pPr>
+            <a:r>
+              <a:rPr lang="en-US" sz="1800" dirty="0">
+                <a:latin typeface="Times New Roman" pitchFamily="18" charset="0"/>
+                <a:cs typeface="Times New Roman" pitchFamily="18" charset="0"/>
+              </a:rPr>
+              <a:t>https://kubernetes.io/ru/docs/tasks/tools/install-kubectl/</a:t>
+            </a:r>
+          </a:p>
+          <a:p>
+            <a:pPr>
+              <a:spcBef>
+                <a:spcPts val="600"/>
+              </a:spcBef>
+              <a:spcAft>
+                <a:spcPts val="600"/>
+              </a:spcAft>
+            </a:pPr>
+            <a:endParaRPr lang="en-US" sz="1800" dirty="0">
+              <a:solidFill>
+                <a:schemeClr val="bg1"/>
+              </a:solidFill>
+              <a:highlight>
+                <a:srgbClr val="000000"/>
+              </a:highlight>
+              <a:latin typeface="Times New Roman" pitchFamily="18" charset="0"/>
+              <a:cs typeface="Times New Roman" pitchFamily="18" charset="0"/>
+            </a:endParaRPr>
+          </a:p>
+        </p:txBody>
+      </p:sp>
+      <p:sp>
+        <p:nvSpPr>
+          <p:cNvPr id="27" name="Текст 3">
+            <a:extLst>
+              <a:ext uri="{FF2B5EF4-FFF2-40B4-BE49-F238E27FC236}">
+                <a16:creationId xmlns:a16="http://schemas.microsoft.com/office/drawing/2014/main" id="{DADA9EF9-526B-409C-912D-41CAA39E5A67}"/>
+              </a:ext>
+            </a:extLst>
+          </p:cNvPr>
+          <p:cNvSpPr txBox="1">
+            <a:spLocks/>
+          </p:cNvSpPr>
+          <p:nvPr/>
+        </p:nvSpPr>
+        <p:spPr>
+          <a:xfrm>
+            <a:off x="7037767" y="5907296"/>
+            <a:ext cx="5575049" cy="562084"/>
+          </a:xfrm>
+          <a:prstGeom prst="rect">
+            <a:avLst/>
+          </a:prstGeom>
+        </p:spPr>
+        <p:txBody>
+          <a:bodyPr vert="horz" lIns="0" tIns="0" rIns="0" bIns="45720" numCol="1" spcCol="252000" rtlCol="0">
+            <a:noAutofit/>
+          </a:bodyPr>
+          <a:lstStyle>
+            <a:lvl1pPr marL="0" marR="0" indent="0" algn="l" defTabSz="914400" rtl="0" eaLnBrk="1" fontAlgn="auto" latinLnBrk="0" hangingPunct="1">
+              <a:lnSpc>
+                <a:spcPct val="100000"/>
+              </a:lnSpc>
+              <a:spcBef>
+                <a:spcPts val="1200"/>
+              </a:spcBef>
+              <a:spcAft>
+                <a:spcPts val="0"/>
+              </a:spcAft>
+              <a:buClrTx/>
+              <a:buSzTx/>
+              <a:buFont typeface="Arial" panose="020B0604020202020204" pitchFamily="34" charset="0"/>
+              <a:buNone/>
+              <a:tabLst/>
+              <a:defRPr sz="1300" b="0" i="0" kern="1200">
+                <a:solidFill>
+                  <a:srgbClr val="0E2D69"/>
+                </a:solidFill>
+                <a:latin typeface="HSE Sans" panose="02000000000000000000" pitchFamily="2" charset="0"/>
+                <a:ea typeface="+mn-ea"/>
+                <a:cs typeface="+mn-cs"/>
+              </a:defRPr>
+            </a:lvl1pPr>
+            <a:lvl2pPr marL="457200" indent="0" algn="l" defTabSz="914400" rtl="0" eaLnBrk="1" latinLnBrk="0" hangingPunct="1">
+              <a:lnSpc>
+                <a:spcPct val="100000"/>
+              </a:lnSpc>
+              <a:spcBef>
+                <a:spcPts val="1000"/>
+              </a:spcBef>
+              <a:buFont typeface="Arial" panose="020B0604020202020204" pitchFamily="34" charset="0"/>
+              <a:buNone/>
+              <a:defRPr sz="1300" b="0" i="0" kern="1200">
+                <a:solidFill>
+                  <a:srgbClr val="0E2D69"/>
+                </a:solidFill>
+                <a:latin typeface="HSE Sans" panose="02000000000000000000" pitchFamily="2" charset="0"/>
+                <a:ea typeface="+mn-ea"/>
+                <a:cs typeface="+mn-cs"/>
+              </a:defRPr>
+            </a:lvl2pPr>
+            <a:lvl3pPr marL="914400" indent="0" algn="l" defTabSz="914400" rtl="0" eaLnBrk="1" latinLnBrk="0" hangingPunct="1">
+              <a:lnSpc>
+                <a:spcPct val="100000"/>
+              </a:lnSpc>
+              <a:spcBef>
+                <a:spcPts val="1000"/>
+              </a:spcBef>
+              <a:buFont typeface="Arial" panose="020B0604020202020204" pitchFamily="34" charset="0"/>
+              <a:buNone/>
+              <a:defRPr sz="1300" b="0" i="0" kern="1200">
+                <a:solidFill>
+                  <a:srgbClr val="0E2D69"/>
+                </a:solidFill>
+                <a:latin typeface="HSE Sans" panose="02000000000000000000" pitchFamily="2" charset="0"/>
+                <a:ea typeface="+mn-ea"/>
+                <a:cs typeface="+mn-cs"/>
+              </a:defRPr>
+            </a:lvl3pPr>
+            <a:lvl4pPr marL="1371600" indent="0" algn="l" defTabSz="914400" rtl="0" eaLnBrk="1" latinLnBrk="0" hangingPunct="1">
+              <a:lnSpc>
+                <a:spcPct val="100000"/>
+              </a:lnSpc>
+              <a:spcBef>
+                <a:spcPts val="1000"/>
+              </a:spcBef>
+              <a:buFont typeface="Arial" panose="020B0604020202020204" pitchFamily="34" charset="0"/>
+              <a:buNone/>
+              <a:defRPr sz="1300" b="0" i="0" kern="1200">
+                <a:solidFill>
+                  <a:srgbClr val="0E2D69"/>
+                </a:solidFill>
+                <a:latin typeface="HSE Sans" panose="02000000000000000000" pitchFamily="2" charset="0"/>
+                <a:ea typeface="+mn-ea"/>
+                <a:cs typeface="+mn-cs"/>
+              </a:defRPr>
+            </a:lvl4pPr>
+            <a:lvl5pPr marL="1828800" indent="0" algn="l" defTabSz="914400" rtl="0" eaLnBrk="1" latinLnBrk="0" hangingPunct="1">
+              <a:lnSpc>
+                <a:spcPct val="100000"/>
+              </a:lnSpc>
+              <a:spcBef>
+                <a:spcPts val="1000"/>
+              </a:spcBef>
+              <a:buFont typeface="Arial" panose="020B0604020202020204" pitchFamily="34" charset="0"/>
+              <a:buNone/>
+              <a:defRPr sz="1300" b="0" i="0" kern="1200">
+                <a:solidFill>
+                  <a:srgbClr val="0E2D69"/>
+                </a:solidFill>
+                <a:latin typeface="HSE Sans" panose="02000000000000000000" pitchFamily="2" charset="0"/>
+                <a:ea typeface="+mn-ea"/>
+                <a:cs typeface="+mn-cs"/>
+              </a:defRPr>
+            </a:lvl5pPr>
+            <a:lvl6pPr marL="2514600" indent="-228600" algn="l" defTabSz="914400" rtl="0" eaLnBrk="1" latinLnBrk="0" hangingPunct="1">
+              <a:lnSpc>
+                <a:spcPct val="90000"/>
+              </a:lnSpc>
+              <a:spcBef>
+                <a:spcPts val="500"/>
+              </a:spcBef>
+              <a:buFont typeface="Arial" panose="020B0604020202020204" pitchFamily="34" charset="0"/>
+              <a:buChar char="•"/>
+              <a:defRPr sz="1800" kern="1200">
+                <a:solidFill>
+                  <a:schemeClr val="tx1"/>
+                </a:solidFill>
+                <a:latin typeface="+mn-lt"/>
+                <a:ea typeface="+mn-ea"/>
+                <a:cs typeface="+mn-cs"/>
+              </a:defRPr>
+            </a:lvl6pPr>
+            <a:lvl7pPr marL="2971800" indent="-228600" algn="l" defTabSz="914400" rtl="0" eaLnBrk="1" latinLnBrk="0" hangingPunct="1">
+              <a:lnSpc>
+                <a:spcPct val="90000"/>
+              </a:lnSpc>
+              <a:spcBef>
+                <a:spcPts val="500"/>
+              </a:spcBef>
+              <a:buFont typeface="Arial" panose="020B0604020202020204" pitchFamily="34" charset="0"/>
+              <a:buChar char="•"/>
+              <a:defRPr sz="1800" kern="1200">
+                <a:solidFill>
+                  <a:schemeClr val="tx1"/>
+                </a:solidFill>
+                <a:latin typeface="+mn-lt"/>
+                <a:ea typeface="+mn-ea"/>
+                <a:cs typeface="+mn-cs"/>
+              </a:defRPr>
+            </a:lvl7pPr>
+            <a:lvl8pPr marL="3429000" indent="-228600" algn="l" defTabSz="914400" rtl="0" eaLnBrk="1" latinLnBrk="0" hangingPunct="1">
+              <a:lnSpc>
+                <a:spcPct val="90000"/>
+              </a:lnSpc>
+              <a:spcBef>
+                <a:spcPts val="500"/>
+              </a:spcBef>
+              <a:buFont typeface="Arial" panose="020B0604020202020204" pitchFamily="34" charset="0"/>
+              <a:buChar char="•"/>
+              <a:defRPr sz="1800" kern="1200">
+                <a:solidFill>
+                  <a:schemeClr val="tx1"/>
+                </a:solidFill>
+                <a:latin typeface="+mn-lt"/>
+                <a:ea typeface="+mn-ea"/>
+                <a:cs typeface="+mn-cs"/>
+              </a:defRPr>
+            </a:lvl8pPr>
+            <a:lvl9pPr marL="3886200" indent="-228600" algn="l" defTabSz="914400" rtl="0" eaLnBrk="1" latinLnBrk="0" hangingPunct="1">
+              <a:lnSpc>
+                <a:spcPct val="90000"/>
+              </a:lnSpc>
+              <a:spcBef>
+                <a:spcPts val="500"/>
+              </a:spcBef>
+              <a:buFont typeface="Arial" panose="020B0604020202020204" pitchFamily="34" charset="0"/>
+              <a:buChar char="•"/>
+              <a:defRPr sz="1800" kern="1200">
+                <a:solidFill>
+                  <a:schemeClr val="tx1"/>
+                </a:solidFill>
+                <a:latin typeface="+mn-lt"/>
+                <a:ea typeface="+mn-ea"/>
+                <a:cs typeface="+mn-cs"/>
+              </a:defRPr>
+            </a:lvl9pPr>
+          </a:lstStyle>
+          <a:p>
+            <a:pPr>
+              <a:lnSpc>
+                <a:spcPts val="1200"/>
+              </a:lnSpc>
+              <a:spcBef>
+                <a:spcPts val="600"/>
+              </a:spcBef>
+              <a:spcAft>
+                <a:spcPts val="600"/>
+              </a:spcAft>
+            </a:pPr>
+            <a:r>
+              <a:rPr lang="en-US" sz="1200" dirty="0">
+                <a:solidFill>
+                  <a:schemeClr val="accent3"/>
+                </a:solidFill>
+                <a:latin typeface="Times New Roman" pitchFamily="18" charset="0"/>
+                <a:cs typeface="Times New Roman" pitchFamily="18" charset="0"/>
+              </a:rPr>
+              <a:t>https://kubernetes.io/ru/docs/tasks/tools/install-kubectl/</a:t>
+            </a:r>
+            <a:endParaRPr lang="ru-RU" sz="1200" dirty="0">
+              <a:solidFill>
+                <a:schemeClr val="accent3"/>
+              </a:solidFill>
+              <a:latin typeface="Times New Roman" pitchFamily="18" charset="0"/>
+              <a:cs typeface="Times New Roman" pitchFamily="18" charset="0"/>
+            </a:endParaRPr>
+          </a:p>
+        </p:txBody>
+      </p:sp>
+      <p:sp>
+        <p:nvSpPr>
+          <p:cNvPr id="29" name="Текст 3">
+            <a:extLst>
+              <a:ext uri="{FF2B5EF4-FFF2-40B4-BE49-F238E27FC236}">
+                <a16:creationId xmlns:a16="http://schemas.microsoft.com/office/drawing/2014/main" id="{4D5E6D4D-BE9A-4262-96AF-253F4DFB2718}"/>
+              </a:ext>
+            </a:extLst>
+          </p:cNvPr>
+          <p:cNvSpPr txBox="1">
+            <a:spLocks/>
+          </p:cNvSpPr>
+          <p:nvPr/>
+        </p:nvSpPr>
+        <p:spPr>
+          <a:xfrm>
+            <a:off x="624188" y="4463643"/>
+            <a:ext cx="5575049" cy="562084"/>
+          </a:xfrm>
+          <a:prstGeom prst="rect">
+            <a:avLst/>
+          </a:prstGeom>
+        </p:spPr>
+        <p:txBody>
+          <a:bodyPr vert="horz" lIns="0" tIns="0" rIns="0" bIns="45720" numCol="1" spcCol="252000" rtlCol="0">
+            <a:noAutofit/>
+          </a:bodyPr>
+          <a:lstStyle>
+            <a:lvl1pPr marL="0" marR="0" indent="0" algn="l" defTabSz="914400" rtl="0" eaLnBrk="1" fontAlgn="auto" latinLnBrk="0" hangingPunct="1">
+              <a:lnSpc>
+                <a:spcPct val="100000"/>
+              </a:lnSpc>
+              <a:spcBef>
+                <a:spcPts val="1200"/>
+              </a:spcBef>
+              <a:spcAft>
+                <a:spcPts val="0"/>
+              </a:spcAft>
+              <a:buClrTx/>
+              <a:buSzTx/>
+              <a:buFont typeface="Arial" panose="020B0604020202020204" pitchFamily="34" charset="0"/>
+              <a:buNone/>
+              <a:tabLst/>
+              <a:defRPr sz="1300" b="0" i="0" kern="1200">
+                <a:solidFill>
+                  <a:srgbClr val="0E2D69"/>
+                </a:solidFill>
+                <a:latin typeface="HSE Sans" panose="02000000000000000000" pitchFamily="2" charset="0"/>
+                <a:ea typeface="+mn-ea"/>
+                <a:cs typeface="+mn-cs"/>
+              </a:defRPr>
+            </a:lvl1pPr>
+            <a:lvl2pPr marL="457200" indent="0" algn="l" defTabSz="914400" rtl="0" eaLnBrk="1" latinLnBrk="0" hangingPunct="1">
+              <a:lnSpc>
+                <a:spcPct val="100000"/>
+              </a:lnSpc>
+              <a:spcBef>
+                <a:spcPts val="1000"/>
+              </a:spcBef>
+              <a:buFont typeface="Arial" panose="020B0604020202020204" pitchFamily="34" charset="0"/>
+              <a:buNone/>
+              <a:defRPr sz="1300" b="0" i="0" kern="1200">
+                <a:solidFill>
+                  <a:srgbClr val="0E2D69"/>
+                </a:solidFill>
+                <a:latin typeface="HSE Sans" panose="02000000000000000000" pitchFamily="2" charset="0"/>
+                <a:ea typeface="+mn-ea"/>
+                <a:cs typeface="+mn-cs"/>
+              </a:defRPr>
+            </a:lvl2pPr>
+            <a:lvl3pPr marL="914400" indent="0" algn="l" defTabSz="914400" rtl="0" eaLnBrk="1" latinLnBrk="0" hangingPunct="1">
+              <a:lnSpc>
+                <a:spcPct val="100000"/>
+              </a:lnSpc>
+              <a:spcBef>
+                <a:spcPts val="1000"/>
+              </a:spcBef>
+              <a:buFont typeface="Arial" panose="020B0604020202020204" pitchFamily="34" charset="0"/>
+              <a:buNone/>
+              <a:defRPr sz="1300" b="0" i="0" kern="1200">
+                <a:solidFill>
+                  <a:srgbClr val="0E2D69"/>
+                </a:solidFill>
+                <a:latin typeface="HSE Sans" panose="02000000000000000000" pitchFamily="2" charset="0"/>
+                <a:ea typeface="+mn-ea"/>
+                <a:cs typeface="+mn-cs"/>
+              </a:defRPr>
+            </a:lvl3pPr>
+            <a:lvl4pPr marL="1371600" indent="0" algn="l" defTabSz="914400" rtl="0" eaLnBrk="1" latinLnBrk="0" hangingPunct="1">
+              <a:lnSpc>
+                <a:spcPct val="100000"/>
+              </a:lnSpc>
+              <a:spcBef>
+                <a:spcPts val="1000"/>
+              </a:spcBef>
+              <a:buFont typeface="Arial" panose="020B0604020202020204" pitchFamily="34" charset="0"/>
+              <a:buNone/>
+              <a:defRPr sz="1300" b="0" i="0" kern="1200">
+                <a:solidFill>
+                  <a:srgbClr val="0E2D69"/>
+                </a:solidFill>
+                <a:latin typeface="HSE Sans" panose="02000000000000000000" pitchFamily="2" charset="0"/>
+                <a:ea typeface="+mn-ea"/>
+                <a:cs typeface="+mn-cs"/>
+              </a:defRPr>
+            </a:lvl4pPr>
+            <a:lvl5pPr marL="1828800" indent="0" algn="l" defTabSz="914400" rtl="0" eaLnBrk="1" latinLnBrk="0" hangingPunct="1">
+              <a:lnSpc>
+                <a:spcPct val="100000"/>
+              </a:lnSpc>
+              <a:spcBef>
+                <a:spcPts val="1000"/>
+              </a:spcBef>
+              <a:buFont typeface="Arial" panose="020B0604020202020204" pitchFamily="34" charset="0"/>
+              <a:buNone/>
+              <a:defRPr sz="1300" b="0" i="0" kern="1200">
+                <a:solidFill>
+                  <a:srgbClr val="0E2D69"/>
+                </a:solidFill>
+                <a:latin typeface="HSE Sans" panose="02000000000000000000" pitchFamily="2" charset="0"/>
+                <a:ea typeface="+mn-ea"/>
+                <a:cs typeface="+mn-cs"/>
+              </a:defRPr>
+            </a:lvl5pPr>
+            <a:lvl6pPr marL="2514600" indent="-228600" algn="l" defTabSz="914400" rtl="0" eaLnBrk="1" latinLnBrk="0" hangingPunct="1">
+              <a:lnSpc>
+                <a:spcPct val="90000"/>
+              </a:lnSpc>
+              <a:spcBef>
+                <a:spcPts val="500"/>
+              </a:spcBef>
+              <a:buFont typeface="Arial" panose="020B0604020202020204" pitchFamily="34" charset="0"/>
+              <a:buChar char="•"/>
+              <a:defRPr sz="1800" kern="1200">
+                <a:solidFill>
+                  <a:schemeClr val="tx1"/>
+                </a:solidFill>
+                <a:latin typeface="+mn-lt"/>
+                <a:ea typeface="+mn-ea"/>
+                <a:cs typeface="+mn-cs"/>
+              </a:defRPr>
+            </a:lvl6pPr>
+            <a:lvl7pPr marL="2971800" indent="-228600" algn="l" defTabSz="914400" rtl="0" eaLnBrk="1" latinLnBrk="0" hangingPunct="1">
+              <a:lnSpc>
+                <a:spcPct val="90000"/>
+              </a:lnSpc>
+              <a:spcBef>
+                <a:spcPts val="500"/>
+              </a:spcBef>
+              <a:buFont typeface="Arial" panose="020B0604020202020204" pitchFamily="34" charset="0"/>
+              <a:buChar char="•"/>
+              <a:defRPr sz="1800" kern="1200">
+                <a:solidFill>
+                  <a:schemeClr val="tx1"/>
+                </a:solidFill>
+                <a:latin typeface="+mn-lt"/>
+                <a:ea typeface="+mn-ea"/>
+                <a:cs typeface="+mn-cs"/>
+              </a:defRPr>
+            </a:lvl7pPr>
+            <a:lvl8pPr marL="3429000" indent="-228600" algn="l" defTabSz="914400" rtl="0" eaLnBrk="1" latinLnBrk="0" hangingPunct="1">
+              <a:lnSpc>
+                <a:spcPct val="90000"/>
+              </a:lnSpc>
+              <a:spcBef>
+                <a:spcPts val="500"/>
+              </a:spcBef>
+              <a:buFont typeface="Arial" panose="020B0604020202020204" pitchFamily="34" charset="0"/>
+              <a:buChar char="•"/>
+              <a:defRPr sz="1800" kern="1200">
+                <a:solidFill>
+                  <a:schemeClr val="tx1"/>
+                </a:solidFill>
+                <a:latin typeface="+mn-lt"/>
+                <a:ea typeface="+mn-ea"/>
+                <a:cs typeface="+mn-cs"/>
+              </a:defRPr>
+            </a:lvl8pPr>
+            <a:lvl9pPr marL="3886200" indent="-228600" algn="l" defTabSz="914400" rtl="0" eaLnBrk="1" latinLnBrk="0" hangingPunct="1">
+              <a:lnSpc>
+                <a:spcPct val="90000"/>
+              </a:lnSpc>
+              <a:spcBef>
+                <a:spcPts val="500"/>
+              </a:spcBef>
+              <a:buFont typeface="Arial" panose="020B0604020202020204" pitchFamily="34" charset="0"/>
+              <a:buChar char="•"/>
+              <a:defRPr sz="1800" kern="1200">
+                <a:solidFill>
+                  <a:schemeClr val="tx1"/>
+                </a:solidFill>
+                <a:latin typeface="+mn-lt"/>
+                <a:ea typeface="+mn-ea"/>
+                <a:cs typeface="+mn-cs"/>
+              </a:defRPr>
+            </a:lvl9pPr>
+          </a:lstStyle>
+          <a:p>
+            <a:pPr>
+              <a:lnSpc>
+                <a:spcPts val="1200"/>
+              </a:lnSpc>
+              <a:spcBef>
+                <a:spcPts val="600"/>
+              </a:spcBef>
+              <a:spcAft>
+                <a:spcPts val="600"/>
+              </a:spcAft>
+            </a:pPr>
+            <a:endParaRPr lang="ru-RU" sz="1200" dirty="0">
+              <a:solidFill>
+                <a:schemeClr val="accent3"/>
+              </a:solidFill>
+              <a:latin typeface="Times New Roman" pitchFamily="18" charset="0"/>
+              <a:cs typeface="Times New Roman" pitchFamily="18" charset="0"/>
+            </a:endParaRPr>
+          </a:p>
+        </p:txBody>
+      </p:sp>
+    </p:spTree>
+    <p:extLst>
+      <p:ext uri="{BB962C8B-B14F-4D97-AF65-F5344CB8AC3E}">
+        <p14:creationId xmlns:p14="http://schemas.microsoft.com/office/powerpoint/2010/main" val="3243539658"/>
+      </p:ext>
+    </p:extLst>
+  </p:cSld>
+  <p:clrMapOvr>
+    <a:masterClrMapping/>
+  </p:clrMapOvr>
+</p:sld>
+</file>
+
+<file path=ppt/slides/slide5.xml><?xml version="1.0" encoding="utf-8"?>
+<p:sld xmlns:a="http://schemas.openxmlformats.org/drawingml/2006/main" xmlns:r="http://schemas.openxmlformats.org/officeDocument/2006/relationships" xmlns:p="http://schemas.openxmlformats.org/presentationml/2006/main">
+  <p:cSld>
+    <p:spTree>
+      <p:nvGrpSpPr>
+        <p:cNvPr id="1" name=""/>
+        <p:cNvGrpSpPr/>
+        <p:nvPr/>
+      </p:nvGrpSpPr>
+      <p:grpSpPr>
+        <a:xfrm>
+          <a:off x="0" y="0"/>
+          <a:ext cx="0" cy="0"/>
+          <a:chOff x="0" y="0"/>
+          <a:chExt cx="0" cy="0"/>
+        </a:xfrm>
+      </p:grpSpPr>
+      <p:sp>
+        <p:nvSpPr>
+          <p:cNvPr id="5" name="Текст 4">
+            <a:extLst>
+              <a:ext uri="{FF2B5EF4-FFF2-40B4-BE49-F238E27FC236}">
+                <a16:creationId xmlns:a16="http://schemas.microsoft.com/office/drawing/2014/main" id="{3EB29DC1-D5D4-FB41-9E2D-AA4750D0CC8B}"/>
+              </a:ext>
+            </a:extLst>
+          </p:cNvPr>
+          <p:cNvSpPr>
+            <a:spLocks noGrp="1"/>
+          </p:cNvSpPr>
+          <p:nvPr>
+            <p:ph type="body" sz="quarter" idx="13"/>
+          </p:nvPr>
+        </p:nvSpPr>
+        <p:spPr/>
+        <p:txBody>
+          <a:bodyPr/>
+          <a:lstStyle/>
+          <a:p>
+            <a:r>
+              <a:rPr lang="ru-RU" dirty="0"/>
+              <a:t>Промышленное развертывание серверных приложений</a:t>
+            </a:r>
+          </a:p>
+          <a:p>
+            <a:endParaRPr lang="ru-RU" dirty="0"/>
+          </a:p>
+        </p:txBody>
+      </p:sp>
+      <p:sp>
+        <p:nvSpPr>
+          <p:cNvPr id="6" name="Текст 5">
+            <a:extLst>
+              <a:ext uri="{FF2B5EF4-FFF2-40B4-BE49-F238E27FC236}">
+                <a16:creationId xmlns:a16="http://schemas.microsoft.com/office/drawing/2014/main" id="{B5B6DD1A-BEFA-D842-9B7A-78D7BD1A5259}"/>
+              </a:ext>
+            </a:extLst>
+          </p:cNvPr>
+          <p:cNvSpPr>
+            <a:spLocks noGrp="1"/>
+          </p:cNvSpPr>
+          <p:nvPr>
+            <p:ph type="body" sz="quarter" idx="14"/>
+          </p:nvPr>
+        </p:nvSpPr>
+        <p:spPr>
+          <a:xfrm>
+            <a:off x="3459162" y="548720"/>
+            <a:ext cx="2456115" cy="641451"/>
+          </a:xfrm>
+        </p:spPr>
+        <p:txBody>
+          <a:bodyPr/>
+          <a:lstStyle/>
+          <a:p>
+            <a:r>
+              <a:rPr lang="ru-RU" dirty="0">
+                <a:latin typeface="Times New Roman" pitchFamily="18" charset="0"/>
+                <a:cs typeface="Times New Roman" pitchFamily="18" charset="0"/>
+              </a:rPr>
+              <a:t>Основы </a:t>
+            </a:r>
+            <a:r>
+              <a:rPr lang="en-US" dirty="0">
+                <a:latin typeface="Times New Roman" pitchFamily="18" charset="0"/>
+                <a:cs typeface="Times New Roman" pitchFamily="18" charset="0"/>
+              </a:rPr>
+              <a:t>Kubernetes</a:t>
+            </a:r>
+            <a:endParaRPr lang="ru-RU" dirty="0">
+              <a:latin typeface="Times New Roman" pitchFamily="18" charset="0"/>
+              <a:cs typeface="Times New Roman" pitchFamily="18" charset="0"/>
+            </a:endParaRPr>
+          </a:p>
+        </p:txBody>
+      </p:sp>
+      <p:sp>
+        <p:nvSpPr>
+          <p:cNvPr id="15" name="Текст 14">
+            <a:extLst>
+              <a:ext uri="{FF2B5EF4-FFF2-40B4-BE49-F238E27FC236}">
+                <a16:creationId xmlns:a16="http://schemas.microsoft.com/office/drawing/2014/main" id="{D41A0F8D-9767-4A5D-947A-34B08831DECE}"/>
+              </a:ext>
+            </a:extLst>
+          </p:cNvPr>
+          <p:cNvSpPr>
+            <a:spLocks noGrp="1"/>
+          </p:cNvSpPr>
+          <p:nvPr>
+            <p:ph type="body" sz="quarter" idx="15"/>
+          </p:nvPr>
+        </p:nvSpPr>
+        <p:spPr/>
+        <p:txBody>
+          <a:bodyPr/>
+          <a:lstStyle/>
+          <a:p>
+            <a:r>
+              <a:rPr lang="ru-RU" sz="1000" dirty="0"/>
+              <a:t>Поднимаем карманный кластер</a:t>
             </a:r>
             <a:endParaRPr lang="ru-RU" dirty="0"/>
           </a:p>
@@ -22037,7 +23520,7 @@
 </p:sld>
 </file>
 
-<file path=ppt/slides/slide5.xml><?xml version="1.0" encoding="utf-8"?>
+<file path=ppt/slides/slide6.xml><?xml version="1.0" encoding="utf-8"?>
 <p:sld xmlns:a="http://schemas.openxmlformats.org/drawingml/2006/main" xmlns:r="http://schemas.openxmlformats.org/officeDocument/2006/relationships" xmlns:p="http://schemas.openxmlformats.org/presentationml/2006/main">
   <p:cSld>
     <p:spTree>
@@ -22116,8 +23599,19 @@
                 <a:latin typeface="Times New Roman" pitchFamily="18" charset="0"/>
                 <a:cs typeface="Times New Roman" pitchFamily="18" charset="0"/>
               </a:rPr>
-              <a:t>Докер-композиции и сеть</a:t>
-            </a:r>
+              <a:t>Основы </a:t>
+            </a:r>
+            <a:r>
+              <a:rPr lang="en-US" dirty="0">
+                <a:latin typeface="Times New Roman" pitchFamily="18" charset="0"/>
+                <a:cs typeface="Times New Roman" pitchFamily="18" charset="0"/>
+              </a:rPr>
+              <a:t>Kubernetes</a:t>
+            </a:r>
+            <a:endParaRPr lang="ru-RU" dirty="0">
+              <a:latin typeface="Times New Roman" pitchFamily="18" charset="0"/>
+              <a:cs typeface="Times New Roman" pitchFamily="18" charset="0"/>
+            </a:endParaRPr>
           </a:p>
         </p:txBody>
       </p:sp>
@@ -22144,11 +23638,7 @@
           <a:p>
             <a:r>
               <a:rPr lang="ru-RU" sz="1000" dirty="0"/>
-              <a:t>Предпосылки появления</a:t>
-            </a:r>
-            <a:r>
-              <a:rPr lang="en-US" sz="1000" dirty="0"/>
-              <a:t> docker-compose</a:t>
+              <a:t>Поднимаем карманный кластер</a:t>
             </a:r>
             <a:endParaRPr lang="ru-RU" dirty="0"/>
           </a:p>
@@ -23018,7 +24508,7 @@
 </p:sld>
 </file>
 
-<file path=ppt/slides/slide6.xml><?xml version="1.0" encoding="utf-8"?>
+<file path=ppt/slides/slide7.xml><?xml version="1.0" encoding="utf-8"?>
 <p:sld xmlns:a="http://schemas.openxmlformats.org/drawingml/2006/main" xmlns:r="http://schemas.openxmlformats.org/officeDocument/2006/relationships" xmlns:p="http://schemas.openxmlformats.org/presentationml/2006/main">
   <p:cSld>
     <p:spTree>
@@ -23097,8 +24587,19 @@
                 <a:latin typeface="Times New Roman" pitchFamily="18" charset="0"/>
                 <a:cs typeface="Times New Roman" pitchFamily="18" charset="0"/>
               </a:rPr>
-              <a:t>Докер-композиции и сеть</a:t>
-            </a:r>
+              <a:t>Основы </a:t>
+            </a:r>
+            <a:r>
+              <a:rPr lang="en-US" dirty="0">
+                <a:latin typeface="Times New Roman" pitchFamily="18" charset="0"/>
+                <a:cs typeface="Times New Roman" pitchFamily="18" charset="0"/>
+              </a:rPr>
+              <a:t>Kubernetes</a:t>
+            </a:r>
+            <a:endParaRPr lang="ru-RU" dirty="0">
+              <a:latin typeface="Times New Roman" pitchFamily="18" charset="0"/>
+              <a:cs typeface="Times New Roman" pitchFamily="18" charset="0"/>
+            </a:endParaRPr>
           </a:p>
         </p:txBody>
       </p:sp>
@@ -23125,11 +24626,11 @@
           <a:p>
             <a:r>
               <a:rPr lang="ru-RU" sz="1000" dirty="0"/>
-              <a:t>Предпосылки появления</a:t>
+              <a:t>Первый </a:t>
             </a:r>
             <a:r>
               <a:rPr lang="en-US" sz="1000" dirty="0"/>
-              <a:t> docker-compose</a:t>
+              <a:t>Deployment</a:t>
             </a:r>
             <a:endParaRPr lang="ru-RU" dirty="0"/>
           </a:p>
@@ -23669,7 +25170,7 @@
 </p:sld>
 </file>
 
-<file path=ppt/slides/slide7.xml><?xml version="1.0" encoding="utf-8"?>
+<file path=ppt/slides/slide8.xml><?xml version="1.0" encoding="utf-8"?>
 <p:sld xmlns:a="http://schemas.openxmlformats.org/drawingml/2006/main" xmlns:r="http://schemas.openxmlformats.org/officeDocument/2006/relationships" xmlns:p="http://schemas.openxmlformats.org/presentationml/2006/main">
   <p:cSld>
     <p:spTree>
@@ -23748,8 +25249,19 @@
                 <a:latin typeface="Times New Roman" pitchFamily="18" charset="0"/>
                 <a:cs typeface="Times New Roman" pitchFamily="18" charset="0"/>
               </a:rPr>
-              <a:t>Докер-композиции и сеть</a:t>
-            </a:r>
+              <a:t>Основы </a:t>
+            </a:r>
+            <a:r>
+              <a:rPr lang="en-US" dirty="0">
+                <a:latin typeface="Times New Roman" pitchFamily="18" charset="0"/>
+                <a:cs typeface="Times New Roman" pitchFamily="18" charset="0"/>
+              </a:rPr>
+              <a:t>Kubernetes</a:t>
+            </a:r>
+            <a:endParaRPr lang="ru-RU" dirty="0">
+              <a:latin typeface="Times New Roman" pitchFamily="18" charset="0"/>
+              <a:cs typeface="Times New Roman" pitchFamily="18" charset="0"/>
+            </a:endParaRPr>
           </a:p>
         </p:txBody>
       </p:sp>
@@ -23776,11 +25288,11 @@
           <a:p>
             <a:r>
               <a:rPr lang="ru-RU" sz="1000" dirty="0"/>
-              <a:t>Предпосылки появления</a:t>
+              <a:t>Первый </a:t>
             </a:r>
             <a:r>
               <a:rPr lang="en-US" sz="1000" dirty="0"/>
-              <a:t> docker-compose</a:t>
+              <a:t>Deployment</a:t>
             </a:r>
             <a:endParaRPr lang="ru-RU" dirty="0"/>
           </a:p>
@@ -24466,7 +25978,7 @@
 </p:sld>
 </file>
 
-<file path=ppt/slides/slide8.xml><?xml version="1.0" encoding="utf-8"?>
+<file path=ppt/slides/slide9.xml><?xml version="1.0" encoding="utf-8"?>
 <p:sld xmlns:a="http://schemas.openxmlformats.org/drawingml/2006/main" xmlns:r="http://schemas.openxmlformats.org/officeDocument/2006/relationships" xmlns:p="http://schemas.openxmlformats.org/presentationml/2006/main">
   <p:cSld>
     <p:spTree>
@@ -24545,8 +26057,19 @@
                 <a:latin typeface="Times New Roman" pitchFamily="18" charset="0"/>
                 <a:cs typeface="Times New Roman" pitchFamily="18" charset="0"/>
               </a:rPr>
-              <a:t>Докер-композиции и сеть</a:t>
-            </a:r>
+              <a:t>Основы </a:t>
+            </a:r>
+            <a:r>
+              <a:rPr lang="en-US" dirty="0">
+                <a:latin typeface="Times New Roman" pitchFamily="18" charset="0"/>
+                <a:cs typeface="Times New Roman" pitchFamily="18" charset="0"/>
+              </a:rPr>
+              <a:t>Kubernetes</a:t>
+            </a:r>
+            <a:endParaRPr lang="ru-RU" dirty="0">
+              <a:latin typeface="Times New Roman" pitchFamily="18" charset="0"/>
+              <a:cs typeface="Times New Roman" pitchFamily="18" charset="0"/>
+            </a:endParaRPr>
           </a:p>
         </p:txBody>
       </p:sp>
@@ -24573,11 +26096,11 @@
           <a:p>
             <a:r>
               <a:rPr lang="ru-RU" sz="1000" dirty="0"/>
-              <a:t>Предпосылки появления</a:t>
+              <a:t>Первый </a:t>
             </a:r>
             <a:r>
               <a:rPr lang="en-US" sz="1000" dirty="0"/>
-              <a:t> docker-compose</a:t>
+              <a:t>Service</a:t>
             </a:r>
             <a:endParaRPr lang="ru-RU" dirty="0"/>
           </a:p>
@@ -25197,626 +26720,6 @@
     <p:extLst>
       <p:ext uri="{BB962C8B-B14F-4D97-AF65-F5344CB8AC3E}">
         <p14:creationId xmlns:p14="http://schemas.microsoft.com/office/powerpoint/2010/main" val="654023518"/>
-      </p:ext>
-    </p:extLst>
-  </p:cSld>
-  <p:clrMapOvr>
-    <a:masterClrMapping/>
-  </p:clrMapOvr>
-</p:sld>
-</file>
-
-<file path=ppt/slides/slide9.xml><?xml version="1.0" encoding="utf-8"?>
-<p:sld xmlns:a="http://schemas.openxmlformats.org/drawingml/2006/main" xmlns:r="http://schemas.openxmlformats.org/officeDocument/2006/relationships" xmlns:p="http://schemas.openxmlformats.org/presentationml/2006/main">
-  <p:cSld>
-    <p:spTree>
-      <p:nvGrpSpPr>
-        <p:cNvPr id="1" name=""/>
-        <p:cNvGrpSpPr/>
-        <p:nvPr/>
-      </p:nvGrpSpPr>
-      <p:grpSpPr>
-        <a:xfrm>
-          <a:off x="0" y="0"/>
-          <a:ext cx="0" cy="0"/>
-          <a:chOff x="0" y="0"/>
-          <a:chExt cx="0" cy="0"/>
-        </a:xfrm>
-      </p:grpSpPr>
-      <p:sp>
-        <p:nvSpPr>
-          <p:cNvPr id="5" name="Текст 4">
-            <a:extLst>
-              <a:ext uri="{FF2B5EF4-FFF2-40B4-BE49-F238E27FC236}">
-                <a16:creationId xmlns:a16="http://schemas.microsoft.com/office/drawing/2014/main" id="{3EB29DC1-D5D4-FB41-9E2D-AA4750D0CC8B}"/>
-              </a:ext>
-            </a:extLst>
-          </p:cNvPr>
-          <p:cNvSpPr>
-            <a:spLocks noGrp="1"/>
-          </p:cNvSpPr>
-          <p:nvPr>
-            <p:ph type="body" sz="quarter" idx="13"/>
-          </p:nvPr>
-        </p:nvSpPr>
-        <p:spPr/>
-        <p:txBody>
-          <a:bodyPr/>
-          <a:lstStyle/>
-          <a:p>
-            <a:r>
-              <a:rPr lang="ru-RU" dirty="0"/>
-              <a:t>Промышленное развертывание серверных приложений</a:t>
-            </a:r>
-          </a:p>
-          <a:p>
-            <a:endParaRPr lang="ru-RU" dirty="0"/>
-          </a:p>
-        </p:txBody>
-      </p:sp>
-      <p:sp>
-        <p:nvSpPr>
-          <p:cNvPr id="6" name="Текст 5">
-            <a:extLst>
-              <a:ext uri="{FF2B5EF4-FFF2-40B4-BE49-F238E27FC236}">
-                <a16:creationId xmlns:a16="http://schemas.microsoft.com/office/drawing/2014/main" id="{B5B6DD1A-BEFA-D842-9B7A-78D7BD1A5259}"/>
-              </a:ext>
-            </a:extLst>
-          </p:cNvPr>
-          <p:cNvSpPr>
-            <a:spLocks noGrp="1"/>
-          </p:cNvSpPr>
-          <p:nvPr>
-            <p:ph type="body" sz="quarter" idx="14"/>
-          </p:nvPr>
-        </p:nvSpPr>
-        <p:spPr>
-          <a:xfrm>
-            <a:off x="3459162" y="548720"/>
-            <a:ext cx="2456115" cy="641451"/>
-          </a:xfrm>
-        </p:spPr>
-        <p:txBody>
-          <a:bodyPr/>
-          <a:lstStyle/>
-          <a:p>
-            <a:r>
-              <a:rPr lang="ru-RU" dirty="0">
-                <a:latin typeface="Times New Roman" pitchFamily="18" charset="0"/>
-                <a:cs typeface="Times New Roman" pitchFamily="18" charset="0"/>
-              </a:rPr>
-              <a:t>Докер-композиции и сеть</a:t>
-            </a:r>
-          </a:p>
-        </p:txBody>
-      </p:sp>
-      <p:sp>
-        <p:nvSpPr>
-          <p:cNvPr id="15" name="Текст 14">
-            <a:extLst>
-              <a:ext uri="{FF2B5EF4-FFF2-40B4-BE49-F238E27FC236}">
-                <a16:creationId xmlns:a16="http://schemas.microsoft.com/office/drawing/2014/main" id="{D41A0F8D-9767-4A5D-947A-34B08831DECE}"/>
-              </a:ext>
-            </a:extLst>
-          </p:cNvPr>
-          <p:cNvSpPr>
-            <a:spLocks noGrp="1"/>
-          </p:cNvSpPr>
-          <p:nvPr>
-            <p:ph type="body" sz="quarter" idx="15"/>
-          </p:nvPr>
-        </p:nvSpPr>
-        <p:spPr/>
-        <p:txBody>
-          <a:bodyPr/>
-          <a:lstStyle/>
-          <a:p>
-            <a:r>
-              <a:rPr lang="ru-RU" sz="1000" dirty="0"/>
-              <a:t>Предпосылки появления</a:t>
-            </a:r>
-            <a:r>
-              <a:rPr lang="en-US" sz="1000" dirty="0"/>
-              <a:t> docker-compose</a:t>
-            </a:r>
-            <a:endParaRPr lang="ru-RU" dirty="0"/>
-          </a:p>
-        </p:txBody>
-      </p:sp>
-      <p:sp>
-        <p:nvSpPr>
-          <p:cNvPr id="20" name="Заголовок 2">
-            <a:extLst>
-              <a:ext uri="{FF2B5EF4-FFF2-40B4-BE49-F238E27FC236}">
-                <a16:creationId xmlns:a16="http://schemas.microsoft.com/office/drawing/2014/main" id="{EB3254AC-E053-4C4B-B7AA-603BB6FF23A1}"/>
-              </a:ext>
-            </a:extLst>
-          </p:cNvPr>
-          <p:cNvSpPr>
-            <a:spLocks noGrp="1"/>
-          </p:cNvSpPr>
-          <p:nvPr>
-            <p:ph type="title"/>
-          </p:nvPr>
-        </p:nvSpPr>
-        <p:spPr>
-          <a:xfrm>
-            <a:off x="585897" y="1405055"/>
-            <a:ext cx="11057955" cy="644244"/>
-          </a:xfrm>
-        </p:spPr>
-        <p:txBody>
-          <a:bodyPr>
-            <a:normAutofit/>
-          </a:bodyPr>
-          <a:lstStyle/>
-          <a:p>
-            <a:r>
-              <a:rPr lang="ru-RU" sz="2200" dirty="0"/>
-              <a:t>Ловим ошибку в сервисе</a:t>
-            </a:r>
-          </a:p>
-        </p:txBody>
-      </p:sp>
-      <p:sp>
-        <p:nvSpPr>
-          <p:cNvPr id="26" name="Текст 3">
-            <a:extLst>
-              <a:ext uri="{FF2B5EF4-FFF2-40B4-BE49-F238E27FC236}">
-                <a16:creationId xmlns:a16="http://schemas.microsoft.com/office/drawing/2014/main" id="{A660D6C9-AC61-42D4-A1A4-22F08E8A98E0}"/>
-              </a:ext>
-            </a:extLst>
-          </p:cNvPr>
-          <p:cNvSpPr txBox="1">
-            <a:spLocks/>
-          </p:cNvSpPr>
-          <p:nvPr/>
-        </p:nvSpPr>
-        <p:spPr>
-          <a:xfrm>
-            <a:off x="548148" y="1946429"/>
-            <a:ext cx="6538452" cy="4614391"/>
-          </a:xfrm>
-          <a:prstGeom prst="rect">
-            <a:avLst/>
-          </a:prstGeom>
-        </p:spPr>
-        <p:txBody>
-          <a:bodyPr vert="horz" lIns="0" tIns="0" rIns="0" bIns="45720" numCol="1" spcCol="252000" rtlCol="0">
-            <a:noAutofit/>
-          </a:bodyPr>
-          <a:lstStyle>
-            <a:lvl1pPr marL="0" marR="0" indent="0" algn="l" defTabSz="914400" rtl="0" eaLnBrk="1" fontAlgn="auto" latinLnBrk="0" hangingPunct="1">
-              <a:lnSpc>
-                <a:spcPct val="100000"/>
-              </a:lnSpc>
-              <a:spcBef>
-                <a:spcPts val="1200"/>
-              </a:spcBef>
-              <a:spcAft>
-                <a:spcPts val="0"/>
-              </a:spcAft>
-              <a:buClrTx/>
-              <a:buSzTx/>
-              <a:buFont typeface="Arial" panose="020B0604020202020204" pitchFamily="34" charset="0"/>
-              <a:buNone/>
-              <a:tabLst/>
-              <a:defRPr sz="1300" b="0" i="0" kern="1200">
-                <a:solidFill>
-                  <a:srgbClr val="0E2D69"/>
-                </a:solidFill>
-                <a:latin typeface="HSE Sans" panose="02000000000000000000" pitchFamily="2" charset="0"/>
-                <a:ea typeface="+mn-ea"/>
-                <a:cs typeface="+mn-cs"/>
-              </a:defRPr>
-            </a:lvl1pPr>
-            <a:lvl2pPr marL="457200" indent="0" algn="l" defTabSz="914400" rtl="0" eaLnBrk="1" latinLnBrk="0" hangingPunct="1">
-              <a:lnSpc>
-                <a:spcPct val="100000"/>
-              </a:lnSpc>
-              <a:spcBef>
-                <a:spcPts val="1000"/>
-              </a:spcBef>
-              <a:buFont typeface="Arial" panose="020B0604020202020204" pitchFamily="34" charset="0"/>
-              <a:buNone/>
-              <a:defRPr sz="1300" b="0" i="0" kern="1200">
-                <a:solidFill>
-                  <a:srgbClr val="0E2D69"/>
-                </a:solidFill>
-                <a:latin typeface="HSE Sans" panose="02000000000000000000" pitchFamily="2" charset="0"/>
-                <a:ea typeface="+mn-ea"/>
-                <a:cs typeface="+mn-cs"/>
-              </a:defRPr>
-            </a:lvl2pPr>
-            <a:lvl3pPr marL="914400" indent="0" algn="l" defTabSz="914400" rtl="0" eaLnBrk="1" latinLnBrk="0" hangingPunct="1">
-              <a:lnSpc>
-                <a:spcPct val="100000"/>
-              </a:lnSpc>
-              <a:spcBef>
-                <a:spcPts val="1000"/>
-              </a:spcBef>
-              <a:buFont typeface="Arial" panose="020B0604020202020204" pitchFamily="34" charset="0"/>
-              <a:buNone/>
-              <a:defRPr sz="1300" b="0" i="0" kern="1200">
-                <a:solidFill>
-                  <a:srgbClr val="0E2D69"/>
-                </a:solidFill>
-                <a:latin typeface="HSE Sans" panose="02000000000000000000" pitchFamily="2" charset="0"/>
-                <a:ea typeface="+mn-ea"/>
-                <a:cs typeface="+mn-cs"/>
-              </a:defRPr>
-            </a:lvl3pPr>
-            <a:lvl4pPr marL="1371600" indent="0" algn="l" defTabSz="914400" rtl="0" eaLnBrk="1" latinLnBrk="0" hangingPunct="1">
-              <a:lnSpc>
-                <a:spcPct val="100000"/>
-              </a:lnSpc>
-              <a:spcBef>
-                <a:spcPts val="1000"/>
-              </a:spcBef>
-              <a:buFont typeface="Arial" panose="020B0604020202020204" pitchFamily="34" charset="0"/>
-              <a:buNone/>
-              <a:defRPr sz="1300" b="0" i="0" kern="1200">
-                <a:solidFill>
-                  <a:srgbClr val="0E2D69"/>
-                </a:solidFill>
-                <a:latin typeface="HSE Sans" panose="02000000000000000000" pitchFamily="2" charset="0"/>
-                <a:ea typeface="+mn-ea"/>
-                <a:cs typeface="+mn-cs"/>
-              </a:defRPr>
-            </a:lvl4pPr>
-            <a:lvl5pPr marL="1828800" indent="0" algn="l" defTabSz="914400" rtl="0" eaLnBrk="1" latinLnBrk="0" hangingPunct="1">
-              <a:lnSpc>
-                <a:spcPct val="100000"/>
-              </a:lnSpc>
-              <a:spcBef>
-                <a:spcPts val="1000"/>
-              </a:spcBef>
-              <a:buFont typeface="Arial" panose="020B0604020202020204" pitchFamily="34" charset="0"/>
-              <a:buNone/>
-              <a:defRPr sz="1300" b="0" i="0" kern="1200">
-                <a:solidFill>
-                  <a:srgbClr val="0E2D69"/>
-                </a:solidFill>
-                <a:latin typeface="HSE Sans" panose="02000000000000000000" pitchFamily="2" charset="0"/>
-                <a:ea typeface="+mn-ea"/>
-                <a:cs typeface="+mn-cs"/>
-              </a:defRPr>
-            </a:lvl5pPr>
-            <a:lvl6pPr marL="2514600" indent="-228600" algn="l" defTabSz="914400" rtl="0" eaLnBrk="1" latinLnBrk="0" hangingPunct="1">
-              <a:lnSpc>
-                <a:spcPct val="90000"/>
-              </a:lnSpc>
-              <a:spcBef>
-                <a:spcPts val="500"/>
-              </a:spcBef>
-              <a:buFont typeface="Arial" panose="020B0604020202020204" pitchFamily="34" charset="0"/>
-              <a:buChar char="•"/>
-              <a:defRPr sz="1800" kern="1200">
-                <a:solidFill>
-                  <a:schemeClr val="tx1"/>
-                </a:solidFill>
-                <a:latin typeface="+mn-lt"/>
-                <a:ea typeface="+mn-ea"/>
-                <a:cs typeface="+mn-cs"/>
-              </a:defRPr>
-            </a:lvl6pPr>
-            <a:lvl7pPr marL="2971800" indent="-228600" algn="l" defTabSz="914400" rtl="0" eaLnBrk="1" latinLnBrk="0" hangingPunct="1">
-              <a:lnSpc>
-                <a:spcPct val="90000"/>
-              </a:lnSpc>
-              <a:spcBef>
-                <a:spcPts val="500"/>
-              </a:spcBef>
-              <a:buFont typeface="Arial" panose="020B0604020202020204" pitchFamily="34" charset="0"/>
-              <a:buChar char="•"/>
-              <a:defRPr sz="1800" kern="1200">
-                <a:solidFill>
-                  <a:schemeClr val="tx1"/>
-                </a:solidFill>
-                <a:latin typeface="+mn-lt"/>
-                <a:ea typeface="+mn-ea"/>
-                <a:cs typeface="+mn-cs"/>
-              </a:defRPr>
-            </a:lvl7pPr>
-            <a:lvl8pPr marL="3429000" indent="-228600" algn="l" defTabSz="914400" rtl="0" eaLnBrk="1" latinLnBrk="0" hangingPunct="1">
-              <a:lnSpc>
-                <a:spcPct val="90000"/>
-              </a:lnSpc>
-              <a:spcBef>
-                <a:spcPts val="500"/>
-              </a:spcBef>
-              <a:buFont typeface="Arial" panose="020B0604020202020204" pitchFamily="34" charset="0"/>
-              <a:buChar char="•"/>
-              <a:defRPr sz="1800" kern="1200">
-                <a:solidFill>
-                  <a:schemeClr val="tx1"/>
-                </a:solidFill>
-                <a:latin typeface="+mn-lt"/>
-                <a:ea typeface="+mn-ea"/>
-                <a:cs typeface="+mn-cs"/>
-              </a:defRPr>
-            </a:lvl8pPr>
-            <a:lvl9pPr marL="3886200" indent="-228600" algn="l" defTabSz="914400" rtl="0" eaLnBrk="1" latinLnBrk="0" hangingPunct="1">
-              <a:lnSpc>
-                <a:spcPct val="90000"/>
-              </a:lnSpc>
-              <a:spcBef>
-                <a:spcPts val="500"/>
-              </a:spcBef>
-              <a:buFont typeface="Arial" panose="020B0604020202020204" pitchFamily="34" charset="0"/>
-              <a:buChar char="•"/>
-              <a:defRPr sz="1800" kern="1200">
-                <a:solidFill>
-                  <a:schemeClr val="tx1"/>
-                </a:solidFill>
-                <a:latin typeface="+mn-lt"/>
-                <a:ea typeface="+mn-ea"/>
-                <a:cs typeface="+mn-cs"/>
-              </a:defRPr>
-            </a:lvl9pPr>
-          </a:lstStyle>
-          <a:p>
-            <a:pPr>
-              <a:spcBef>
-                <a:spcPts val="600"/>
-              </a:spcBef>
-              <a:spcAft>
-                <a:spcPts val="600"/>
-              </a:spcAft>
-            </a:pPr>
-            <a:r>
-              <a:rPr lang="en-US" sz="1800" dirty="0">
-                <a:solidFill>
-                  <a:schemeClr val="bg1"/>
-                </a:solidFill>
-                <a:highlight>
-                  <a:srgbClr val="000000"/>
-                </a:highlight>
-                <a:latin typeface="Times New Roman" pitchFamily="18" charset="0"/>
-                <a:cs typeface="Times New Roman" pitchFamily="18" charset="0"/>
-              </a:rPr>
-              <a:t>kubectl delete svc web</a:t>
-            </a:r>
-          </a:p>
-          <a:p>
-            <a:pPr>
-              <a:spcBef>
-                <a:spcPts val="600"/>
-              </a:spcBef>
-              <a:spcAft>
-                <a:spcPts val="600"/>
-              </a:spcAft>
-            </a:pPr>
-            <a:r>
-              <a:rPr lang="en-US" sz="1800" dirty="0">
-                <a:solidFill>
-                  <a:schemeClr val="bg1"/>
-                </a:solidFill>
-                <a:highlight>
-                  <a:srgbClr val="000000"/>
-                </a:highlight>
-                <a:latin typeface="Times New Roman" pitchFamily="18" charset="0"/>
-                <a:cs typeface="Times New Roman" pitchFamily="18" charset="0"/>
-              </a:rPr>
-              <a:t>kubectl apply -f </a:t>
-            </a:r>
-            <a:r>
-              <a:rPr lang="en-US" sz="1800" dirty="0" err="1">
-                <a:solidFill>
-                  <a:schemeClr val="bg1"/>
-                </a:solidFill>
-                <a:highlight>
-                  <a:srgbClr val="000000"/>
-                </a:highlight>
-                <a:latin typeface="Times New Roman" pitchFamily="18" charset="0"/>
-                <a:cs typeface="Times New Roman" pitchFamily="18" charset="0"/>
-              </a:rPr>
-              <a:t>service.yaml</a:t>
-            </a:r>
-            <a:endParaRPr lang="en-US" sz="1800" dirty="0">
-              <a:solidFill>
-                <a:schemeClr val="bg1"/>
-              </a:solidFill>
-              <a:highlight>
-                <a:srgbClr val="000000"/>
-              </a:highlight>
-              <a:latin typeface="Times New Roman" pitchFamily="18" charset="0"/>
-              <a:cs typeface="Times New Roman" pitchFamily="18" charset="0"/>
-            </a:endParaRPr>
-          </a:p>
-          <a:p>
-            <a:pPr>
-              <a:spcBef>
-                <a:spcPts val="600"/>
-              </a:spcBef>
-              <a:spcAft>
-                <a:spcPts val="600"/>
-              </a:spcAft>
-            </a:pPr>
-            <a:r>
-              <a:rPr lang="en-US" sz="1800" dirty="0">
-                <a:solidFill>
-                  <a:schemeClr val="bg1"/>
-                </a:solidFill>
-                <a:highlight>
-                  <a:srgbClr val="000000"/>
-                </a:highlight>
-                <a:latin typeface="Times New Roman" pitchFamily="18" charset="0"/>
-                <a:cs typeface="Times New Roman" pitchFamily="18" charset="0"/>
-              </a:rPr>
-              <a:t>kubectl get svc web-serv</a:t>
-            </a:r>
-          </a:p>
-          <a:p>
-            <a:pPr>
-              <a:spcBef>
-                <a:spcPts val="600"/>
-              </a:spcBef>
-              <a:spcAft>
-                <a:spcPts val="600"/>
-              </a:spcAft>
-            </a:pPr>
-            <a:r>
-              <a:rPr lang="ru-RU" sz="1800" dirty="0">
-                <a:latin typeface="Times New Roman" pitchFamily="18" charset="0"/>
-                <a:cs typeface="Times New Roman" pitchFamily="18" charset="0"/>
-              </a:rPr>
-              <a:t>Проверим</a:t>
-            </a:r>
-            <a:r>
-              <a:rPr lang="en-US" sz="1800" dirty="0">
-                <a:latin typeface="Times New Roman" pitchFamily="18" charset="0"/>
-                <a:cs typeface="Times New Roman" pitchFamily="18" charset="0"/>
-              </a:rPr>
-              <a:t>:</a:t>
-            </a:r>
-          </a:p>
-          <a:p>
-            <a:pPr>
-              <a:spcBef>
-                <a:spcPts val="600"/>
-              </a:spcBef>
-              <a:spcAft>
-                <a:spcPts val="600"/>
-              </a:spcAft>
-            </a:pPr>
-            <a:r>
-              <a:rPr lang="en-US" sz="1800" dirty="0">
-                <a:solidFill>
-                  <a:schemeClr val="bg1"/>
-                </a:solidFill>
-                <a:highlight>
-                  <a:srgbClr val="000000"/>
-                </a:highlight>
-                <a:latin typeface="Times New Roman" pitchFamily="18" charset="0"/>
-                <a:cs typeface="Times New Roman" pitchFamily="18" charset="0"/>
-              </a:rPr>
-              <a:t>kubectl run test-client --image=</a:t>
-            </a:r>
-            <a:r>
-              <a:rPr lang="en-US" sz="1800" dirty="0" err="1">
-                <a:solidFill>
-                  <a:schemeClr val="bg1"/>
-                </a:solidFill>
-                <a:highlight>
-                  <a:srgbClr val="000000"/>
-                </a:highlight>
-                <a:latin typeface="Times New Roman" pitchFamily="18" charset="0"/>
-                <a:cs typeface="Times New Roman" pitchFamily="18" charset="0"/>
-              </a:rPr>
-              <a:t>curlimages</a:t>
-            </a:r>
-            <a:r>
-              <a:rPr lang="en-US" sz="1800" dirty="0">
-                <a:solidFill>
-                  <a:schemeClr val="bg1"/>
-                </a:solidFill>
-                <a:highlight>
-                  <a:srgbClr val="000000"/>
-                </a:highlight>
-                <a:latin typeface="Times New Roman" pitchFamily="18" charset="0"/>
-                <a:cs typeface="Times New Roman" pitchFamily="18" charset="0"/>
-              </a:rPr>
-              <a:t>/curl --rm -it --restart=Never -- curl -s http://web-serv</a:t>
-            </a:r>
-          </a:p>
-          <a:p>
-            <a:pPr>
-              <a:spcBef>
-                <a:spcPts val="600"/>
-              </a:spcBef>
-              <a:spcAft>
-                <a:spcPts val="600"/>
-              </a:spcAft>
-            </a:pPr>
-            <a:r>
-              <a:rPr lang="ru-RU" sz="1800" dirty="0">
-                <a:latin typeface="Times New Roman" pitchFamily="18" charset="0"/>
-                <a:cs typeface="Times New Roman" pitchFamily="18" charset="0"/>
-              </a:rPr>
-              <a:t>Может поды упали?</a:t>
-            </a:r>
-          </a:p>
-          <a:p>
-            <a:pPr>
-              <a:spcBef>
-                <a:spcPts val="600"/>
-              </a:spcBef>
-              <a:spcAft>
-                <a:spcPts val="600"/>
-              </a:spcAft>
-            </a:pPr>
-            <a:r>
-              <a:rPr lang="en-US" sz="1800" dirty="0">
-                <a:solidFill>
-                  <a:schemeClr val="bg1"/>
-                </a:solidFill>
-                <a:highlight>
-                  <a:srgbClr val="000000"/>
-                </a:highlight>
-                <a:latin typeface="Times New Roman" pitchFamily="18" charset="0"/>
-                <a:cs typeface="Times New Roman" pitchFamily="18" charset="0"/>
-              </a:rPr>
-              <a:t>kubectl get pods -o wide</a:t>
-            </a:r>
-          </a:p>
-          <a:p>
-            <a:pPr>
-              <a:spcBef>
-                <a:spcPts val="600"/>
-              </a:spcBef>
-              <a:spcAft>
-                <a:spcPts val="600"/>
-              </a:spcAft>
-            </a:pPr>
-            <a:r>
-              <a:rPr lang="ru-RU" sz="1800" b="1" dirty="0">
-                <a:latin typeface="Times New Roman" pitchFamily="18" charset="0"/>
-                <a:cs typeface="Times New Roman" pitchFamily="18" charset="0"/>
-              </a:rPr>
-              <a:t>Поды живы, ищем дальше…</a:t>
-            </a:r>
-            <a:endParaRPr lang="en-US" sz="1800" b="1" dirty="0">
-              <a:latin typeface="Times New Roman" pitchFamily="18" charset="0"/>
-              <a:cs typeface="Times New Roman" pitchFamily="18" charset="0"/>
-            </a:endParaRPr>
-          </a:p>
-        </p:txBody>
-      </p:sp>
-      <p:pic>
-        <p:nvPicPr>
-          <p:cNvPr id="4" name="Рисунок 3">
-            <a:extLst>
-              <a:ext uri="{FF2B5EF4-FFF2-40B4-BE49-F238E27FC236}">
-                <a16:creationId xmlns:a16="http://schemas.microsoft.com/office/drawing/2014/main" id="{C72839DF-1C6A-40D6-907C-8AD3D8073651}"/>
-              </a:ext>
-            </a:extLst>
-          </p:cNvPr>
-          <p:cNvPicPr>
-            <a:picLocks noChangeAspect="1"/>
-          </p:cNvPicPr>
-          <p:nvPr/>
-        </p:nvPicPr>
-        <p:blipFill>
-          <a:blip r:embed="rId2"/>
-          <a:stretch>
-            <a:fillRect/>
-          </a:stretch>
-        </p:blipFill>
-        <p:spPr>
-          <a:xfrm>
-            <a:off x="7475856" y="1455359"/>
-            <a:ext cx="3778740" cy="3997586"/>
-          </a:xfrm>
-          <a:prstGeom prst="rect">
-            <a:avLst/>
-          </a:prstGeom>
-        </p:spPr>
-      </p:pic>
-    </p:spTree>
-    <p:extLst>
-      <p:ext uri="{BB962C8B-B14F-4D97-AF65-F5344CB8AC3E}">
-        <p14:creationId xmlns:p14="http://schemas.microsoft.com/office/powerpoint/2010/main" val="3659584908"/>
       </p:ext>
     </p:extLst>
   </p:cSld>
@@ -26433,17 +27336,6 @@
 </file>
 
 <file path=customXml/item1.xml><?xml version="1.0" encoding="utf-8"?>
-<p:properties xmlns:p="http://schemas.microsoft.com/office/2006/metadata/properties" xmlns:xsi="http://www.w3.org/2001/XMLSchema-instance" xmlns:pc="http://schemas.microsoft.com/office/infopath/2007/PartnerControls">
-  <documentManagement>
-    <lcf76f155ced4ddcb4097134ff3c332f xmlns="bb739a2f-a689-468a-89a2-73972a296307">
-      <Terms xmlns="http://schemas.microsoft.com/office/infopath/2007/PartnerControls"/>
-    </lcf76f155ced4ddcb4097134ff3c332f>
-    <TaxCatchAll xmlns="d7a0ef7b-a4f6-4e65-b83c-7dbdba30d41e" xsi:nil="true"/>
-  </documentManagement>
-</p:properties>
-</file>
-
-<file path=customXml/item2.xml><?xml version="1.0" encoding="utf-8"?>
 <ct:contentTypeSchema xmlns:ct="http://schemas.microsoft.com/office/2006/metadata/contentType" xmlns:ma="http://schemas.microsoft.com/office/2006/metadata/properties/metaAttributes" ct:_="" ma:_="" ma:contentTypeName="Документ" ma:contentTypeID="0x010100E8F20F2384D3D04CA8B8E1E250982FD1" ma:contentTypeVersion="16" ma:contentTypeDescription="Создание документа." ma:contentTypeScope="" ma:versionID="28665edab9a3ead5c83fd3ecb67189db">
   <xsd:schema xmlns:xsd="http://www.w3.org/2001/XMLSchema" xmlns:xs="http://www.w3.org/2001/XMLSchema" xmlns:p="http://schemas.microsoft.com/office/2006/metadata/properties" xmlns:ns2="bb739a2f-a689-468a-89a2-73972a296307" xmlns:ns3="d7a0ef7b-a4f6-4e65-b83c-7dbdba30d41e" targetNamespace="http://schemas.microsoft.com/office/2006/metadata/properties" ma:root="true" ma:fieldsID="3034587aebd71cb0ebe2e2dc1c6e9fa2" ns2:_="" ns3:_="">
     <xsd:import namespace="bb739a2f-a689-468a-89a2-73972a296307"/>
@@ -26686,6 +27578,17 @@
 </ct:contentTypeSchema>
 </file>
 
+<file path=customXml/item2.xml><?xml version="1.0" encoding="utf-8"?>
+<p:properties xmlns:p="http://schemas.microsoft.com/office/2006/metadata/properties" xmlns:xsi="http://www.w3.org/2001/XMLSchema-instance" xmlns:pc="http://schemas.microsoft.com/office/infopath/2007/PartnerControls">
+  <documentManagement>
+    <lcf76f155ced4ddcb4097134ff3c332f xmlns="bb739a2f-a689-468a-89a2-73972a296307">
+      <Terms xmlns="http://schemas.microsoft.com/office/infopath/2007/PartnerControls"/>
+    </lcf76f155ced4ddcb4097134ff3c332f>
+    <TaxCatchAll xmlns="d7a0ef7b-a4f6-4e65-b83c-7dbdba30d41e" xsi:nil="true"/>
+  </documentManagement>
+</p:properties>
+</file>
+
 <file path=customXml/item3.xml><?xml version="1.0" encoding="utf-8"?>
 <?mso-contentType ?>
 <FormTemplates xmlns="http://schemas.microsoft.com/sharepoint/v3/contenttype/forms">
@@ -26696,6 +27599,25 @@
 </file>
 
 <file path=customXml/itemProps1.xml><?xml version="1.0" encoding="utf-8"?>
+<ds:datastoreItem xmlns:ds="http://schemas.openxmlformats.org/officeDocument/2006/customXml" ds:itemID="{7E7EB8B4-4533-49D8-B147-0BB08BEFB72B}">
+  <ds:schemaRefs>
+    <ds:schemaRef ds:uri="http://schemas.microsoft.com/office/2006/metadata/contentType"/>
+    <ds:schemaRef ds:uri="http://schemas.microsoft.com/office/2006/metadata/properties/metaAttributes"/>
+    <ds:schemaRef ds:uri="http://www.w3.org/2001/XMLSchema"/>
+    <ds:schemaRef ds:uri="http://schemas.microsoft.com/office/2006/metadata/properties"/>
+    <ds:schemaRef ds:uri="bb739a2f-a689-468a-89a2-73972a296307"/>
+    <ds:schemaRef ds:uri="d7a0ef7b-a4f6-4e65-b83c-7dbdba30d41e"/>
+    <ds:schemaRef ds:uri="http://schemas.microsoft.com/office/2006/documentManagement/types"/>
+    <ds:schemaRef ds:uri="http://schemas.microsoft.com/office/infopath/2007/PartnerControls"/>
+    <ds:schemaRef ds:uri="http://schemas.openxmlformats.org/package/2006/metadata/core-properties"/>
+    <ds:schemaRef ds:uri="http://purl.org/dc/elements/1.1/"/>
+    <ds:schemaRef ds:uri="http://purl.org/dc/terms/"/>
+    <ds:schemaRef ds:uri="http://schemas.microsoft.com/internal/obd"/>
+  </ds:schemaRefs>
+</ds:datastoreItem>
+</file>
+
+<file path=customXml/itemProps2.xml><?xml version="1.0" encoding="utf-8"?>
 <ds:datastoreItem xmlns:ds="http://schemas.openxmlformats.org/officeDocument/2006/customXml" ds:itemID="{433DAF31-D8A6-49A0-9A5D-8B2EA5B1C511}">
   <ds:schemaRefs>
     <ds:schemaRef ds:uri="http://schemas.microsoft.com/office/2006/metadata/properties"/>
@@ -26714,25 +27636,6 @@
 </ds:datastoreItem>
 </file>
 
-<file path=customXml/itemProps2.xml><?xml version="1.0" encoding="utf-8"?>
-<ds:datastoreItem xmlns:ds="http://schemas.openxmlformats.org/officeDocument/2006/customXml" ds:itemID="{7E7EB8B4-4533-49D8-B147-0BB08BEFB72B}">
-  <ds:schemaRefs>
-    <ds:schemaRef ds:uri="http://schemas.microsoft.com/office/2006/metadata/contentType"/>
-    <ds:schemaRef ds:uri="http://schemas.microsoft.com/office/2006/metadata/properties/metaAttributes"/>
-    <ds:schemaRef ds:uri="http://www.w3.org/2001/XMLSchema"/>
-    <ds:schemaRef ds:uri="http://schemas.microsoft.com/office/2006/metadata/properties"/>
-    <ds:schemaRef ds:uri="bb739a2f-a689-468a-89a2-73972a296307"/>
-    <ds:schemaRef ds:uri="d7a0ef7b-a4f6-4e65-b83c-7dbdba30d41e"/>
-    <ds:schemaRef ds:uri="http://schemas.microsoft.com/office/2006/documentManagement/types"/>
-    <ds:schemaRef ds:uri="http://schemas.microsoft.com/office/infopath/2007/PartnerControls"/>
-    <ds:schemaRef ds:uri="http://schemas.openxmlformats.org/package/2006/metadata/core-properties"/>
-    <ds:schemaRef ds:uri="http://purl.org/dc/elements/1.1/"/>
-    <ds:schemaRef ds:uri="http://purl.org/dc/terms/"/>
-    <ds:schemaRef ds:uri="http://schemas.microsoft.com/internal/obd"/>
-  </ds:schemaRefs>
-</ds:datastoreItem>
-</file>
-
 <file path=customXml/itemProps3.xml><?xml version="1.0" encoding="utf-8"?>
 <ds:datastoreItem xmlns:ds="http://schemas.openxmlformats.org/officeDocument/2006/customXml" ds:itemID="{B34386AA-1848-4C75-B336-1053927CB025}">
   <ds:schemaRefs>
